--- a/slides/team-decks/Week3-Tue-jamins-2nd-team.pptx
+++ b/slides/team-decks/Week3-Tue-jamins-2nd-team.pptx
@@ -13,6 +13,8 @@
     <p:sldId id="261" r:id="rId13"/>
     <p:sldId id="262" r:id="rId14"/>
     <p:sldId id="263" r:id="rId15"/>
+    <p:sldId id="264" r:id="rId16"/>
+    <p:sldId id="265" r:id="rId17"/>
   </p:sldIdLst>
   <p:sldSz cx="12191695" cy="6858000" type="screen4x3"/>
   <p:notesSz cx="6858000" cy="9144000"/>
@@ -789,7 +791,7 @@
           <a:lstStyle/>
           <a:p>
             <a:r>
-              <a:t>Section header — the team's own slides go after this one.</a:t>
+              <a:t>John Maida's individually graded section. Their reflection lives in their own lane on the team FigJam canvas.</a:t>
             </a:r>
           </a:p>
         </p:txBody>
@@ -815,6 +817,146 @@
 </file>
 
 <file path=ppt/notesSlides/notesSlide6.xml><?xml version="1.0" encoding="utf-8"?>
+<p:notes xmlns:a="http://schemas.openxmlformats.org/drawingml/2006/main" xmlns:p="http://schemas.openxmlformats.org/presentationml/2006/main" xmlns:r="http://schemas.openxmlformats.org/officeDocument/2006/relationships">
+  <p:cSld>
+    <p:spTree>
+      <p:nvGrpSpPr>
+        <p:cNvPr id="1" name=""/>
+        <p:cNvGrpSpPr/>
+        <p:nvPr/>
+      </p:nvGrpSpPr>
+      <p:grpSpPr>
+        <a:xfrm>
+          <a:off x="0" y="0"/>
+          <a:ext cx="0" cy="0"/>
+          <a:chOff x="0" y="0"/>
+          <a:chExt cx="0" cy="0"/>
+        </a:xfrm>
+      </p:grpSpPr>
+      <p:sp>
+        <p:nvSpPr>
+          <p:cNvPr id="2" name="Slide Image Placeholder 1"/>
+          <p:cNvSpPr>
+            <a:spLocks noGrp="1"/>
+          </p:cNvSpPr>
+          <p:nvPr>
+            <p:ph type="sldImg" idx="2"/>
+          </p:nvPr>
+        </p:nvSpPr>
+        <p:spPr/>
+      </p:sp>
+      <p:sp>
+        <p:nvSpPr>
+          <p:cNvPr id="3" name="Notes Placeholder 2"/>
+          <p:cNvSpPr>
+            <a:spLocks noGrp="1"/>
+          </p:cNvSpPr>
+          <p:nvPr>
+            <p:ph type="body" idx="3" sz="quarter"/>
+          </p:nvPr>
+        </p:nvSpPr>
+        <p:spPr/>
+        <p:txBody>
+          <a:bodyPr/>
+          <a:lstStyle/>
+          <a:p>
+            <a:r>
+              <a:t>Ajin Yohannan's individually graded section. Their reflection lives in their own lane on the team FigJam canvas.</a:t>
+            </a:r>
+          </a:p>
+        </p:txBody>
+      </p:sp>
+      <p:sp>
+        <p:nvSpPr>
+          <p:cNvPr id="4" name="Slide Number Placeholder 3"/>
+          <p:cNvSpPr>
+            <a:spLocks noGrp="1"/>
+          </p:cNvSpPr>
+          <p:nvPr>
+            <p:ph type="sldNum" idx="5" sz="quarter"/>
+          </p:nvPr>
+        </p:nvSpPr>
+        <p:spPr/>
+      </p:sp>
+    </p:spTree>
+  </p:cSld>
+  <p:clrMapOvr>
+    <a:masterClrMapping/>
+  </p:clrMapOvr>
+</p:notes>
+</file>
+
+<file path=ppt/notesSlides/notesSlide7.xml><?xml version="1.0" encoding="utf-8"?>
+<p:notes xmlns:a="http://schemas.openxmlformats.org/drawingml/2006/main" xmlns:p="http://schemas.openxmlformats.org/presentationml/2006/main" xmlns:r="http://schemas.openxmlformats.org/officeDocument/2006/relationships">
+  <p:cSld>
+    <p:spTree>
+      <p:nvGrpSpPr>
+        <p:cNvPr id="1" name=""/>
+        <p:cNvGrpSpPr/>
+        <p:nvPr/>
+      </p:nvGrpSpPr>
+      <p:grpSpPr>
+        <a:xfrm>
+          <a:off x="0" y="0"/>
+          <a:ext cx="0" cy="0"/>
+          <a:chOff x="0" y="0"/>
+          <a:chExt cx="0" cy="0"/>
+        </a:xfrm>
+      </p:grpSpPr>
+      <p:sp>
+        <p:nvSpPr>
+          <p:cNvPr id="2" name="Slide Image Placeholder 1"/>
+          <p:cNvSpPr>
+            <a:spLocks noGrp="1"/>
+          </p:cNvSpPr>
+          <p:nvPr>
+            <p:ph type="sldImg" idx="2"/>
+          </p:nvPr>
+        </p:nvSpPr>
+        <p:spPr/>
+      </p:sp>
+      <p:sp>
+        <p:nvSpPr>
+          <p:cNvPr id="3" name="Notes Placeholder 2"/>
+          <p:cNvSpPr>
+            <a:spLocks noGrp="1"/>
+          </p:cNvSpPr>
+          <p:nvPr>
+            <p:ph type="body" idx="3" sz="quarter"/>
+          </p:nvPr>
+        </p:nvSpPr>
+        <p:spPr/>
+        <p:txBody>
+          <a:bodyPr/>
+          <a:lstStyle/>
+          <a:p>
+            <a:r>
+              <a:t>Section header — the team's own slides go after this one.</a:t>
+            </a:r>
+          </a:p>
+        </p:txBody>
+      </p:sp>
+      <p:sp>
+        <p:nvSpPr>
+          <p:cNvPr id="4" name="Slide Number Placeholder 3"/>
+          <p:cNvSpPr>
+            <a:spLocks noGrp="1"/>
+          </p:cNvSpPr>
+          <p:nvPr>
+            <p:ph type="sldNum" idx="5" sz="quarter"/>
+          </p:nvPr>
+        </p:nvSpPr>
+        <p:spPr/>
+      </p:sp>
+    </p:spTree>
+  </p:cSld>
+  <p:clrMapOvr>
+    <a:masterClrMapping/>
+  </p:clrMapOvr>
+</p:notes>
+</file>
+
+<file path=ppt/notesSlides/notesSlide8.xml><?xml version="1.0" encoding="utf-8"?>
 <p:notes xmlns:a="http://schemas.openxmlformats.org/drawingml/2006/main" xmlns:p="http://schemas.openxmlformats.org/presentationml/2006/main" xmlns:r="http://schemas.openxmlformats.org/officeDocument/2006/relationships">
   <p:cSld>
     <p:spTree>
@@ -4129,6 +4271,355 @@
 </p:sld>
 </file>
 
+<file path=ppt/slides/slide10.xml><?xml version="1.0" encoding="utf-8"?>
+<p:sld xmlns:a="http://schemas.openxmlformats.org/drawingml/2006/main" xmlns:p="http://schemas.openxmlformats.org/presentationml/2006/main" xmlns:r="http://schemas.openxmlformats.org/officeDocument/2006/relationships">
+  <p:cSld>
+    <p:bg>
+      <p:bgPr>
+        <a:solidFill>
+          <a:srgbClr val="0B0E14"/>
+        </a:solidFill>
+        <a:effectLst/>
+      </p:bgPr>
+    </p:bg>
+    <p:spTree>
+      <p:nvGrpSpPr>
+        <p:cNvPr id="1" name=""/>
+        <p:cNvGrpSpPr/>
+        <p:nvPr/>
+      </p:nvGrpSpPr>
+      <p:grpSpPr/>
+      <p:sp>
+        <p:nvSpPr>
+          <p:cNvPr id="2" name="TextBox 1"/>
+          <p:cNvSpPr txBox="1"/>
+          <p:nvPr/>
+        </p:nvSpPr>
+        <p:spPr>
+          <a:xfrm>
+            <a:off x="640080" y="502920"/>
+            <a:ext cx="10058400" cy="365760"/>
+          </a:xfrm>
+          <a:prstGeom prst="rect">
+            <a:avLst/>
+          </a:prstGeom>
+          <a:noFill/>
+        </p:spPr>
+        <p:txBody>
+          <a:bodyPr wrap="square" anchor="t">
+            <a:spAutoFit/>
+          </a:bodyPr>
+          <a:lstStyle/>
+          <a:p>
+            <a:pPr algn="l">
+              <a:lnSpc>
+                <a:spcPct val="100000"/>
+              </a:lnSpc>
+            </a:pPr>
+            <a:r>
+              <a:rPr sz="1300" b="1">
+                <a:solidFill>
+                  <a:srgbClr val="00FF41"/>
+                </a:solidFill>
+                <a:latin typeface="Courier New"/>
+              </a:rPr>
+              <a:t>SOURCES</a:t>
+            </a:r>
+          </a:p>
+        </p:txBody>
+      </p:sp>
+      <p:sp>
+        <p:nvSpPr>
+          <p:cNvPr id="3" name="Rectangle 2"/>
+          <p:cNvSpPr/>
+          <p:nvPr/>
+        </p:nvSpPr>
+        <p:spPr>
+          <a:xfrm>
+            <a:off x="640080" y="932688"/>
+            <a:ext cx="822960" cy="73152"/>
+          </a:xfrm>
+          <a:prstGeom prst="rect">
+            <a:avLst/>
+          </a:prstGeom>
+          <a:solidFill>
+            <a:srgbClr val="00FF41"/>
+          </a:solidFill>
+          <a:ln>
+            <a:noFill/>
+          </a:ln>
+          <a:effectLst/>
+        </p:spPr>
+        <p:style>
+          <a:lnRef idx="1">
+            <a:schemeClr val="accent1"/>
+          </a:lnRef>
+          <a:fillRef idx="3">
+            <a:schemeClr val="accent1"/>
+          </a:fillRef>
+          <a:effectRef idx="2">
+            <a:schemeClr val="accent1"/>
+          </a:effectRef>
+          <a:fontRef idx="minor">
+            <a:schemeClr val="lt1"/>
+          </a:fontRef>
+        </p:style>
+        <p:txBody>
+          <a:bodyPr rtlCol="0" anchor="ctr"/>
+          <a:lstStyle/>
+          <a:p>
+            <a:pPr algn="ctr"/>
+          </a:p>
+        </p:txBody>
+      </p:sp>
+      <p:sp>
+        <p:nvSpPr>
+          <p:cNvPr id="4" name="TextBox 3"/>
+          <p:cNvSpPr txBox="1"/>
+          <p:nvPr/>
+        </p:nvSpPr>
+        <p:spPr>
+          <a:xfrm>
+            <a:off x="640080" y="1188720"/>
+            <a:ext cx="10972800" cy="914400"/>
+          </a:xfrm>
+          <a:prstGeom prst="rect">
+            <a:avLst/>
+          </a:prstGeom>
+          <a:noFill/>
+        </p:spPr>
+        <p:txBody>
+          <a:bodyPr wrap="square" anchor="t">
+            <a:spAutoFit/>
+          </a:bodyPr>
+          <a:lstStyle/>
+          <a:p>
+            <a:pPr algn="l">
+              <a:lnSpc>
+                <a:spcPct val="100000"/>
+              </a:lnSpc>
+            </a:pPr>
+            <a:r>
+              <a:rPr sz="3200" b="1">
+                <a:solidFill>
+                  <a:srgbClr val="F5F7FA"/>
+                </a:solidFill>
+                <a:latin typeface="Arial"/>
+              </a:rPr>
+              <a:t>What we read</a:t>
+            </a:r>
+          </a:p>
+        </p:txBody>
+      </p:sp>
+      <p:sp>
+        <p:nvSpPr>
+          <p:cNvPr id="5" name="TextBox 4"/>
+          <p:cNvSpPr txBox="1"/>
+          <p:nvPr/>
+        </p:nvSpPr>
+        <p:spPr>
+          <a:xfrm>
+            <a:off x="658368" y="2377440"/>
+            <a:ext cx="10881360" cy="3108960"/>
+          </a:xfrm>
+          <a:prstGeom prst="rect">
+            <a:avLst/>
+          </a:prstGeom>
+          <a:noFill/>
+        </p:spPr>
+        <p:txBody>
+          <a:bodyPr wrap="square" anchor="t">
+            <a:spAutoFit/>
+          </a:bodyPr>
+          <a:lstStyle/>
+          <a:p>
+            <a:pPr algn="l">
+              <a:lnSpc>
+                <a:spcPct val="145000"/>
+              </a:lnSpc>
+            </a:pPr>
+            <a:r>
+              <a:rPr sz="1700" b="1">
+                <a:solidFill>
+                  <a:srgbClr val="00FF41"/>
+                </a:solidFill>
+                <a:latin typeface="Arial"/>
+              </a:rPr>
+              <a:t>•  </a:t>
+            </a:r>
+            <a:r>
+              <a:rPr sz="1700" b="0">
+                <a:solidFill>
+                  <a:srgbClr val="8A94A6"/>
+                </a:solidFill>
+                <a:latin typeface="Arial"/>
+              </a:rPr>
+              <a:t>Author, Year. Title. Where it appeared.  —  what it found</a:t>
+            </a:r>
+          </a:p>
+          <a:p>
+            <a:pPr algn="l">
+              <a:lnSpc>
+                <a:spcPct val="145000"/>
+              </a:lnSpc>
+            </a:pPr>
+            <a:r>
+              <a:rPr sz="1700" b="1">
+                <a:solidFill>
+                  <a:srgbClr val="00FF41"/>
+                </a:solidFill>
+                <a:latin typeface="Arial"/>
+              </a:rPr>
+              <a:t>•  </a:t>
+            </a:r>
+            <a:r>
+              <a:rPr sz="1700" b="0">
+                <a:solidFill>
+                  <a:srgbClr val="8A94A6"/>
+                </a:solidFill>
+                <a:latin typeface="Arial"/>
+              </a:rPr>
+              <a:t>Author, Year. Title. Where it appeared.  —  what it found</a:t>
+            </a:r>
+          </a:p>
+          <a:p>
+            <a:pPr algn="l">
+              <a:lnSpc>
+                <a:spcPct val="145000"/>
+              </a:lnSpc>
+            </a:pPr>
+            <a:r>
+              <a:rPr sz="1700" b="1">
+                <a:solidFill>
+                  <a:srgbClr val="00FF41"/>
+                </a:solidFill>
+                <a:latin typeface="Arial"/>
+              </a:rPr>
+              <a:t>•  </a:t>
+            </a:r>
+            <a:r>
+              <a:rPr sz="1700" b="0">
+                <a:solidFill>
+                  <a:srgbClr val="8A94A6"/>
+                </a:solidFill>
+                <a:latin typeface="Arial"/>
+              </a:rPr>
+              <a:t>Author, Year. Title. Where it appeared.  —  what it found</a:t>
+            </a:r>
+          </a:p>
+          <a:p>
+            <a:pPr algn="l">
+              <a:lnSpc>
+                <a:spcPct val="145000"/>
+              </a:lnSpc>
+            </a:pPr>
+            <a:r>
+              <a:rPr sz="1700" b="1">
+                <a:solidFill>
+                  <a:srgbClr val="00FF41"/>
+                </a:solidFill>
+                <a:latin typeface="Arial"/>
+              </a:rPr>
+              <a:t>•  </a:t>
+            </a:r>
+            <a:r>
+              <a:rPr sz="1700" b="0">
+                <a:solidFill>
+                  <a:srgbClr val="8A94A6"/>
+                </a:solidFill>
+                <a:latin typeface="Arial"/>
+              </a:rPr>
+              <a:t>Author, Year. Title. Where it appeared.  —  what it found</a:t>
+            </a:r>
+          </a:p>
+        </p:txBody>
+      </p:sp>
+      <p:sp>
+        <p:nvSpPr>
+          <p:cNvPr id="6" name="TextBox 5"/>
+          <p:cNvSpPr txBox="1"/>
+          <p:nvPr/>
+        </p:nvSpPr>
+        <p:spPr>
+          <a:xfrm>
+            <a:off x="658368" y="5715000"/>
+            <a:ext cx="10881360" cy="365760"/>
+          </a:xfrm>
+          <a:prstGeom prst="rect">
+            <a:avLst/>
+          </a:prstGeom>
+          <a:noFill/>
+        </p:spPr>
+        <p:txBody>
+          <a:bodyPr wrap="square" anchor="t">
+            <a:spAutoFit/>
+          </a:bodyPr>
+          <a:lstStyle/>
+          <a:p>
+            <a:pPr algn="l">
+              <a:lnSpc>
+                <a:spcPct val="100000"/>
+              </a:lnSpc>
+            </a:pPr>
+            <a:r>
+              <a:rPr sz="1300" b="0">
+                <a:solidFill>
+                  <a:srgbClr val="5A6474"/>
+                </a:solidFill>
+                <a:latin typeface="Courier New"/>
+              </a:rPr>
+              <a:t>Real papers only — never invent a citation.</a:t>
+            </a:r>
+          </a:p>
+        </p:txBody>
+      </p:sp>
+      <p:sp>
+        <p:nvSpPr>
+          <p:cNvPr id="7" name="TextBox 6"/>
+          <p:cNvSpPr txBox="1"/>
+          <p:nvPr/>
+        </p:nvSpPr>
+        <p:spPr>
+          <a:xfrm>
+            <a:off x="640080" y="6355080"/>
+            <a:ext cx="10972800" cy="365760"/>
+          </a:xfrm>
+          <a:prstGeom prst="rect">
+            <a:avLst/>
+          </a:prstGeom>
+          <a:noFill/>
+        </p:spPr>
+        <p:txBody>
+          <a:bodyPr wrap="square" anchor="t">
+            <a:spAutoFit/>
+          </a:bodyPr>
+          <a:lstStyle/>
+          <a:p>
+            <a:pPr algn="l">
+              <a:lnSpc>
+                <a:spcPct val="100000"/>
+              </a:lnSpc>
+            </a:pPr>
+            <a:r>
+              <a:rPr sz="1000" b="0">
+                <a:solidFill>
+                  <a:srgbClr val="5A6474"/>
+                </a:solidFill>
+                <a:latin typeface="Courier New"/>
+              </a:rPr>
+              <a:t>Value Verification · TECHIE 1121 · Cornell Tech · Tue Jul 28</a:t>
+            </a:r>
+          </a:p>
+        </p:txBody>
+      </p:sp>
+    </p:spTree>
+  </p:cSld>
+  <p:clrMapOvr>
+    <a:masterClrMapping/>
+  </p:clrMapOvr>
+</p:sld>
+</file>
+
 <file path=ppt/slides/slide2.xml><?xml version="1.0" encoding="utf-8"?>
 <p:sld xmlns:a="http://schemas.openxmlformats.org/drawingml/2006/main" xmlns:p="http://schemas.openxmlformats.org/presentationml/2006/main" xmlns:r="http://schemas.openxmlformats.org/officeDocument/2006/relationships">
   <p:cSld>
@@ -4337,7 +4828,7 @@
                 </a:solidFill>
                 <a:latin typeface="Arial"/>
               </a:rPr>
-              <a:t>Add your own slides AFTER each header. Don't delete the headers.</a:t>
+              <a:t>Sections 01, 02, 04, 05 are the TEAM's. Section 03 has one named slide per person — that one is graded individually.</a:t>
             </a:r>
           </a:p>
           <a:p>
@@ -4362,7 +4853,7 @@
                 </a:solidFill>
                 <a:latin typeface="Arial"/>
               </a:rPr>
-              <a:t>Evidence beats assertion: screenshots, numbers, quotes from what you actually observed.</a:t>
+              <a:t>Add your own slides AFTER each header. Don't delete the headers.</a:t>
             </a:r>
           </a:p>
           <a:p>
@@ -4387,7 +4878,57 @@
                 </a:solidFill>
                 <a:latin typeface="Arial"/>
               </a:rPr>
+              <a:t>Evidence beats assertion: screenshots, numbers, quotes from what you actually observed.</a:t>
+            </a:r>
+          </a:p>
+          <a:p>
+            <a:pPr algn="l">
+              <a:lnSpc>
+                <a:spcPct val="130000"/>
+              </a:lnSpc>
+            </a:pPr>
+            <a:r>
+              <a:rPr sz="1900" b="1">
+                <a:solidFill>
+                  <a:srgbClr val="00FF41"/>
+                </a:solidFill>
+                <a:latin typeface="Arial"/>
+              </a:rPr>
+              <a:t>•  </a:t>
+            </a:r>
+            <a:r>
+              <a:rPr sz="1900" b="0">
+                <a:solidFill>
+                  <a:srgbClr val="F5F7FA"/>
+                </a:solidFill>
+                <a:latin typeface="Arial"/>
+              </a:rPr>
               <a:t>Real citations only — if you can't find the paper, leave the claim out.</a:t>
+            </a:r>
+          </a:p>
+          <a:p>
+            <a:pPr algn="l">
+              <a:lnSpc>
+                <a:spcPct val="130000"/>
+              </a:lnSpc>
+            </a:pPr>
+            <a:r>
+              <a:rPr sz="1900" b="1">
+                <a:solidFill>
+                  <a:srgbClr val="00FF41"/>
+                </a:solidFill>
+                <a:latin typeface="Arial"/>
+              </a:rPr>
+              <a:t>•  </a:t>
+            </a:r>
+            <a:r>
+              <a:rPr sz="1900" b="0">
+                <a:solidFill>
+                  <a:srgbClr val="F5F7FA"/>
+                </a:solidFill>
+                <a:latin typeface="Arial"/>
+              </a:rPr>
+              <a:t>Your reflection is NOT a document — it goes in your own lane on the team FigJam canvas.</a:t>
             </a:r>
           </a:p>
           <a:p>
@@ -5334,7 +5875,7 @@
                 </a:solidFill>
                 <a:latin typeface="Arial"/>
               </a:rPr>
-              <a:t>What WORKS in the current prototype — with evidence.</a:t>
+              <a:t>Each team member presents their OWN slide — the named slides that follow.</a:t>
             </a:r>
           </a:p>
           <a:p>
@@ -5359,7 +5900,7 @@
                 </a:solidFill>
                 <a:latin typeface="Arial"/>
               </a:rPr>
-              <a:t>What does NOT work — with evidence. An evidenced 'it doesn't' beats a hopeful 'it does'.</a:t>
+              <a:t>What WORKS and what does NOT — with evidence. An evidenced 'it doesn't' beats a hopeful 'it does'.</a:t>
             </a:r>
           </a:p>
           <a:p>
@@ -5456,14 +5997,53 @@
       <p:grpSpPr/>
       <p:sp>
         <p:nvSpPr>
-          <p:cNvPr id="2" name="Rectangle 1"/>
+          <p:cNvPr id="2" name="TextBox 1"/>
+          <p:cNvSpPr txBox="1"/>
+          <p:nvPr/>
+        </p:nvSpPr>
+        <p:spPr>
+          <a:xfrm>
+            <a:off x="640080" y="502920"/>
+            <a:ext cx="10058400" cy="365760"/>
+          </a:xfrm>
+          <a:prstGeom prst="rect">
+            <a:avLst/>
+          </a:prstGeom>
+          <a:noFill/>
+        </p:spPr>
+        <p:txBody>
+          <a:bodyPr wrap="square" anchor="t">
+            <a:spAutoFit/>
+          </a:bodyPr>
+          <a:lstStyle/>
+          <a:p>
+            <a:pPr algn="l">
+              <a:lnSpc>
+                <a:spcPct val="100000"/>
+              </a:lnSpc>
+            </a:pPr>
+            <a:r>
+              <a:rPr sz="1300" b="1">
+                <a:solidFill>
+                  <a:srgbClr val="00FF41"/>
+                </a:solidFill>
+                <a:latin typeface="Courier New"/>
+              </a:rPr>
+              <a:t>03.1  ·  YOUR SECTION (graded individually)</a:t>
+            </a:r>
+          </a:p>
+        </p:txBody>
+      </p:sp>
+      <p:sp>
+        <p:nvSpPr>
+          <p:cNvPr id="3" name="Rectangle 2"/>
           <p:cNvSpPr/>
           <p:nvPr/>
         </p:nvSpPr>
         <p:spPr>
           <a:xfrm>
-            <a:off x="0" y="0"/>
-            <a:ext cx="256032" cy="6858000"/>
+            <a:off x="640080" y="932688"/>
+            <a:ext cx="822960" cy="73152"/>
           </a:xfrm>
           <a:prstGeom prst="rect">
             <a:avLst/>
@@ -5500,14 +6080,14 @@
       </p:sp>
       <p:sp>
         <p:nvSpPr>
-          <p:cNvPr id="3" name="TextBox 2"/>
+          <p:cNvPr id="4" name="TextBox 3"/>
           <p:cNvSpPr txBox="1"/>
           <p:nvPr/>
         </p:nvSpPr>
         <p:spPr>
           <a:xfrm>
-            <a:off x="822960" y="1417320"/>
-            <a:ext cx="2743200" cy="1097280"/>
+            <a:off x="640080" y="1170432"/>
+            <a:ext cx="10972800" cy="914400"/>
           </a:xfrm>
           <a:prstGeom prst="rect">
             <a:avLst/>
@@ -5526,27 +6106,27 @@
               </a:lnSpc>
             </a:pPr>
             <a:r>
-              <a:rPr sz="6400" b="1">
-                <a:solidFill>
-                  <a:srgbClr val="00FF41"/>
-                </a:solidFill>
-                <a:latin typeface="Courier New"/>
-              </a:rPr>
-              <a:t>04</a:t>
-            </a:r>
-          </a:p>
-        </p:txBody>
-      </p:sp>
-      <p:sp>
-        <p:nvSpPr>
-          <p:cNvPr id="4" name="TextBox 3"/>
+              <a:rPr sz="3600" b="1">
+                <a:solidFill>
+                  <a:srgbClr val="F5F7FA"/>
+                </a:solidFill>
+                <a:latin typeface="Arial"/>
+              </a:rPr>
+              <a:t>John Maida</a:t>
+            </a:r>
+          </a:p>
+        </p:txBody>
+      </p:sp>
+      <p:sp>
+        <p:nvSpPr>
+          <p:cNvPr id="5" name="TextBox 4"/>
           <p:cNvSpPr txBox="1"/>
           <p:nvPr/>
         </p:nvSpPr>
         <p:spPr>
           <a:xfrm>
-            <a:off x="841248" y="2487168"/>
-            <a:ext cx="10424160" cy="457200"/>
+            <a:off x="658368" y="2286000"/>
+            <a:ext cx="10881360" cy="2834640"/>
           </a:xfrm>
           <a:prstGeom prst="rect">
             <a:avLst/>
@@ -5555,6 +6135,175 @@
         </p:spPr>
         <p:txBody>
           <a:bodyPr wrap="square" anchor="t">
+            <a:spAutoFit/>
+          </a:bodyPr>
+          <a:lstStyle/>
+          <a:p>
+            <a:pPr algn="l">
+              <a:lnSpc>
+                <a:spcPct val="134000"/>
+              </a:lnSpc>
+            </a:pPr>
+            <a:r>
+              <a:rPr sz="1900" b="1">
+                <a:solidFill>
+                  <a:srgbClr val="00FF41"/>
+                </a:solidFill>
+                <a:latin typeface="Arial"/>
+              </a:rPr>
+              <a:t>→  </a:t>
+            </a:r>
+            <a:r>
+              <a:rPr sz="1900" b="0">
+                <a:solidFill>
+                  <a:srgbClr val="F5F7FA"/>
+                </a:solidFill>
+                <a:latin typeface="Arial"/>
+              </a:rPr>
+              <a:t>The lens + method I ran, and why our reading demanded it</a:t>
+            </a:r>
+          </a:p>
+          <a:p>
+            <a:pPr algn="l">
+              <a:lnSpc>
+                <a:spcPct val="134000"/>
+              </a:lnSpc>
+            </a:pPr>
+            <a:r>
+              <a:rPr sz="1900" b="1">
+                <a:solidFill>
+                  <a:srgbClr val="00FF41"/>
+                </a:solidFill>
+                <a:latin typeface="Arial"/>
+              </a:rPr>
+              <a:t>→  </a:t>
+            </a:r>
+            <a:r>
+              <a:rPr sz="1900" b="0">
+                <a:solidFill>
+                  <a:srgbClr val="F5F7FA"/>
+                </a:solidFill>
+                <a:latin typeface="Arial"/>
+              </a:rPr>
+              <a:t>My evidence - what I actually observed or measured</a:t>
+            </a:r>
+          </a:p>
+          <a:p>
+            <a:pPr algn="l">
+              <a:lnSpc>
+                <a:spcPct val="134000"/>
+              </a:lnSpc>
+            </a:pPr>
+            <a:r>
+              <a:rPr sz="1900" b="1">
+                <a:solidFill>
+                  <a:srgbClr val="00FF41"/>
+                </a:solidFill>
+                <a:latin typeface="Arial"/>
+              </a:rPr>
+              <a:t>→  </a:t>
+            </a:r>
+            <a:r>
+              <a:rPr sz="1900" b="0">
+                <a:solidFill>
+                  <a:srgbClr val="F5F7FA"/>
+                </a:solidFill>
+                <a:latin typeface="Arial"/>
+              </a:rPr>
+              <a:t>What this says WORKS - and what does NOT</a:t>
+            </a:r>
+          </a:p>
+          <a:p>
+            <a:pPr algn="l">
+              <a:lnSpc>
+                <a:spcPct val="134000"/>
+              </a:lnSpc>
+            </a:pPr>
+            <a:r>
+              <a:rPr sz="1900" b="1">
+                <a:solidFill>
+                  <a:srgbClr val="00FF41"/>
+                </a:solidFill>
+                <a:latin typeface="Arial"/>
+              </a:rPr>
+              <a:t>→  </a:t>
+            </a:r>
+            <a:r>
+              <a:rPr sz="1900" b="0">
+                <a:solidFill>
+                  <a:srgbClr val="F5F7FA"/>
+                </a:solidFill>
+                <a:latin typeface="Arial"/>
+              </a:rPr>
+              <a:t>The paper I found (real citation) and what it changes</a:t>
+            </a:r>
+          </a:p>
+        </p:txBody>
+      </p:sp>
+      <p:sp>
+        <p:nvSpPr>
+          <p:cNvPr id="6" name="Rounded Rectangle 5"/>
+          <p:cNvSpPr/>
+          <p:nvPr/>
+        </p:nvSpPr>
+        <p:spPr>
+          <a:xfrm>
+            <a:off x="640080" y="5440680"/>
+            <a:ext cx="10881360" cy="658368"/>
+          </a:xfrm>
+          <a:prstGeom prst="roundRect">
+            <a:avLst/>
+          </a:prstGeom>
+          <a:solidFill>
+            <a:srgbClr val="151B26"/>
+          </a:solidFill>
+          <a:ln w="19050">
+            <a:solidFill>
+              <a:srgbClr val="00FF41"/>
+            </a:solidFill>
+          </a:ln>
+          <a:effectLst/>
+        </p:spPr>
+        <p:style>
+          <a:lnRef idx="1">
+            <a:schemeClr val="accent1"/>
+          </a:lnRef>
+          <a:fillRef idx="3">
+            <a:schemeClr val="accent1"/>
+          </a:fillRef>
+          <a:effectRef idx="2">
+            <a:schemeClr val="accent1"/>
+          </a:effectRef>
+          <a:fontRef idx="minor">
+            <a:schemeClr val="lt1"/>
+          </a:fontRef>
+        </p:style>
+        <p:txBody>
+          <a:bodyPr rtlCol="0" anchor="ctr"/>
+          <a:lstStyle/>
+          <a:p>
+            <a:pPr algn="ctr"/>
+          </a:p>
+        </p:txBody>
+      </p:sp>
+      <p:sp>
+        <p:nvSpPr>
+          <p:cNvPr id="7" name="TextBox 6"/>
+          <p:cNvSpPr txBox="1"/>
+          <p:nvPr/>
+        </p:nvSpPr>
+        <p:spPr>
+          <a:xfrm>
+            <a:off x="914400" y="5440680"/>
+            <a:ext cx="10332720" cy="658368"/>
+          </a:xfrm>
+          <a:prstGeom prst="rect">
+            <a:avLst/>
+          </a:prstGeom>
+          <a:noFill/>
+        </p:spPr>
+        <p:txBody>
+          <a:bodyPr wrap="square" anchor="ctr">
             <a:spAutoFit/>
           </a:bodyPr>
           <a:lstStyle/>
@@ -5565,157 +6314,29 @@
               </a:lnSpc>
             </a:pPr>
             <a:r>
+              <a:rPr sz="1600" b="1">
+                <a:solidFill>
+                  <a:srgbClr val="00FF41"/>
+                </a:solidFill>
+                <a:latin typeface="Arial"/>
+              </a:rPr>
+              <a:t>▸  </a:t>
+            </a:r>
+            <a:r>
               <a:rPr sz="1500" b="1">
                 <a:solidFill>
-                  <a:srgbClr val="00FF41"/>
-                </a:solidFill>
-                <a:latin typeface="Courier New"/>
-              </a:rPr>
-              <a:t>PART 3 — OUTLOOK</a:t>
-            </a:r>
-          </a:p>
-        </p:txBody>
-      </p:sp>
-      <p:sp>
-        <p:nvSpPr>
-          <p:cNvPr id="5" name="TextBox 4"/>
-          <p:cNvSpPr txBox="1"/>
-          <p:nvPr/>
-        </p:nvSpPr>
-        <p:spPr>
-          <a:xfrm>
-            <a:off x="804672" y="2971800"/>
-            <a:ext cx="10607040" cy="1097280"/>
-          </a:xfrm>
-          <a:prstGeom prst="rect">
-            <a:avLst/>
-          </a:prstGeom>
-          <a:noFill/>
-        </p:spPr>
-        <p:txBody>
-          <a:bodyPr wrap="square" anchor="t">
-            <a:spAutoFit/>
-          </a:bodyPr>
-          <a:lstStyle/>
-          <a:p>
-            <a:pPr algn="l">
-              <a:lnSpc>
-                <a:spcPct val="103000"/>
-              </a:lnSpc>
-            </a:pPr>
-            <a:r>
-              <a:rPr sz="3800" b="1">
-                <a:solidFill>
                   <a:srgbClr val="F5F7FA"/>
                 </a:solidFill>
                 <a:latin typeface="Arial"/>
               </a:rPr>
-              <a:t>What related research has already found</a:t>
-            </a:r>
-          </a:p>
-        </p:txBody>
-      </p:sp>
-      <p:sp>
-        <p:nvSpPr>
-          <p:cNvPr id="6" name="TextBox 5"/>
-          <p:cNvSpPr txBox="1"/>
-          <p:nvPr/>
-        </p:nvSpPr>
-        <p:spPr>
-          <a:xfrm>
-            <a:off x="841248" y="4224528"/>
-            <a:ext cx="10424160" cy="1737360"/>
-          </a:xfrm>
-          <a:prstGeom prst="rect">
-            <a:avLst/>
-          </a:prstGeom>
-          <a:noFill/>
-        </p:spPr>
-        <p:txBody>
-          <a:bodyPr wrap="square" anchor="t">
-            <a:spAutoFit/>
-          </a:bodyPr>
-          <a:lstStyle/>
-          <a:p>
-            <a:pPr algn="l">
-              <a:lnSpc>
-                <a:spcPct val="128000"/>
-              </a:lnSpc>
-            </a:pPr>
-            <a:r>
-              <a:rPr sz="1700" b="1">
-                <a:solidFill>
-                  <a:srgbClr val="00FF41"/>
-                </a:solidFill>
-                <a:latin typeface="Arial"/>
-              </a:rPr>
-              <a:t>→  </a:t>
-            </a:r>
-            <a:r>
-              <a:rPr sz="1700" b="0">
-                <a:solidFill>
-                  <a:srgbClr val="8A94A6"/>
-                </a:solidFill>
-                <a:latin typeface="Arial"/>
-              </a:rPr>
-              <a:t>What have others tried in order to move this value?</a:t>
-            </a:r>
-          </a:p>
-          <a:p>
-            <a:pPr algn="l">
-              <a:lnSpc>
-                <a:spcPct val="128000"/>
-              </a:lnSpc>
-            </a:pPr>
-            <a:r>
-              <a:rPr sz="1700" b="1">
-                <a:solidFill>
-                  <a:srgbClr val="00FF41"/>
-                </a:solidFill>
-                <a:latin typeface="Arial"/>
-              </a:rPr>
-              <a:t>→  </a:t>
-            </a:r>
-            <a:r>
-              <a:rPr sz="1700" b="0">
-                <a:solidFill>
-                  <a:srgbClr val="8A94A6"/>
-                </a:solidFill>
-                <a:latin typeface="Arial"/>
-              </a:rPr>
-              <a:t>What worked — and what failed?</a:t>
-            </a:r>
-          </a:p>
-          <a:p>
-            <a:pPr algn="l">
-              <a:lnSpc>
-                <a:spcPct val="128000"/>
-              </a:lnSpc>
-            </a:pPr>
-            <a:r>
-              <a:rPr sz="1700" b="1">
-                <a:solidFill>
-                  <a:srgbClr val="00FF41"/>
-                </a:solidFill>
-                <a:latin typeface="Arial"/>
-              </a:rPr>
-              <a:t>→  </a:t>
-            </a:r>
-            <a:r>
-              <a:rPr sz="1700" b="0">
-                <a:solidFill>
-                  <a:srgbClr val="8A94A6"/>
-                </a:solidFill>
-                <a:latin typeface="Arial"/>
-              </a:rPr>
-              <a:t>2–3 REAL sources. Never invent a citation.</a:t>
-            </a:r>
-          </a:p>
-        </p:txBody>
-      </p:sp>
-      <p:sp>
-        <p:nvSpPr>
-          <p:cNvPr id="7" name="TextBox 6"/>
+              <a:t>This slide is yours. Add more slides behind it if you need them - keep your name on them.</a:t>
+            </a:r>
+          </a:p>
+        </p:txBody>
+      </p:sp>
+      <p:sp>
+        <p:nvSpPr>
+          <p:cNvPr id="8" name="TextBox 7"/>
           <p:cNvSpPr txBox="1"/>
           <p:nvPr/>
         </p:nvSpPr>
@@ -5780,14 +6401,53 @@
       <p:grpSpPr/>
       <p:sp>
         <p:nvSpPr>
-          <p:cNvPr id="2" name="Rectangle 1"/>
+          <p:cNvPr id="2" name="TextBox 1"/>
+          <p:cNvSpPr txBox="1"/>
+          <p:nvPr/>
+        </p:nvSpPr>
+        <p:spPr>
+          <a:xfrm>
+            <a:off x="640080" y="502920"/>
+            <a:ext cx="10058400" cy="365760"/>
+          </a:xfrm>
+          <a:prstGeom prst="rect">
+            <a:avLst/>
+          </a:prstGeom>
+          <a:noFill/>
+        </p:spPr>
+        <p:txBody>
+          <a:bodyPr wrap="square" anchor="t">
+            <a:spAutoFit/>
+          </a:bodyPr>
+          <a:lstStyle/>
+          <a:p>
+            <a:pPr algn="l">
+              <a:lnSpc>
+                <a:spcPct val="100000"/>
+              </a:lnSpc>
+            </a:pPr>
+            <a:r>
+              <a:rPr sz="1300" b="1">
+                <a:solidFill>
+                  <a:srgbClr val="00FF41"/>
+                </a:solidFill>
+                <a:latin typeface="Courier New"/>
+              </a:rPr>
+              <a:t>03.2  ·  YOUR SECTION (graded individually)</a:t>
+            </a:r>
+          </a:p>
+        </p:txBody>
+      </p:sp>
+      <p:sp>
+        <p:nvSpPr>
+          <p:cNvPr id="3" name="Rectangle 2"/>
           <p:cNvSpPr/>
           <p:nvPr/>
         </p:nvSpPr>
         <p:spPr>
           <a:xfrm>
-            <a:off x="0" y="0"/>
-            <a:ext cx="256032" cy="6858000"/>
+            <a:off x="640080" y="932688"/>
+            <a:ext cx="822960" cy="73152"/>
           </a:xfrm>
           <a:prstGeom prst="rect">
             <a:avLst/>
@@ -5824,14 +6484,14 @@
       </p:sp>
       <p:sp>
         <p:nvSpPr>
-          <p:cNvPr id="3" name="TextBox 2"/>
+          <p:cNvPr id="4" name="TextBox 3"/>
           <p:cNvSpPr txBox="1"/>
           <p:nvPr/>
         </p:nvSpPr>
         <p:spPr>
           <a:xfrm>
-            <a:off x="822960" y="1417320"/>
-            <a:ext cx="2743200" cy="1097280"/>
+            <a:off x="640080" y="1170432"/>
+            <a:ext cx="10972800" cy="914400"/>
           </a:xfrm>
           <a:prstGeom prst="rect">
             <a:avLst/>
@@ -5850,27 +6510,27 @@
               </a:lnSpc>
             </a:pPr>
             <a:r>
-              <a:rPr sz="6400" b="1">
-                <a:solidFill>
-                  <a:srgbClr val="00FF41"/>
-                </a:solidFill>
-                <a:latin typeface="Courier New"/>
-              </a:rPr>
-              <a:t>05</a:t>
-            </a:r>
-          </a:p>
-        </p:txBody>
-      </p:sp>
-      <p:sp>
-        <p:nvSpPr>
-          <p:cNvPr id="4" name="TextBox 3"/>
+              <a:rPr sz="3600" b="1">
+                <a:solidFill>
+                  <a:srgbClr val="F5F7FA"/>
+                </a:solidFill>
+                <a:latin typeface="Arial"/>
+              </a:rPr>
+              <a:t>Ajin Yohannan</a:t>
+            </a:r>
+          </a:p>
+        </p:txBody>
+      </p:sp>
+      <p:sp>
+        <p:nvSpPr>
+          <p:cNvPr id="5" name="TextBox 4"/>
           <p:cNvSpPr txBox="1"/>
           <p:nvPr/>
         </p:nvSpPr>
         <p:spPr>
           <a:xfrm>
-            <a:off x="841248" y="2487168"/>
-            <a:ext cx="10424160" cy="457200"/>
+            <a:off x="658368" y="2286000"/>
+            <a:ext cx="10881360" cy="2834640"/>
           </a:xfrm>
           <a:prstGeom prst="rect">
             <a:avLst/>
@@ -5879,6 +6539,175 @@
         </p:spPr>
         <p:txBody>
           <a:bodyPr wrap="square" anchor="t">
+            <a:spAutoFit/>
+          </a:bodyPr>
+          <a:lstStyle/>
+          <a:p>
+            <a:pPr algn="l">
+              <a:lnSpc>
+                <a:spcPct val="134000"/>
+              </a:lnSpc>
+            </a:pPr>
+            <a:r>
+              <a:rPr sz="1900" b="1">
+                <a:solidFill>
+                  <a:srgbClr val="00FF41"/>
+                </a:solidFill>
+                <a:latin typeface="Arial"/>
+              </a:rPr>
+              <a:t>→  </a:t>
+            </a:r>
+            <a:r>
+              <a:rPr sz="1900" b="0">
+                <a:solidFill>
+                  <a:srgbClr val="F5F7FA"/>
+                </a:solidFill>
+                <a:latin typeface="Arial"/>
+              </a:rPr>
+              <a:t>The lens + method I ran, and why our reading demanded it</a:t>
+            </a:r>
+          </a:p>
+          <a:p>
+            <a:pPr algn="l">
+              <a:lnSpc>
+                <a:spcPct val="134000"/>
+              </a:lnSpc>
+            </a:pPr>
+            <a:r>
+              <a:rPr sz="1900" b="1">
+                <a:solidFill>
+                  <a:srgbClr val="00FF41"/>
+                </a:solidFill>
+                <a:latin typeface="Arial"/>
+              </a:rPr>
+              <a:t>→  </a:t>
+            </a:r>
+            <a:r>
+              <a:rPr sz="1900" b="0">
+                <a:solidFill>
+                  <a:srgbClr val="F5F7FA"/>
+                </a:solidFill>
+                <a:latin typeface="Arial"/>
+              </a:rPr>
+              <a:t>My evidence - what I actually observed or measured</a:t>
+            </a:r>
+          </a:p>
+          <a:p>
+            <a:pPr algn="l">
+              <a:lnSpc>
+                <a:spcPct val="134000"/>
+              </a:lnSpc>
+            </a:pPr>
+            <a:r>
+              <a:rPr sz="1900" b="1">
+                <a:solidFill>
+                  <a:srgbClr val="00FF41"/>
+                </a:solidFill>
+                <a:latin typeface="Arial"/>
+              </a:rPr>
+              <a:t>→  </a:t>
+            </a:r>
+            <a:r>
+              <a:rPr sz="1900" b="0">
+                <a:solidFill>
+                  <a:srgbClr val="F5F7FA"/>
+                </a:solidFill>
+                <a:latin typeface="Arial"/>
+              </a:rPr>
+              <a:t>What this says WORKS - and what does NOT</a:t>
+            </a:r>
+          </a:p>
+          <a:p>
+            <a:pPr algn="l">
+              <a:lnSpc>
+                <a:spcPct val="134000"/>
+              </a:lnSpc>
+            </a:pPr>
+            <a:r>
+              <a:rPr sz="1900" b="1">
+                <a:solidFill>
+                  <a:srgbClr val="00FF41"/>
+                </a:solidFill>
+                <a:latin typeface="Arial"/>
+              </a:rPr>
+              <a:t>→  </a:t>
+            </a:r>
+            <a:r>
+              <a:rPr sz="1900" b="0">
+                <a:solidFill>
+                  <a:srgbClr val="F5F7FA"/>
+                </a:solidFill>
+                <a:latin typeface="Arial"/>
+              </a:rPr>
+              <a:t>The paper I found (real citation) and what it changes</a:t>
+            </a:r>
+          </a:p>
+        </p:txBody>
+      </p:sp>
+      <p:sp>
+        <p:nvSpPr>
+          <p:cNvPr id="6" name="Rounded Rectangle 5"/>
+          <p:cNvSpPr/>
+          <p:nvPr/>
+        </p:nvSpPr>
+        <p:spPr>
+          <a:xfrm>
+            <a:off x="640080" y="5440680"/>
+            <a:ext cx="10881360" cy="658368"/>
+          </a:xfrm>
+          <a:prstGeom prst="roundRect">
+            <a:avLst/>
+          </a:prstGeom>
+          <a:solidFill>
+            <a:srgbClr val="151B26"/>
+          </a:solidFill>
+          <a:ln w="19050">
+            <a:solidFill>
+              <a:srgbClr val="00FF41"/>
+            </a:solidFill>
+          </a:ln>
+          <a:effectLst/>
+        </p:spPr>
+        <p:style>
+          <a:lnRef idx="1">
+            <a:schemeClr val="accent1"/>
+          </a:lnRef>
+          <a:fillRef idx="3">
+            <a:schemeClr val="accent1"/>
+          </a:fillRef>
+          <a:effectRef idx="2">
+            <a:schemeClr val="accent1"/>
+          </a:effectRef>
+          <a:fontRef idx="minor">
+            <a:schemeClr val="lt1"/>
+          </a:fontRef>
+        </p:style>
+        <p:txBody>
+          <a:bodyPr rtlCol="0" anchor="ctr"/>
+          <a:lstStyle/>
+          <a:p>
+            <a:pPr algn="ctr"/>
+          </a:p>
+        </p:txBody>
+      </p:sp>
+      <p:sp>
+        <p:nvSpPr>
+          <p:cNvPr id="7" name="TextBox 6"/>
+          <p:cNvSpPr txBox="1"/>
+          <p:nvPr/>
+        </p:nvSpPr>
+        <p:spPr>
+          <a:xfrm>
+            <a:off x="914400" y="5440680"/>
+            <a:ext cx="10332720" cy="658368"/>
+          </a:xfrm>
+          <a:prstGeom prst="rect">
+            <a:avLst/>
+          </a:prstGeom>
+          <a:noFill/>
+        </p:spPr>
+        <p:txBody>
+          <a:bodyPr wrap="square" anchor="ctr">
             <a:spAutoFit/>
           </a:bodyPr>
           <a:lstStyle/>
@@ -5889,157 +6718,29 @@
               </a:lnSpc>
             </a:pPr>
             <a:r>
+              <a:rPr sz="1600" b="1">
+                <a:solidFill>
+                  <a:srgbClr val="00FF41"/>
+                </a:solidFill>
+                <a:latin typeface="Arial"/>
+              </a:rPr>
+              <a:t>▸  </a:t>
+            </a:r>
+            <a:r>
               <a:rPr sz="1500" b="1">
                 <a:solidFill>
-                  <a:srgbClr val="00FF41"/>
-                </a:solidFill>
-                <a:latin typeface="Courier New"/>
-              </a:rPr>
-              <a:t>SO WHAT</a:t>
-            </a:r>
-          </a:p>
-        </p:txBody>
-      </p:sp>
-      <p:sp>
-        <p:nvSpPr>
-          <p:cNvPr id="5" name="TextBox 4"/>
-          <p:cNvSpPr txBox="1"/>
-          <p:nvPr/>
-        </p:nvSpPr>
-        <p:spPr>
-          <a:xfrm>
-            <a:off x="804672" y="2971800"/>
-            <a:ext cx="10607040" cy="1097280"/>
-          </a:xfrm>
-          <a:prstGeom prst="rect">
-            <a:avLst/>
-          </a:prstGeom>
-          <a:noFill/>
-        </p:spPr>
-        <p:txBody>
-          <a:bodyPr wrap="square" anchor="t">
-            <a:spAutoFit/>
-          </a:bodyPr>
-          <a:lstStyle/>
-          <a:p>
-            <a:pPr algn="l">
-              <a:lnSpc>
-                <a:spcPct val="103000"/>
-              </a:lnSpc>
-            </a:pPr>
-            <a:r>
-              <a:rPr sz="3800" b="1">
-                <a:solidFill>
                   <a:srgbClr val="F5F7FA"/>
                 </a:solidFill>
                 <a:latin typeface="Arial"/>
               </a:rPr>
-              <a:t>Our next design brief</a:t>
-            </a:r>
-          </a:p>
-        </p:txBody>
-      </p:sp>
-      <p:sp>
-        <p:nvSpPr>
-          <p:cNvPr id="6" name="TextBox 5"/>
-          <p:cNvSpPr txBox="1"/>
-          <p:nvPr/>
-        </p:nvSpPr>
-        <p:spPr>
-          <a:xfrm>
-            <a:off x="841248" y="4224528"/>
-            <a:ext cx="10424160" cy="1737360"/>
-          </a:xfrm>
-          <a:prstGeom prst="rect">
-            <a:avLst/>
-          </a:prstGeom>
-          <a:noFill/>
-        </p:spPr>
-        <p:txBody>
-          <a:bodyPr wrap="square" anchor="t">
-            <a:spAutoFit/>
-          </a:bodyPr>
-          <a:lstStyle/>
-          <a:p>
-            <a:pPr algn="l">
-              <a:lnSpc>
-                <a:spcPct val="128000"/>
-              </a:lnSpc>
-            </a:pPr>
-            <a:r>
-              <a:rPr sz="1700" b="1">
-                <a:solidFill>
-                  <a:srgbClr val="00FF41"/>
-                </a:solidFill>
-                <a:latin typeface="Arial"/>
-              </a:rPr>
-              <a:t>→  </a:t>
-            </a:r>
-            <a:r>
-              <a:rPr sz="1700" b="0">
-                <a:solidFill>
-                  <a:srgbClr val="8A94A6"/>
-                </a:solidFill>
-                <a:latin typeface="Arial"/>
-              </a:rPr>
-              <a:t>Verification is a beginning, not a verdict.</a:t>
-            </a:r>
-          </a:p>
-          <a:p>
-            <a:pPr algn="l">
-              <a:lnSpc>
-                <a:spcPct val="128000"/>
-              </a:lnSpc>
-            </a:pPr>
-            <a:r>
-              <a:rPr sz="1700" b="1">
-                <a:solidFill>
-                  <a:srgbClr val="00FF41"/>
-                </a:solidFill>
-                <a:latin typeface="Arial"/>
-              </a:rPr>
-              <a:t>→  </a:t>
-            </a:r>
-            <a:r>
-              <a:rPr sz="1700" b="0">
-                <a:solidFill>
-                  <a:srgbClr val="8A94A6"/>
-                </a:solidFill>
-                <a:latin typeface="Arial"/>
-              </a:rPr>
-              <a:t>What OTHER design could actually achieve this value?</a:t>
-            </a:r>
-          </a:p>
-          <a:p>
-            <a:pPr algn="l">
-              <a:lnSpc>
-                <a:spcPct val="128000"/>
-              </a:lnSpc>
-            </a:pPr>
-            <a:r>
-              <a:rPr sz="1700" b="1">
-                <a:solidFill>
-                  <a:srgbClr val="00FF41"/>
-                </a:solidFill>
-                <a:latin typeface="Arial"/>
-              </a:rPr>
-              <a:t>→  </a:t>
-            </a:r>
-            <a:r>
-              <a:rPr sz="1700" b="0">
-                <a:solidFill>
-                  <a:srgbClr val="8A94A6"/>
-                </a:solidFill>
-                <a:latin typeface="Arial"/>
-              </a:rPr>
-              <a:t>What should the next cycle discover? (You carry this into Wednesday.)</a:t>
-            </a:r>
-          </a:p>
-        </p:txBody>
-      </p:sp>
-      <p:sp>
-        <p:nvSpPr>
-          <p:cNvPr id="7" name="TextBox 6"/>
+              <a:t>This slide is yours. Add more slides behind it if you need them - keep your name on them.</a:t>
+            </a:r>
+          </a:p>
+        </p:txBody>
+      </p:sp>
+      <p:sp>
+        <p:nvSpPr>
+          <p:cNvPr id="8" name="TextBox 7"/>
           <p:cNvSpPr txBox="1"/>
           <p:nvPr/>
         </p:nvSpPr>
@@ -6104,53 +6805,14 @@
       <p:grpSpPr/>
       <p:sp>
         <p:nvSpPr>
-          <p:cNvPr id="2" name="TextBox 1"/>
-          <p:cNvSpPr txBox="1"/>
-          <p:nvPr/>
-        </p:nvSpPr>
-        <p:spPr>
-          <a:xfrm>
-            <a:off x="640080" y="502920"/>
-            <a:ext cx="10058400" cy="365760"/>
-          </a:xfrm>
-          <a:prstGeom prst="rect">
-            <a:avLst/>
-          </a:prstGeom>
-          <a:noFill/>
-        </p:spPr>
-        <p:txBody>
-          <a:bodyPr wrap="square" anchor="t">
-            <a:spAutoFit/>
-          </a:bodyPr>
-          <a:lstStyle/>
-          <a:p>
-            <a:pPr algn="l">
-              <a:lnSpc>
-                <a:spcPct val="100000"/>
-              </a:lnSpc>
-            </a:pPr>
-            <a:r>
-              <a:rPr sz="1300" b="1">
-                <a:solidFill>
-                  <a:srgbClr val="00FF41"/>
-                </a:solidFill>
-                <a:latin typeface="Courier New"/>
-              </a:rPr>
-              <a:t>SOURCES</a:t>
-            </a:r>
-          </a:p>
-        </p:txBody>
-      </p:sp>
-      <p:sp>
-        <p:nvSpPr>
-          <p:cNvPr id="3" name="Rectangle 2"/>
+          <p:cNvPr id="2" name="Rectangle 1"/>
           <p:cNvSpPr/>
           <p:nvPr/>
         </p:nvSpPr>
         <p:spPr>
           <a:xfrm>
-            <a:off x="640080" y="932688"/>
-            <a:ext cx="822960" cy="73152"/>
+            <a:off x="0" y="0"/>
+            <a:ext cx="256032" cy="6858000"/>
           </a:xfrm>
           <a:prstGeom prst="rect">
             <a:avLst/>
@@ -6187,14 +6849,14 @@
       </p:sp>
       <p:sp>
         <p:nvSpPr>
-          <p:cNvPr id="4" name="TextBox 3"/>
+          <p:cNvPr id="3" name="TextBox 2"/>
           <p:cNvSpPr txBox="1"/>
           <p:nvPr/>
         </p:nvSpPr>
         <p:spPr>
           <a:xfrm>
-            <a:off x="640080" y="1188720"/>
-            <a:ext cx="10972800" cy="914400"/>
+            <a:off x="822960" y="1417320"/>
+            <a:ext cx="2743200" cy="1097280"/>
           </a:xfrm>
           <a:prstGeom prst="rect">
             <a:avLst/>
@@ -6213,150 +6875,27 @@
               </a:lnSpc>
             </a:pPr>
             <a:r>
-              <a:rPr sz="3200" b="1">
-                <a:solidFill>
-                  <a:srgbClr val="F5F7FA"/>
-                </a:solidFill>
-                <a:latin typeface="Arial"/>
-              </a:rPr>
-              <a:t>What we read</a:t>
-            </a:r>
-          </a:p>
-        </p:txBody>
-      </p:sp>
-      <p:sp>
-        <p:nvSpPr>
-          <p:cNvPr id="5" name="TextBox 4"/>
+              <a:rPr sz="6400" b="1">
+                <a:solidFill>
+                  <a:srgbClr val="00FF41"/>
+                </a:solidFill>
+                <a:latin typeface="Courier New"/>
+              </a:rPr>
+              <a:t>04</a:t>
+            </a:r>
+          </a:p>
+        </p:txBody>
+      </p:sp>
+      <p:sp>
+        <p:nvSpPr>
+          <p:cNvPr id="4" name="TextBox 3"/>
           <p:cNvSpPr txBox="1"/>
           <p:nvPr/>
         </p:nvSpPr>
         <p:spPr>
           <a:xfrm>
-            <a:off x="658368" y="2377440"/>
-            <a:ext cx="10881360" cy="3108960"/>
-          </a:xfrm>
-          <a:prstGeom prst="rect">
-            <a:avLst/>
-          </a:prstGeom>
-          <a:noFill/>
-        </p:spPr>
-        <p:txBody>
-          <a:bodyPr wrap="square" anchor="t">
-            <a:spAutoFit/>
-          </a:bodyPr>
-          <a:lstStyle/>
-          <a:p>
-            <a:pPr algn="l">
-              <a:lnSpc>
-                <a:spcPct val="145000"/>
-              </a:lnSpc>
-            </a:pPr>
-            <a:r>
-              <a:rPr sz="1700" b="1">
-                <a:solidFill>
-                  <a:srgbClr val="00FF41"/>
-                </a:solidFill>
-                <a:latin typeface="Arial"/>
-              </a:rPr>
-              <a:t>•  </a:t>
-            </a:r>
-            <a:r>
-              <a:rPr sz="1700" b="0">
-                <a:solidFill>
-                  <a:srgbClr val="8A94A6"/>
-                </a:solidFill>
-                <a:latin typeface="Arial"/>
-              </a:rPr>
-              <a:t>Author, Year. Title. Where it appeared.  —  what it found</a:t>
-            </a:r>
-          </a:p>
-          <a:p>
-            <a:pPr algn="l">
-              <a:lnSpc>
-                <a:spcPct val="145000"/>
-              </a:lnSpc>
-            </a:pPr>
-            <a:r>
-              <a:rPr sz="1700" b="1">
-                <a:solidFill>
-                  <a:srgbClr val="00FF41"/>
-                </a:solidFill>
-                <a:latin typeface="Arial"/>
-              </a:rPr>
-              <a:t>•  </a:t>
-            </a:r>
-            <a:r>
-              <a:rPr sz="1700" b="0">
-                <a:solidFill>
-                  <a:srgbClr val="8A94A6"/>
-                </a:solidFill>
-                <a:latin typeface="Arial"/>
-              </a:rPr>
-              <a:t>Author, Year. Title. Where it appeared.  —  what it found</a:t>
-            </a:r>
-          </a:p>
-          <a:p>
-            <a:pPr algn="l">
-              <a:lnSpc>
-                <a:spcPct val="145000"/>
-              </a:lnSpc>
-            </a:pPr>
-            <a:r>
-              <a:rPr sz="1700" b="1">
-                <a:solidFill>
-                  <a:srgbClr val="00FF41"/>
-                </a:solidFill>
-                <a:latin typeface="Arial"/>
-              </a:rPr>
-              <a:t>•  </a:t>
-            </a:r>
-            <a:r>
-              <a:rPr sz="1700" b="0">
-                <a:solidFill>
-                  <a:srgbClr val="8A94A6"/>
-                </a:solidFill>
-                <a:latin typeface="Arial"/>
-              </a:rPr>
-              <a:t>Author, Year. Title. Where it appeared.  —  what it found</a:t>
-            </a:r>
-          </a:p>
-          <a:p>
-            <a:pPr algn="l">
-              <a:lnSpc>
-                <a:spcPct val="145000"/>
-              </a:lnSpc>
-            </a:pPr>
-            <a:r>
-              <a:rPr sz="1700" b="1">
-                <a:solidFill>
-                  <a:srgbClr val="00FF41"/>
-                </a:solidFill>
-                <a:latin typeface="Arial"/>
-              </a:rPr>
-              <a:t>•  </a:t>
-            </a:r>
-            <a:r>
-              <a:rPr sz="1700" b="0">
-                <a:solidFill>
-                  <a:srgbClr val="8A94A6"/>
-                </a:solidFill>
-                <a:latin typeface="Arial"/>
-              </a:rPr>
-              <a:t>Author, Year. Title. Where it appeared.  —  what it found</a:t>
-            </a:r>
-          </a:p>
-        </p:txBody>
-      </p:sp>
-      <p:sp>
-        <p:nvSpPr>
-          <p:cNvPr id="6" name="TextBox 5"/>
-          <p:cNvSpPr txBox="1"/>
-          <p:nvPr/>
-        </p:nvSpPr>
-        <p:spPr>
-          <a:xfrm>
-            <a:off x="658368" y="5715000"/>
-            <a:ext cx="10881360" cy="365760"/>
+            <a:off x="841248" y="2487168"/>
+            <a:ext cx="10424160" cy="457200"/>
           </a:xfrm>
           <a:prstGeom prst="rect">
             <a:avLst/>
@@ -6375,13 +6914,474 @@
               </a:lnSpc>
             </a:pPr>
             <a:r>
-              <a:rPr sz="1300" b="0">
+              <a:rPr sz="1500" b="1">
+                <a:solidFill>
+                  <a:srgbClr val="00FF41"/>
+                </a:solidFill>
+                <a:latin typeface="Courier New"/>
+              </a:rPr>
+              <a:t>PART 3 — OUTLOOK</a:t>
+            </a:r>
+          </a:p>
+        </p:txBody>
+      </p:sp>
+      <p:sp>
+        <p:nvSpPr>
+          <p:cNvPr id="5" name="TextBox 4"/>
+          <p:cNvSpPr txBox="1"/>
+          <p:nvPr/>
+        </p:nvSpPr>
+        <p:spPr>
+          <a:xfrm>
+            <a:off x="804672" y="2971800"/>
+            <a:ext cx="10607040" cy="1097280"/>
+          </a:xfrm>
+          <a:prstGeom prst="rect">
+            <a:avLst/>
+          </a:prstGeom>
+          <a:noFill/>
+        </p:spPr>
+        <p:txBody>
+          <a:bodyPr wrap="square" anchor="t">
+            <a:spAutoFit/>
+          </a:bodyPr>
+          <a:lstStyle/>
+          <a:p>
+            <a:pPr algn="l">
+              <a:lnSpc>
+                <a:spcPct val="103000"/>
+              </a:lnSpc>
+            </a:pPr>
+            <a:r>
+              <a:rPr sz="3800" b="1">
+                <a:solidFill>
+                  <a:srgbClr val="F5F7FA"/>
+                </a:solidFill>
+                <a:latin typeface="Arial"/>
+              </a:rPr>
+              <a:t>What related research has already found</a:t>
+            </a:r>
+          </a:p>
+        </p:txBody>
+      </p:sp>
+      <p:sp>
+        <p:nvSpPr>
+          <p:cNvPr id="6" name="TextBox 5"/>
+          <p:cNvSpPr txBox="1"/>
+          <p:nvPr/>
+        </p:nvSpPr>
+        <p:spPr>
+          <a:xfrm>
+            <a:off x="841248" y="4224528"/>
+            <a:ext cx="10424160" cy="1737360"/>
+          </a:xfrm>
+          <a:prstGeom prst="rect">
+            <a:avLst/>
+          </a:prstGeom>
+          <a:noFill/>
+        </p:spPr>
+        <p:txBody>
+          <a:bodyPr wrap="square" anchor="t">
+            <a:spAutoFit/>
+          </a:bodyPr>
+          <a:lstStyle/>
+          <a:p>
+            <a:pPr algn="l">
+              <a:lnSpc>
+                <a:spcPct val="128000"/>
+              </a:lnSpc>
+            </a:pPr>
+            <a:r>
+              <a:rPr sz="1700" b="1">
+                <a:solidFill>
+                  <a:srgbClr val="00FF41"/>
+                </a:solidFill>
+                <a:latin typeface="Arial"/>
+              </a:rPr>
+              <a:t>→  </a:t>
+            </a:r>
+            <a:r>
+              <a:rPr sz="1700" b="0">
+                <a:solidFill>
+                  <a:srgbClr val="8A94A6"/>
+                </a:solidFill>
+                <a:latin typeface="Arial"/>
+              </a:rPr>
+              <a:t>What have others tried in order to move this value?</a:t>
+            </a:r>
+          </a:p>
+          <a:p>
+            <a:pPr algn="l">
+              <a:lnSpc>
+                <a:spcPct val="128000"/>
+              </a:lnSpc>
+            </a:pPr>
+            <a:r>
+              <a:rPr sz="1700" b="1">
+                <a:solidFill>
+                  <a:srgbClr val="00FF41"/>
+                </a:solidFill>
+                <a:latin typeface="Arial"/>
+              </a:rPr>
+              <a:t>→  </a:t>
+            </a:r>
+            <a:r>
+              <a:rPr sz="1700" b="0">
+                <a:solidFill>
+                  <a:srgbClr val="8A94A6"/>
+                </a:solidFill>
+                <a:latin typeface="Arial"/>
+              </a:rPr>
+              <a:t>What worked — and what failed?</a:t>
+            </a:r>
+          </a:p>
+          <a:p>
+            <a:pPr algn="l">
+              <a:lnSpc>
+                <a:spcPct val="128000"/>
+              </a:lnSpc>
+            </a:pPr>
+            <a:r>
+              <a:rPr sz="1700" b="1">
+                <a:solidFill>
+                  <a:srgbClr val="00FF41"/>
+                </a:solidFill>
+                <a:latin typeface="Arial"/>
+              </a:rPr>
+              <a:t>→  </a:t>
+            </a:r>
+            <a:r>
+              <a:rPr sz="1700" b="0">
+                <a:solidFill>
+                  <a:srgbClr val="8A94A6"/>
+                </a:solidFill>
+                <a:latin typeface="Arial"/>
+              </a:rPr>
+              <a:t>2–3 REAL sources. Never invent a citation.</a:t>
+            </a:r>
+          </a:p>
+        </p:txBody>
+      </p:sp>
+      <p:sp>
+        <p:nvSpPr>
+          <p:cNvPr id="7" name="TextBox 6"/>
+          <p:cNvSpPr txBox="1"/>
+          <p:nvPr/>
+        </p:nvSpPr>
+        <p:spPr>
+          <a:xfrm>
+            <a:off x="640080" y="6355080"/>
+            <a:ext cx="10972800" cy="365760"/>
+          </a:xfrm>
+          <a:prstGeom prst="rect">
+            <a:avLst/>
+          </a:prstGeom>
+          <a:noFill/>
+        </p:spPr>
+        <p:txBody>
+          <a:bodyPr wrap="square" anchor="t">
+            <a:spAutoFit/>
+          </a:bodyPr>
+          <a:lstStyle/>
+          <a:p>
+            <a:pPr algn="l">
+              <a:lnSpc>
+                <a:spcPct val="100000"/>
+              </a:lnSpc>
+            </a:pPr>
+            <a:r>
+              <a:rPr sz="1000" b="0">
                 <a:solidFill>
                   <a:srgbClr val="5A6474"/>
                 </a:solidFill>
                 <a:latin typeface="Courier New"/>
               </a:rPr>
-              <a:t>Real papers only — never invent a citation.</a:t>
+              <a:t>Value Verification · TECHIE 1121 · Cornell Tech · Tue Jul 28</a:t>
+            </a:r>
+          </a:p>
+        </p:txBody>
+      </p:sp>
+    </p:spTree>
+  </p:cSld>
+  <p:clrMapOvr>
+    <a:masterClrMapping/>
+  </p:clrMapOvr>
+</p:sld>
+</file>
+
+<file path=ppt/slides/slide9.xml><?xml version="1.0" encoding="utf-8"?>
+<p:sld xmlns:a="http://schemas.openxmlformats.org/drawingml/2006/main" xmlns:p="http://schemas.openxmlformats.org/presentationml/2006/main" xmlns:r="http://schemas.openxmlformats.org/officeDocument/2006/relationships">
+  <p:cSld>
+    <p:bg>
+      <p:bgPr>
+        <a:solidFill>
+          <a:srgbClr val="0B0E14"/>
+        </a:solidFill>
+        <a:effectLst/>
+      </p:bgPr>
+    </p:bg>
+    <p:spTree>
+      <p:nvGrpSpPr>
+        <p:cNvPr id="1" name=""/>
+        <p:cNvGrpSpPr/>
+        <p:nvPr/>
+      </p:nvGrpSpPr>
+      <p:grpSpPr/>
+      <p:sp>
+        <p:nvSpPr>
+          <p:cNvPr id="2" name="Rectangle 1"/>
+          <p:cNvSpPr/>
+          <p:nvPr/>
+        </p:nvSpPr>
+        <p:spPr>
+          <a:xfrm>
+            <a:off x="0" y="0"/>
+            <a:ext cx="256032" cy="6858000"/>
+          </a:xfrm>
+          <a:prstGeom prst="rect">
+            <a:avLst/>
+          </a:prstGeom>
+          <a:solidFill>
+            <a:srgbClr val="00FF41"/>
+          </a:solidFill>
+          <a:ln>
+            <a:noFill/>
+          </a:ln>
+          <a:effectLst/>
+        </p:spPr>
+        <p:style>
+          <a:lnRef idx="1">
+            <a:schemeClr val="accent1"/>
+          </a:lnRef>
+          <a:fillRef idx="3">
+            <a:schemeClr val="accent1"/>
+          </a:fillRef>
+          <a:effectRef idx="2">
+            <a:schemeClr val="accent1"/>
+          </a:effectRef>
+          <a:fontRef idx="minor">
+            <a:schemeClr val="lt1"/>
+          </a:fontRef>
+        </p:style>
+        <p:txBody>
+          <a:bodyPr rtlCol="0" anchor="ctr"/>
+          <a:lstStyle/>
+          <a:p>
+            <a:pPr algn="ctr"/>
+          </a:p>
+        </p:txBody>
+      </p:sp>
+      <p:sp>
+        <p:nvSpPr>
+          <p:cNvPr id="3" name="TextBox 2"/>
+          <p:cNvSpPr txBox="1"/>
+          <p:nvPr/>
+        </p:nvSpPr>
+        <p:spPr>
+          <a:xfrm>
+            <a:off x="822960" y="1417320"/>
+            <a:ext cx="2743200" cy="1097280"/>
+          </a:xfrm>
+          <a:prstGeom prst="rect">
+            <a:avLst/>
+          </a:prstGeom>
+          <a:noFill/>
+        </p:spPr>
+        <p:txBody>
+          <a:bodyPr wrap="square" anchor="t">
+            <a:spAutoFit/>
+          </a:bodyPr>
+          <a:lstStyle/>
+          <a:p>
+            <a:pPr algn="l">
+              <a:lnSpc>
+                <a:spcPct val="100000"/>
+              </a:lnSpc>
+            </a:pPr>
+            <a:r>
+              <a:rPr sz="6400" b="1">
+                <a:solidFill>
+                  <a:srgbClr val="00FF41"/>
+                </a:solidFill>
+                <a:latin typeface="Courier New"/>
+              </a:rPr>
+              <a:t>05</a:t>
+            </a:r>
+          </a:p>
+        </p:txBody>
+      </p:sp>
+      <p:sp>
+        <p:nvSpPr>
+          <p:cNvPr id="4" name="TextBox 3"/>
+          <p:cNvSpPr txBox="1"/>
+          <p:nvPr/>
+        </p:nvSpPr>
+        <p:spPr>
+          <a:xfrm>
+            <a:off x="841248" y="2487168"/>
+            <a:ext cx="10424160" cy="457200"/>
+          </a:xfrm>
+          <a:prstGeom prst="rect">
+            <a:avLst/>
+          </a:prstGeom>
+          <a:noFill/>
+        </p:spPr>
+        <p:txBody>
+          <a:bodyPr wrap="square" anchor="t">
+            <a:spAutoFit/>
+          </a:bodyPr>
+          <a:lstStyle/>
+          <a:p>
+            <a:pPr algn="l">
+              <a:lnSpc>
+                <a:spcPct val="100000"/>
+              </a:lnSpc>
+            </a:pPr>
+            <a:r>
+              <a:rPr sz="1500" b="1">
+                <a:solidFill>
+                  <a:srgbClr val="00FF41"/>
+                </a:solidFill>
+                <a:latin typeface="Courier New"/>
+              </a:rPr>
+              <a:t>SO WHAT</a:t>
+            </a:r>
+          </a:p>
+        </p:txBody>
+      </p:sp>
+      <p:sp>
+        <p:nvSpPr>
+          <p:cNvPr id="5" name="TextBox 4"/>
+          <p:cNvSpPr txBox="1"/>
+          <p:nvPr/>
+        </p:nvSpPr>
+        <p:spPr>
+          <a:xfrm>
+            <a:off x="804672" y="2971800"/>
+            <a:ext cx="10607040" cy="1097280"/>
+          </a:xfrm>
+          <a:prstGeom prst="rect">
+            <a:avLst/>
+          </a:prstGeom>
+          <a:noFill/>
+        </p:spPr>
+        <p:txBody>
+          <a:bodyPr wrap="square" anchor="t">
+            <a:spAutoFit/>
+          </a:bodyPr>
+          <a:lstStyle/>
+          <a:p>
+            <a:pPr algn="l">
+              <a:lnSpc>
+                <a:spcPct val="103000"/>
+              </a:lnSpc>
+            </a:pPr>
+            <a:r>
+              <a:rPr sz="3800" b="1">
+                <a:solidFill>
+                  <a:srgbClr val="F5F7FA"/>
+                </a:solidFill>
+                <a:latin typeface="Arial"/>
+              </a:rPr>
+              <a:t>Our next design brief</a:t>
+            </a:r>
+          </a:p>
+        </p:txBody>
+      </p:sp>
+      <p:sp>
+        <p:nvSpPr>
+          <p:cNvPr id="6" name="TextBox 5"/>
+          <p:cNvSpPr txBox="1"/>
+          <p:nvPr/>
+        </p:nvSpPr>
+        <p:spPr>
+          <a:xfrm>
+            <a:off x="841248" y="4224528"/>
+            <a:ext cx="10424160" cy="1737360"/>
+          </a:xfrm>
+          <a:prstGeom prst="rect">
+            <a:avLst/>
+          </a:prstGeom>
+          <a:noFill/>
+        </p:spPr>
+        <p:txBody>
+          <a:bodyPr wrap="square" anchor="t">
+            <a:spAutoFit/>
+          </a:bodyPr>
+          <a:lstStyle/>
+          <a:p>
+            <a:pPr algn="l">
+              <a:lnSpc>
+                <a:spcPct val="128000"/>
+              </a:lnSpc>
+            </a:pPr>
+            <a:r>
+              <a:rPr sz="1700" b="1">
+                <a:solidFill>
+                  <a:srgbClr val="00FF41"/>
+                </a:solidFill>
+                <a:latin typeface="Arial"/>
+              </a:rPr>
+              <a:t>→  </a:t>
+            </a:r>
+            <a:r>
+              <a:rPr sz="1700" b="0">
+                <a:solidFill>
+                  <a:srgbClr val="8A94A6"/>
+                </a:solidFill>
+                <a:latin typeface="Arial"/>
+              </a:rPr>
+              <a:t>Verification is a beginning, not a verdict.</a:t>
+            </a:r>
+          </a:p>
+          <a:p>
+            <a:pPr algn="l">
+              <a:lnSpc>
+                <a:spcPct val="128000"/>
+              </a:lnSpc>
+            </a:pPr>
+            <a:r>
+              <a:rPr sz="1700" b="1">
+                <a:solidFill>
+                  <a:srgbClr val="00FF41"/>
+                </a:solidFill>
+                <a:latin typeface="Arial"/>
+              </a:rPr>
+              <a:t>→  </a:t>
+            </a:r>
+            <a:r>
+              <a:rPr sz="1700" b="0">
+                <a:solidFill>
+                  <a:srgbClr val="8A94A6"/>
+                </a:solidFill>
+                <a:latin typeface="Arial"/>
+              </a:rPr>
+              <a:t>What OTHER design could actually achieve this value?</a:t>
+            </a:r>
+          </a:p>
+          <a:p>
+            <a:pPr algn="l">
+              <a:lnSpc>
+                <a:spcPct val="128000"/>
+              </a:lnSpc>
+            </a:pPr>
+            <a:r>
+              <a:rPr sz="1700" b="1">
+                <a:solidFill>
+                  <a:srgbClr val="00FF41"/>
+                </a:solidFill>
+                <a:latin typeface="Arial"/>
+              </a:rPr>
+              <a:t>→  </a:t>
+            </a:r>
+            <a:r>
+              <a:rPr sz="1700" b="0">
+                <a:solidFill>
+                  <a:srgbClr val="8A94A6"/>
+                </a:solidFill>
+                <a:latin typeface="Arial"/>
+              </a:rPr>
+              <a:t>What should the next cycle discover? (You carry this into Wednesday.)</a:t>
             </a:r>
           </a:p>
         </p:txBody>

--- a/slides/team-decks/Week3-Tue-jamins-2nd-team.pptx
+++ b/slides/team-decks/Week3-Tue-jamins-2nd-team.pptx
@@ -511,7 +511,7 @@
           <a:lstStyle/>
           <a:p>
             <a:r>
-              <a:t>Title slide. Confirm the value and the member list before presenting.</a:t>
+              <a:t>Team name = the value you carry into the final. Confirm the value + members before presenting.</a:t>
             </a:r>
           </a:p>
         </p:txBody>
@@ -4067,7 +4067,7 @@
         </p:nvSpPr>
         <p:spPr>
           <a:xfrm>
-            <a:off x="822960" y="1600200"/>
+            <a:off x="822960" y="1554480"/>
             <a:ext cx="10515600" cy="457200"/>
           </a:xfrm>
           <a:prstGeom prst="rect">
@@ -4106,7 +4106,7 @@
         </p:nvSpPr>
         <p:spPr>
           <a:xfrm>
-            <a:off x="804672" y="2148840"/>
+            <a:off x="804672" y="2103120"/>
             <a:ext cx="10607040" cy="1737360"/>
           </a:xfrm>
           <a:prstGeom prst="rect">
@@ -4132,7 +4132,7 @@
                 </a:solidFill>
                 <a:latin typeface="Arial"/>
               </a:rPr>
-              <a:t>Jamin's 2nd Team</a:t>
+              <a:t>The Safety Team</a:t>
             </a:r>
           </a:p>
         </p:txBody>
@@ -4184,8 +4184,8 @@
         </p:nvSpPr>
         <p:spPr>
           <a:xfrm>
-            <a:off x="841248" y="4526280"/>
-            <a:ext cx="10424160" cy="548640"/>
+            <a:off x="841248" y="4434840"/>
+            <a:ext cx="10424160" cy="457200"/>
           </a:xfrm>
           <a:prstGeom prst="rect">
             <a:avLst/>
@@ -4204,22 +4204,13 @@
               </a:lnSpc>
             </a:pPr>
             <a:r>
-              <a:rPr sz="1800" b="0">
-                <a:solidFill>
-                  <a:srgbClr val="F5F7FA"/>
-                </a:solidFill>
-                <a:latin typeface="Arial"/>
-              </a:rPr>
-              <a:t>The value we're carrying:  </a:t>
-            </a:r>
-            <a:r>
-              <a:rPr sz="1800" b="1">
-                <a:solidFill>
-                  <a:srgbClr val="00FF41"/>
-                </a:solidFill>
-                <a:latin typeface="Arial"/>
-              </a:rPr>
-              <a:t>safety</a:t>
+              <a:rPr sz="1300" b="0">
+                <a:solidFill>
+                  <a:srgbClr val="5A6474"/>
+                </a:solidFill>
+                <a:latin typeface="Courier New"/>
+              </a:rPr>
+              <a:t>GitHub team: Jamin's 2nd Team</a:t>
             </a:r>
           </a:p>
         </p:txBody>

--- a/slides/team-decks/Week3-Tue-jamins-2nd-team.pptx
+++ b/slides/team-decks/Week3-Tue-jamins-2nd-team.pptx
@@ -7322,7 +7322,7 @@
                 </a:solidFill>
                 <a:latin typeface="Arial"/>
               </a:rPr>
-              <a:t>Verification is a beginning, not a verdict.</a:t>
+              <a:t>Verification opens the next design - it doesn't just grade this one.</a:t>
             </a:r>
           </a:p>
           <a:p>

--- a/slides/team-decks/Week3-Tue-jamins-2nd-team.pptx
+++ b/slides/team-decks/Week3-Tue-jamins-2nd-team.pptx
@@ -4093,7 +4093,7 @@
                 </a:solidFill>
                 <a:latin typeface="Courier New"/>
               </a:rPr>
-              <a:t>VALUE VERIFICATION · TEAM RESEARCH DECK</a:t>
+              <a:t>VALUE-CENTERED USER RESEARCH DECK</a:t>
             </a:r>
           </a:p>
         </p:txBody>
@@ -4184,8 +4184,8 @@
         </p:nvSpPr>
         <p:spPr>
           <a:xfrm>
-            <a:off x="841248" y="4434840"/>
-            <a:ext cx="10424160" cy="457200"/>
+            <a:off x="841248" y="4206240"/>
+            <a:ext cx="10607040" cy="457200"/>
           </a:xfrm>
           <a:prstGeom prst="rect">
             <a:avLst/>
@@ -4204,6 +4204,54 @@
               </a:lnSpc>
             </a:pPr>
             <a:r>
+              <a:rPr sz="1500" b="1">
+                <a:solidFill>
+                  <a:srgbClr val="00FF41"/>
+                </a:solidFill>
+                <a:latin typeface="Courier New"/>
+              </a:rPr>
+              <a:t>Project 2:  </a:t>
+            </a:r>
+            <a:r>
+              <a:rPr sz="1500" b="0">
+                <a:solidFill>
+                  <a:srgbClr val="8A94A6"/>
+                </a:solidFill>
+                <a:latin typeface="Arial"/>
+              </a:rPr>
+              <a:t>Vault Notes - a locking journal for high-school students</a:t>
+            </a:r>
+          </a:p>
+        </p:txBody>
+      </p:sp>
+      <p:sp>
+        <p:nvSpPr>
+          <p:cNvPr id="7" name="TextBox 6"/>
+          <p:cNvSpPr txBox="1"/>
+          <p:nvPr/>
+        </p:nvSpPr>
+        <p:spPr>
+          <a:xfrm>
+            <a:off x="841248" y="4709160"/>
+            <a:ext cx="10424160" cy="457200"/>
+          </a:xfrm>
+          <a:prstGeom prst="rect">
+            <a:avLst/>
+          </a:prstGeom>
+          <a:noFill/>
+        </p:spPr>
+        <p:txBody>
+          <a:bodyPr wrap="square" anchor="t">
+            <a:spAutoFit/>
+          </a:bodyPr>
+          <a:lstStyle/>
+          <a:p>
+            <a:pPr algn="l">
+              <a:lnSpc>
+                <a:spcPct val="100000"/>
+              </a:lnSpc>
+            </a:pPr>
+            <a:r>
               <a:rPr sz="1300" b="0">
                 <a:solidFill>
                   <a:srgbClr val="5A6474"/>
@@ -4217,7 +4265,7 @@
       </p:sp>
       <p:sp>
         <p:nvSpPr>
-          <p:cNvPr id="7" name="TextBox 6"/>
+          <p:cNvPr id="8" name="TextBox 7"/>
           <p:cNvSpPr txBox="1"/>
           <p:nvPr/>
         </p:nvSpPr>
@@ -5131,7 +5179,7 @@
                 </a:solidFill>
                 <a:latin typeface="Courier New"/>
               </a:rPr>
-              <a:t>THE VALUE &amp; THE READING</a:t>
+              <a:t>THE VALUE &amp; HOW WE DEFINE IT</a:t>
             </a:r>
           </a:p>
         </p:txBody>
@@ -5170,7 +5218,7 @@
                 </a:solidFill>
                 <a:latin typeface="Arial"/>
               </a:rPr>
-              <a:t>What we claimed — and which reading we built for</a:t>
+              <a:t>What we claimed — and how we operationalize it</a:t>
             </a:r>
           </a:p>
         </p:txBody>
@@ -5243,7 +5291,7 @@
                 </a:solidFill>
                 <a:latin typeface="Arial"/>
               </a:rPr>
-              <a:t>Which reading of the value did we actually design for? (e.g. privacy as control vs. security vs. contextual integrity)</a:t>
+              <a:t>How do we operationalize / define the value? (e.g. privacy as control vs. security vs. contextual integrity)</a:t>
             </a:r>
           </a:p>
           <a:p>
@@ -5268,7 +5316,7 @@
                 </a:solidFill>
                 <a:latin typeface="Arial"/>
               </a:rPr>
-              <a:t>Operationalized: if it's present, users will DO ___ / UNDERSTAND ___ / FEEL ___.</a:t>
+              <a:t>If it's present, users will DO ___ / UNDERSTAND ___ / FEEL ___.</a:t>
             </a:r>
           </a:p>
         </p:txBody>

--- a/slides/team-decks/Week3-Tue-jamins-2nd-team.pptx
+++ b/slides/team-decks/Week3-Tue-jamins-2nd-team.pptx
@@ -14,7 +14,6 @@
     <p:sldId id="262" r:id="rId14"/>
     <p:sldId id="263" r:id="rId15"/>
     <p:sldId id="264" r:id="rId16"/>
-    <p:sldId id="265" r:id="rId17"/>
   </p:sldIdLst>
   <p:sldSz cx="12191695" cy="6858000" type="screen4x3"/>
   <p:notesSz cx="6858000" cy="9144000"/>
@@ -791,7 +790,7 @@
           <a:lstStyle/>
           <a:p>
             <a:r>
-              <a:t>John Maida's individually graded section. Their reflection lives in their own lane on the team FigJam canvas.</a:t>
+              <a:t>John Maida's individual contribution: the design intervention they researched. Reflection lives in their own FigJam lane.</a:t>
             </a:r>
           </a:p>
         </p:txBody>
@@ -861,7 +860,7 @@
           <a:lstStyle/>
           <a:p>
             <a:r>
-              <a:t>Ajin Yohannan's individually graded section. Their reflection lives in their own lane on the team FigJam canvas.</a:t>
+              <a:t>Ajin Yohannan's individual contribution: the design intervention they researched. Reflection lives in their own FigJam lane.</a:t>
             </a:r>
           </a:p>
         </p:txBody>
@@ -887,76 +886,6 @@
 </file>
 
 <file path=ppt/notesSlides/notesSlide7.xml><?xml version="1.0" encoding="utf-8"?>
-<p:notes xmlns:a="http://schemas.openxmlformats.org/drawingml/2006/main" xmlns:p="http://schemas.openxmlformats.org/presentationml/2006/main" xmlns:r="http://schemas.openxmlformats.org/officeDocument/2006/relationships">
-  <p:cSld>
-    <p:spTree>
-      <p:nvGrpSpPr>
-        <p:cNvPr id="1" name=""/>
-        <p:cNvGrpSpPr/>
-        <p:nvPr/>
-      </p:nvGrpSpPr>
-      <p:grpSpPr>
-        <a:xfrm>
-          <a:off x="0" y="0"/>
-          <a:ext cx="0" cy="0"/>
-          <a:chOff x="0" y="0"/>
-          <a:chExt cx="0" cy="0"/>
-        </a:xfrm>
-      </p:grpSpPr>
-      <p:sp>
-        <p:nvSpPr>
-          <p:cNvPr id="2" name="Slide Image Placeholder 1"/>
-          <p:cNvSpPr>
-            <a:spLocks noGrp="1"/>
-          </p:cNvSpPr>
-          <p:nvPr>
-            <p:ph type="sldImg" idx="2"/>
-          </p:nvPr>
-        </p:nvSpPr>
-        <p:spPr/>
-      </p:sp>
-      <p:sp>
-        <p:nvSpPr>
-          <p:cNvPr id="3" name="Notes Placeholder 2"/>
-          <p:cNvSpPr>
-            <a:spLocks noGrp="1"/>
-          </p:cNvSpPr>
-          <p:nvPr>
-            <p:ph type="body" idx="3" sz="quarter"/>
-          </p:nvPr>
-        </p:nvSpPr>
-        <p:spPr/>
-        <p:txBody>
-          <a:bodyPr/>
-          <a:lstStyle/>
-          <a:p>
-            <a:r>
-              <a:t>Section header — the team's own slides go after this one.</a:t>
-            </a:r>
-          </a:p>
-        </p:txBody>
-      </p:sp>
-      <p:sp>
-        <p:nvSpPr>
-          <p:cNvPr id="4" name="Slide Number Placeholder 3"/>
-          <p:cNvSpPr>
-            <a:spLocks noGrp="1"/>
-          </p:cNvSpPr>
-          <p:nvPr>
-            <p:ph type="sldNum" idx="5" sz="quarter"/>
-          </p:nvPr>
-        </p:nvSpPr>
-        <p:spPr/>
-      </p:sp>
-    </p:spTree>
-  </p:cSld>
-  <p:clrMapOvr>
-    <a:masterClrMapping/>
-  </p:clrMapOvr>
-</p:notes>
-</file>
-
-<file path=ppt/notesSlides/notesSlide8.xml><?xml version="1.0" encoding="utf-8"?>
 <p:notes xmlns:a="http://schemas.openxmlformats.org/drawingml/2006/main" xmlns:p="http://schemas.openxmlformats.org/presentationml/2006/main" xmlns:r="http://schemas.openxmlformats.org/officeDocument/2006/relationships">
   <p:cSld>
     <p:spTree>
@@ -4310,355 +4239,6 @@
 </p:sld>
 </file>
 
-<file path=ppt/slides/slide10.xml><?xml version="1.0" encoding="utf-8"?>
-<p:sld xmlns:a="http://schemas.openxmlformats.org/drawingml/2006/main" xmlns:p="http://schemas.openxmlformats.org/presentationml/2006/main" xmlns:r="http://schemas.openxmlformats.org/officeDocument/2006/relationships">
-  <p:cSld>
-    <p:bg>
-      <p:bgPr>
-        <a:solidFill>
-          <a:srgbClr val="0B0E14"/>
-        </a:solidFill>
-        <a:effectLst/>
-      </p:bgPr>
-    </p:bg>
-    <p:spTree>
-      <p:nvGrpSpPr>
-        <p:cNvPr id="1" name=""/>
-        <p:cNvGrpSpPr/>
-        <p:nvPr/>
-      </p:nvGrpSpPr>
-      <p:grpSpPr/>
-      <p:sp>
-        <p:nvSpPr>
-          <p:cNvPr id="2" name="TextBox 1"/>
-          <p:cNvSpPr txBox="1"/>
-          <p:nvPr/>
-        </p:nvSpPr>
-        <p:spPr>
-          <a:xfrm>
-            <a:off x="640080" y="502920"/>
-            <a:ext cx="10058400" cy="365760"/>
-          </a:xfrm>
-          <a:prstGeom prst="rect">
-            <a:avLst/>
-          </a:prstGeom>
-          <a:noFill/>
-        </p:spPr>
-        <p:txBody>
-          <a:bodyPr wrap="square" anchor="t">
-            <a:spAutoFit/>
-          </a:bodyPr>
-          <a:lstStyle/>
-          <a:p>
-            <a:pPr algn="l">
-              <a:lnSpc>
-                <a:spcPct val="100000"/>
-              </a:lnSpc>
-            </a:pPr>
-            <a:r>
-              <a:rPr sz="1300" b="1">
-                <a:solidFill>
-                  <a:srgbClr val="00FF41"/>
-                </a:solidFill>
-                <a:latin typeface="Courier New"/>
-              </a:rPr>
-              <a:t>SOURCES</a:t>
-            </a:r>
-          </a:p>
-        </p:txBody>
-      </p:sp>
-      <p:sp>
-        <p:nvSpPr>
-          <p:cNvPr id="3" name="Rectangle 2"/>
-          <p:cNvSpPr/>
-          <p:nvPr/>
-        </p:nvSpPr>
-        <p:spPr>
-          <a:xfrm>
-            <a:off x="640080" y="932688"/>
-            <a:ext cx="822960" cy="73152"/>
-          </a:xfrm>
-          <a:prstGeom prst="rect">
-            <a:avLst/>
-          </a:prstGeom>
-          <a:solidFill>
-            <a:srgbClr val="00FF41"/>
-          </a:solidFill>
-          <a:ln>
-            <a:noFill/>
-          </a:ln>
-          <a:effectLst/>
-        </p:spPr>
-        <p:style>
-          <a:lnRef idx="1">
-            <a:schemeClr val="accent1"/>
-          </a:lnRef>
-          <a:fillRef idx="3">
-            <a:schemeClr val="accent1"/>
-          </a:fillRef>
-          <a:effectRef idx="2">
-            <a:schemeClr val="accent1"/>
-          </a:effectRef>
-          <a:fontRef idx="minor">
-            <a:schemeClr val="lt1"/>
-          </a:fontRef>
-        </p:style>
-        <p:txBody>
-          <a:bodyPr rtlCol="0" anchor="ctr"/>
-          <a:lstStyle/>
-          <a:p>
-            <a:pPr algn="ctr"/>
-          </a:p>
-        </p:txBody>
-      </p:sp>
-      <p:sp>
-        <p:nvSpPr>
-          <p:cNvPr id="4" name="TextBox 3"/>
-          <p:cNvSpPr txBox="1"/>
-          <p:nvPr/>
-        </p:nvSpPr>
-        <p:spPr>
-          <a:xfrm>
-            <a:off x="640080" y="1188720"/>
-            <a:ext cx="10972800" cy="914400"/>
-          </a:xfrm>
-          <a:prstGeom prst="rect">
-            <a:avLst/>
-          </a:prstGeom>
-          <a:noFill/>
-        </p:spPr>
-        <p:txBody>
-          <a:bodyPr wrap="square" anchor="t">
-            <a:spAutoFit/>
-          </a:bodyPr>
-          <a:lstStyle/>
-          <a:p>
-            <a:pPr algn="l">
-              <a:lnSpc>
-                <a:spcPct val="100000"/>
-              </a:lnSpc>
-            </a:pPr>
-            <a:r>
-              <a:rPr sz="3200" b="1">
-                <a:solidFill>
-                  <a:srgbClr val="F5F7FA"/>
-                </a:solidFill>
-                <a:latin typeface="Arial"/>
-              </a:rPr>
-              <a:t>What we read</a:t>
-            </a:r>
-          </a:p>
-        </p:txBody>
-      </p:sp>
-      <p:sp>
-        <p:nvSpPr>
-          <p:cNvPr id="5" name="TextBox 4"/>
-          <p:cNvSpPr txBox="1"/>
-          <p:nvPr/>
-        </p:nvSpPr>
-        <p:spPr>
-          <a:xfrm>
-            <a:off x="658368" y="2377440"/>
-            <a:ext cx="10881360" cy="3108960"/>
-          </a:xfrm>
-          <a:prstGeom prst="rect">
-            <a:avLst/>
-          </a:prstGeom>
-          <a:noFill/>
-        </p:spPr>
-        <p:txBody>
-          <a:bodyPr wrap="square" anchor="t">
-            <a:spAutoFit/>
-          </a:bodyPr>
-          <a:lstStyle/>
-          <a:p>
-            <a:pPr algn="l">
-              <a:lnSpc>
-                <a:spcPct val="145000"/>
-              </a:lnSpc>
-            </a:pPr>
-            <a:r>
-              <a:rPr sz="1700" b="1">
-                <a:solidFill>
-                  <a:srgbClr val="00FF41"/>
-                </a:solidFill>
-                <a:latin typeface="Arial"/>
-              </a:rPr>
-              <a:t>•  </a:t>
-            </a:r>
-            <a:r>
-              <a:rPr sz="1700" b="0">
-                <a:solidFill>
-                  <a:srgbClr val="8A94A6"/>
-                </a:solidFill>
-                <a:latin typeface="Arial"/>
-              </a:rPr>
-              <a:t>Author, Year. Title. Where it appeared.  —  what it found</a:t>
-            </a:r>
-          </a:p>
-          <a:p>
-            <a:pPr algn="l">
-              <a:lnSpc>
-                <a:spcPct val="145000"/>
-              </a:lnSpc>
-            </a:pPr>
-            <a:r>
-              <a:rPr sz="1700" b="1">
-                <a:solidFill>
-                  <a:srgbClr val="00FF41"/>
-                </a:solidFill>
-                <a:latin typeface="Arial"/>
-              </a:rPr>
-              <a:t>•  </a:t>
-            </a:r>
-            <a:r>
-              <a:rPr sz="1700" b="0">
-                <a:solidFill>
-                  <a:srgbClr val="8A94A6"/>
-                </a:solidFill>
-                <a:latin typeface="Arial"/>
-              </a:rPr>
-              <a:t>Author, Year. Title. Where it appeared.  —  what it found</a:t>
-            </a:r>
-          </a:p>
-          <a:p>
-            <a:pPr algn="l">
-              <a:lnSpc>
-                <a:spcPct val="145000"/>
-              </a:lnSpc>
-            </a:pPr>
-            <a:r>
-              <a:rPr sz="1700" b="1">
-                <a:solidFill>
-                  <a:srgbClr val="00FF41"/>
-                </a:solidFill>
-                <a:latin typeface="Arial"/>
-              </a:rPr>
-              <a:t>•  </a:t>
-            </a:r>
-            <a:r>
-              <a:rPr sz="1700" b="0">
-                <a:solidFill>
-                  <a:srgbClr val="8A94A6"/>
-                </a:solidFill>
-                <a:latin typeface="Arial"/>
-              </a:rPr>
-              <a:t>Author, Year. Title. Where it appeared.  —  what it found</a:t>
-            </a:r>
-          </a:p>
-          <a:p>
-            <a:pPr algn="l">
-              <a:lnSpc>
-                <a:spcPct val="145000"/>
-              </a:lnSpc>
-            </a:pPr>
-            <a:r>
-              <a:rPr sz="1700" b="1">
-                <a:solidFill>
-                  <a:srgbClr val="00FF41"/>
-                </a:solidFill>
-                <a:latin typeface="Arial"/>
-              </a:rPr>
-              <a:t>•  </a:t>
-            </a:r>
-            <a:r>
-              <a:rPr sz="1700" b="0">
-                <a:solidFill>
-                  <a:srgbClr val="8A94A6"/>
-                </a:solidFill>
-                <a:latin typeface="Arial"/>
-              </a:rPr>
-              <a:t>Author, Year. Title. Where it appeared.  —  what it found</a:t>
-            </a:r>
-          </a:p>
-        </p:txBody>
-      </p:sp>
-      <p:sp>
-        <p:nvSpPr>
-          <p:cNvPr id="6" name="TextBox 5"/>
-          <p:cNvSpPr txBox="1"/>
-          <p:nvPr/>
-        </p:nvSpPr>
-        <p:spPr>
-          <a:xfrm>
-            <a:off x="658368" y="5715000"/>
-            <a:ext cx="10881360" cy="365760"/>
-          </a:xfrm>
-          <a:prstGeom prst="rect">
-            <a:avLst/>
-          </a:prstGeom>
-          <a:noFill/>
-        </p:spPr>
-        <p:txBody>
-          <a:bodyPr wrap="square" anchor="t">
-            <a:spAutoFit/>
-          </a:bodyPr>
-          <a:lstStyle/>
-          <a:p>
-            <a:pPr algn="l">
-              <a:lnSpc>
-                <a:spcPct val="100000"/>
-              </a:lnSpc>
-            </a:pPr>
-            <a:r>
-              <a:rPr sz="1300" b="0">
-                <a:solidFill>
-                  <a:srgbClr val="5A6474"/>
-                </a:solidFill>
-                <a:latin typeface="Courier New"/>
-              </a:rPr>
-              <a:t>Real papers only — never invent a citation.</a:t>
-            </a:r>
-          </a:p>
-        </p:txBody>
-      </p:sp>
-      <p:sp>
-        <p:nvSpPr>
-          <p:cNvPr id="7" name="TextBox 6"/>
-          <p:cNvSpPr txBox="1"/>
-          <p:nvPr/>
-        </p:nvSpPr>
-        <p:spPr>
-          <a:xfrm>
-            <a:off x="640080" y="6355080"/>
-            <a:ext cx="10972800" cy="365760"/>
-          </a:xfrm>
-          <a:prstGeom prst="rect">
-            <a:avLst/>
-          </a:prstGeom>
-          <a:noFill/>
-        </p:spPr>
-        <p:txBody>
-          <a:bodyPr wrap="square" anchor="t">
-            <a:spAutoFit/>
-          </a:bodyPr>
-          <a:lstStyle/>
-          <a:p>
-            <a:pPr algn="l">
-              <a:lnSpc>
-                <a:spcPct val="100000"/>
-              </a:lnSpc>
-            </a:pPr>
-            <a:r>
-              <a:rPr sz="1000" b="0">
-                <a:solidFill>
-                  <a:srgbClr val="5A6474"/>
-                </a:solidFill>
-                <a:latin typeface="Courier New"/>
-              </a:rPr>
-              <a:t>Value Verification · TECHIE 1121 · Cornell Tech · Tue Jul 28</a:t>
-            </a:r>
-          </a:p>
-        </p:txBody>
-      </p:sp>
-    </p:spTree>
-  </p:cSld>
-  <p:clrMapOvr>
-    <a:masterClrMapping/>
-  </p:clrMapOvr>
-</p:sld>
-</file>
-
 <file path=ppt/slides/slide2.xml><?xml version="1.0" encoding="utf-8"?>
 <p:sld xmlns:a="http://schemas.openxmlformats.org/drawingml/2006/main" xmlns:p="http://schemas.openxmlformats.org/presentationml/2006/main" xmlns:r="http://schemas.openxmlformats.org/officeDocument/2006/relationships">
   <p:cSld>
@@ -4842,7 +4422,7 @@
                 </a:solidFill>
                 <a:latin typeface="Arial"/>
               </a:rPr>
-              <a:t>Five section headers follow — they are the spine of your talk.</a:t>
+              <a:t>Four section headers follow — they are the spine of your talk.</a:t>
             </a:r>
           </a:p>
           <a:p>
@@ -4867,7 +4447,7 @@
                 </a:solidFill>
                 <a:latin typeface="Arial"/>
               </a:rPr>
-              <a:t>Sections 01, 02, 04, 05 are the TEAM's. Section 03 has one named slide per person — that one is graded individually.</a:t>
+              <a:t>Sections 01, 02, 04 are the TEAM's. Section 03 has one named slide per person — your individual contribution.</a:t>
             </a:r>
           </a:p>
           <a:p>
@@ -4917,7 +4497,7 @@
                 </a:solidFill>
                 <a:latin typeface="Arial"/>
               </a:rPr>
-              <a:t>Evidence beats assertion: screenshots, numbers, quotes from what you actually observed.</a:t>
+              <a:t>No time to run full tests today - so RESEARCH the method, and what interventions have actually moved this value.</a:t>
             </a:r>
           </a:p>
           <a:p>
@@ -5218,7 +4798,7 @@
                 </a:solidFill>
                 <a:latin typeface="Arial"/>
               </a:rPr>
-              <a:t>What we claimed — and how we operationalize it</a:t>
+              <a:t>Discovery - operationalize the value</a:t>
             </a:r>
           </a:p>
         </p:txBody>
@@ -5266,7 +4846,7 @@
                 </a:solidFill>
                 <a:latin typeface="Arial"/>
               </a:rPr>
-              <a:t>Our app, in one line — and the value it claims.</a:t>
+              <a:t>[ our app, in one line ]  -  and the value it claims.</a:t>
             </a:r>
           </a:p>
           <a:p>
@@ -5291,7 +4871,7 @@
                 </a:solidFill>
                 <a:latin typeface="Arial"/>
               </a:rPr>
-              <a:t>How do we operationalize / define the value? (e.g. privacy as control vs. security vs. contextual integrity)</a:t>
+              <a:t>How do we operationalize / define the value?  (privacy as control vs. security vs. contextual integrity)</a:t>
             </a:r>
           </a:p>
           <a:p>
@@ -5316,7 +4896,7 @@
                 </a:solidFill>
                 <a:latin typeface="Arial"/>
               </a:rPr>
-              <a:t>If it's present, users will DO ___ / UNDERSTAND ___ / FEEL ___.</a:t>
+              <a:t>If it is present, users will DO [ ___ ] / UNDERSTAND [ ___ ] / FEEL [ ___ ].</a:t>
             </a:r>
           </a:p>
         </p:txBody>
@@ -5503,7 +5083,7 @@
                 </a:solidFill>
                 <a:latin typeface="Courier New"/>
               </a:rPr>
-              <a:t>PART 1 — WAYS TO VERIFY</a:t>
+              <a:t>HOW WOULD WE VERIFY IT?</a:t>
             </a:r>
           </a:p>
         </p:txBody>
@@ -5542,7 +5122,7 @@
                 </a:solidFill>
                 <a:latin typeface="Arial"/>
               </a:rPr>
-              <a:t>How can this value be verified at all?</a:t>
+              <a:t>Pick a method per lens - we won't run them all today</a:t>
             </a:r>
           </a:p>
         </p:txBody>
@@ -5590,7 +5170,7 @@
                 </a:solidFill>
                 <a:latin typeface="Arial"/>
               </a:rPr>
-              <a:t>How have others measured this value? (Google Scholar + its AI search)</a:t>
+              <a:t>BEHAVIOR - do users ACT differently?  -&gt;  hard to test in class, so we RESEARCH it: [ method + what studies show ].</a:t>
             </a:r>
           </a:p>
           <a:p>
@@ -5615,7 +5195,7 @@
                 </a:solidFill>
                 <a:latin typeface="Arial"/>
               </a:rPr>
-              <a:t>Which method did we choose — and why does our reading demand it?</a:t>
+              <a:t>UNDERSTANDING - do they GRASP the value?  -&gt;  a quick check with fellow students is possible: [ method ].</a:t>
             </a:r>
           </a:p>
           <a:p>
@@ -5640,7 +5220,7 @@
                 </a:solidFill>
                 <a:latin typeface="Arial"/>
               </a:rPr>
-              <a:t>The instrument we borrowed: UEQ · an HRI/SDT scale · the slop detector · a task design.</a:t>
+              <a:t>AFFECT - do they FEEL differently?  -&gt;  a quick check with fellow students is possible: [ method ].</a:t>
             </a:r>
           </a:p>
         </p:txBody>
@@ -5827,7 +5407,7 @@
                 </a:solidFill>
                 <a:latin typeface="Courier New"/>
               </a:rPr>
-              <a:t>PART 2 — WHAT WE FOUND</a:t>
+              <a:t>DESIGN INTERVENTIONS THAT MOVED THIS VALUE</a:t>
             </a:r>
           </a:p>
         </p:txBody>
@@ -5866,7 +5446,7 @@
                 </a:solidFill>
                 <a:latin typeface="Arial"/>
               </a:rPr>
-              <a:t>Insights from our own verification</a:t>
+              <a:t>Research - what has actually worked? (each member owns a slide)</a:t>
             </a:r>
           </a:p>
         </p:txBody>
@@ -5914,7 +5494,7 @@
                 </a:solidFill>
                 <a:latin typeface="Arial"/>
               </a:rPr>
-              <a:t>Each team member presents their OWN slide — the named slides that follow.</a:t>
+              <a:t>Each member presents their OWN researched intervention - the named slides that follow.</a:t>
             </a:r>
           </a:p>
           <a:p>
@@ -5939,7 +5519,7 @@
                 </a:solidFill>
                 <a:latin typeface="Arial"/>
               </a:rPr>
-              <a:t>What WORKS and what does NOT — with evidence. An evidenced 'it doesn't' beats a hopeful 'it does'.</a:t>
+              <a:t>A real design intervention tried for this value, and its result: worked / mixed / failed.</a:t>
             </a:r>
           </a:p>
           <a:p>
@@ -5964,7 +5544,7 @@
                 </a:solidFill>
                 <a:latin typeface="Arial"/>
               </a:rPr>
-              <a:t>Across the lenses: behavior · understanding · affect — and which lenses did NOT fit this value.</a:t>
+              <a:t>Real sources only - never invent a citation.</a:t>
             </a:r>
           </a:p>
         </p:txBody>
@@ -6068,7 +5648,7 @@
                 </a:solidFill>
                 <a:latin typeface="Courier New"/>
               </a:rPr>
-              <a:t>03.1  ·  YOUR SECTION (graded individually)</a:t>
+              <a:t>03.1  ·  YOUR SLIDE (your individual contribution)</a:t>
             </a:r>
           </a:p>
         </p:txBody>
@@ -6199,7 +5779,7 @@
                 </a:solidFill>
                 <a:latin typeface="Arial"/>
               </a:rPr>
-              <a:t>The lens + method I ran, and why our reading demanded it</a:t>
+              <a:t>A design intervention someone tried to move THIS value - [ what they did ]</a:t>
             </a:r>
           </a:p>
           <a:p>
@@ -6224,7 +5804,7 @@
                 </a:solidFill>
                 <a:latin typeface="Arial"/>
               </a:rPr>
-              <a:t>My evidence - what I actually observed or measured</a:t>
+              <a:t>The result - [ worked / mixed / failed ] - and the real source [ author, year ]</a:t>
             </a:r>
           </a:p>
           <a:p>
@@ -6249,7 +5829,7 @@
                 </a:solidFill>
                 <a:latin typeface="Arial"/>
               </a:rPr>
-              <a:t>What this says WORKS - and what does NOT</a:t>
+              <a:t>How you'd test it - [ method ]  (behavior = research it; understanding/affect = quick student check)</a:t>
             </a:r>
           </a:p>
           <a:p>
@@ -6274,7 +5854,7 @@
                 </a:solidFill>
                 <a:latin typeface="Arial"/>
               </a:rPr>
-              <a:t>The paper I found (real citation) and what it changes</a:t>
+              <a:t>Does it support or challenge our design direction? - [ ___ ]</a:t>
             </a:r>
           </a:p>
         </p:txBody>
@@ -6472,7 +6052,7 @@
                 </a:solidFill>
                 <a:latin typeface="Courier New"/>
               </a:rPr>
-              <a:t>03.2  ·  YOUR SECTION (graded individually)</a:t>
+              <a:t>03.2  ·  YOUR SLIDE (your individual contribution)</a:t>
             </a:r>
           </a:p>
         </p:txBody>
@@ -6603,7 +6183,7 @@
                 </a:solidFill>
                 <a:latin typeface="Arial"/>
               </a:rPr>
-              <a:t>The lens + method I ran, and why our reading demanded it</a:t>
+              <a:t>A design intervention someone tried to move THIS value - [ what they did ]</a:t>
             </a:r>
           </a:p>
           <a:p>
@@ -6628,7 +6208,7 @@
                 </a:solidFill>
                 <a:latin typeface="Arial"/>
               </a:rPr>
-              <a:t>My evidence - what I actually observed or measured</a:t>
+              <a:t>The result - [ worked / mixed / failed ] - and the real source [ author, year ]</a:t>
             </a:r>
           </a:p>
           <a:p>
@@ -6653,7 +6233,7 @@
                 </a:solidFill>
                 <a:latin typeface="Arial"/>
               </a:rPr>
-              <a:t>What this says WORKS - and what does NOT</a:t>
+              <a:t>How you'd test it - [ method ]  (behavior = research it; understanding/affect = quick student check)</a:t>
             </a:r>
           </a:p>
           <a:p>
@@ -6678,7 +6258,7 @@
                 </a:solidFill>
                 <a:latin typeface="Arial"/>
               </a:rPr>
-              <a:t>The paper I found (real citation) and what it changes</a:t>
+              <a:t>Does it support or challenge our design direction? - [ ___ ]</a:t>
             </a:r>
           </a:p>
         </p:txBody>
@@ -6959,7 +6539,7 @@
                 </a:solidFill>
                 <a:latin typeface="Courier New"/>
               </a:rPr>
-              <a:t>PART 3 — OUTLOOK</a:t>
+              <a:t>OUR DESIGN DIRECTIONS</a:t>
             </a:r>
           </a:p>
         </p:txBody>
@@ -6998,7 +6578,7 @@
                 </a:solidFill>
                 <a:latin typeface="Arial"/>
               </a:rPr>
-              <a:t>What related research has already found</a:t>
+              <a:t>Generative - where the evidence points (carry into Wednesday)</a:t>
             </a:r>
           </a:p>
         </p:txBody>
@@ -7046,7 +6626,7 @@
                 </a:solidFill>
                 <a:latin typeface="Arial"/>
               </a:rPr>
-              <a:t>What have others tried in order to move this value?</a:t>
+              <a:t>2-3 design directions our research points to.</a:t>
             </a:r>
           </a:p>
           <a:p>
@@ -7071,7 +6651,7 @@
                 </a:solidFill>
                 <a:latin typeface="Arial"/>
               </a:rPr>
-              <a:t>What worked — and what failed?</a:t>
+              <a:t>Which one has the strongest evidence behind it?</a:t>
             </a:r>
           </a:p>
           <a:p>
@@ -7096,7 +6676,7 @@
                 </a:solidFill>
                 <a:latin typeface="Arial"/>
               </a:rPr>
-              <a:t>2–3 REAL sources. Never invent a citation.</a:t>
+              <a:t>What would we still need to verify - and how?</a:t>
             </a:r>
           </a:p>
         </p:txBody>
@@ -7168,14 +6748,53 @@
       <p:grpSpPr/>
       <p:sp>
         <p:nvSpPr>
-          <p:cNvPr id="2" name="Rectangle 1"/>
+          <p:cNvPr id="2" name="TextBox 1"/>
+          <p:cNvSpPr txBox="1"/>
+          <p:nvPr/>
+        </p:nvSpPr>
+        <p:spPr>
+          <a:xfrm>
+            <a:off x="640080" y="502920"/>
+            <a:ext cx="10058400" cy="365760"/>
+          </a:xfrm>
+          <a:prstGeom prst="rect">
+            <a:avLst/>
+          </a:prstGeom>
+          <a:noFill/>
+        </p:spPr>
+        <p:txBody>
+          <a:bodyPr wrap="square" anchor="t">
+            <a:spAutoFit/>
+          </a:bodyPr>
+          <a:lstStyle/>
+          <a:p>
+            <a:pPr algn="l">
+              <a:lnSpc>
+                <a:spcPct val="100000"/>
+              </a:lnSpc>
+            </a:pPr>
+            <a:r>
+              <a:rPr sz="1300" b="1">
+                <a:solidFill>
+                  <a:srgbClr val="00FF41"/>
+                </a:solidFill>
+                <a:latin typeface="Courier New"/>
+              </a:rPr>
+              <a:t>SOURCES</a:t>
+            </a:r>
+          </a:p>
+        </p:txBody>
+      </p:sp>
+      <p:sp>
+        <p:nvSpPr>
+          <p:cNvPr id="3" name="Rectangle 2"/>
           <p:cNvSpPr/>
           <p:nvPr/>
         </p:nvSpPr>
         <p:spPr>
           <a:xfrm>
-            <a:off x="0" y="0"/>
-            <a:ext cx="256032" cy="6858000"/>
+            <a:off x="640080" y="932688"/>
+            <a:ext cx="822960" cy="73152"/>
           </a:xfrm>
           <a:prstGeom prst="rect">
             <a:avLst/>
@@ -7212,14 +6831,14 @@
       </p:sp>
       <p:sp>
         <p:nvSpPr>
-          <p:cNvPr id="3" name="TextBox 2"/>
+          <p:cNvPr id="4" name="TextBox 3"/>
           <p:cNvSpPr txBox="1"/>
           <p:nvPr/>
         </p:nvSpPr>
         <p:spPr>
           <a:xfrm>
-            <a:off x="822960" y="1417320"/>
-            <a:ext cx="2743200" cy="1097280"/>
+            <a:off x="640080" y="1188720"/>
+            <a:ext cx="10972800" cy="914400"/>
           </a:xfrm>
           <a:prstGeom prst="rect">
             <a:avLst/>
@@ -7238,27 +6857,150 @@
               </a:lnSpc>
             </a:pPr>
             <a:r>
-              <a:rPr sz="6400" b="1">
-                <a:solidFill>
-                  <a:srgbClr val="00FF41"/>
-                </a:solidFill>
-                <a:latin typeface="Courier New"/>
-              </a:rPr>
-              <a:t>05</a:t>
-            </a:r>
-          </a:p>
-        </p:txBody>
-      </p:sp>
-      <p:sp>
-        <p:nvSpPr>
-          <p:cNvPr id="4" name="TextBox 3"/>
+              <a:rPr sz="3200" b="1">
+                <a:solidFill>
+                  <a:srgbClr val="F5F7FA"/>
+                </a:solidFill>
+                <a:latin typeface="Arial"/>
+              </a:rPr>
+              <a:t>What we read</a:t>
+            </a:r>
+          </a:p>
+        </p:txBody>
+      </p:sp>
+      <p:sp>
+        <p:nvSpPr>
+          <p:cNvPr id="5" name="TextBox 4"/>
           <p:cNvSpPr txBox="1"/>
           <p:nvPr/>
         </p:nvSpPr>
         <p:spPr>
           <a:xfrm>
-            <a:off x="841248" y="2487168"/>
-            <a:ext cx="10424160" cy="457200"/>
+            <a:off x="658368" y="2377440"/>
+            <a:ext cx="10881360" cy="3108960"/>
+          </a:xfrm>
+          <a:prstGeom prst="rect">
+            <a:avLst/>
+          </a:prstGeom>
+          <a:noFill/>
+        </p:spPr>
+        <p:txBody>
+          <a:bodyPr wrap="square" anchor="t">
+            <a:spAutoFit/>
+          </a:bodyPr>
+          <a:lstStyle/>
+          <a:p>
+            <a:pPr algn="l">
+              <a:lnSpc>
+                <a:spcPct val="145000"/>
+              </a:lnSpc>
+            </a:pPr>
+            <a:r>
+              <a:rPr sz="1700" b="1">
+                <a:solidFill>
+                  <a:srgbClr val="00FF41"/>
+                </a:solidFill>
+                <a:latin typeface="Arial"/>
+              </a:rPr>
+              <a:t>•  </a:t>
+            </a:r>
+            <a:r>
+              <a:rPr sz="1700" b="0">
+                <a:solidFill>
+                  <a:srgbClr val="8A94A6"/>
+                </a:solidFill>
+                <a:latin typeface="Arial"/>
+              </a:rPr>
+              <a:t>Author, Year. Title. Where it appeared.  —  what it found</a:t>
+            </a:r>
+          </a:p>
+          <a:p>
+            <a:pPr algn="l">
+              <a:lnSpc>
+                <a:spcPct val="145000"/>
+              </a:lnSpc>
+            </a:pPr>
+            <a:r>
+              <a:rPr sz="1700" b="1">
+                <a:solidFill>
+                  <a:srgbClr val="00FF41"/>
+                </a:solidFill>
+                <a:latin typeface="Arial"/>
+              </a:rPr>
+              <a:t>•  </a:t>
+            </a:r>
+            <a:r>
+              <a:rPr sz="1700" b="0">
+                <a:solidFill>
+                  <a:srgbClr val="8A94A6"/>
+                </a:solidFill>
+                <a:latin typeface="Arial"/>
+              </a:rPr>
+              <a:t>Author, Year. Title. Where it appeared.  —  what it found</a:t>
+            </a:r>
+          </a:p>
+          <a:p>
+            <a:pPr algn="l">
+              <a:lnSpc>
+                <a:spcPct val="145000"/>
+              </a:lnSpc>
+            </a:pPr>
+            <a:r>
+              <a:rPr sz="1700" b="1">
+                <a:solidFill>
+                  <a:srgbClr val="00FF41"/>
+                </a:solidFill>
+                <a:latin typeface="Arial"/>
+              </a:rPr>
+              <a:t>•  </a:t>
+            </a:r>
+            <a:r>
+              <a:rPr sz="1700" b="0">
+                <a:solidFill>
+                  <a:srgbClr val="8A94A6"/>
+                </a:solidFill>
+                <a:latin typeface="Arial"/>
+              </a:rPr>
+              <a:t>Author, Year. Title. Where it appeared.  —  what it found</a:t>
+            </a:r>
+          </a:p>
+          <a:p>
+            <a:pPr algn="l">
+              <a:lnSpc>
+                <a:spcPct val="145000"/>
+              </a:lnSpc>
+            </a:pPr>
+            <a:r>
+              <a:rPr sz="1700" b="1">
+                <a:solidFill>
+                  <a:srgbClr val="00FF41"/>
+                </a:solidFill>
+                <a:latin typeface="Arial"/>
+              </a:rPr>
+              <a:t>•  </a:t>
+            </a:r>
+            <a:r>
+              <a:rPr sz="1700" b="0">
+                <a:solidFill>
+                  <a:srgbClr val="8A94A6"/>
+                </a:solidFill>
+                <a:latin typeface="Arial"/>
+              </a:rPr>
+              <a:t>Author, Year. Title. Where it appeared.  —  what it found</a:t>
+            </a:r>
+          </a:p>
+        </p:txBody>
+      </p:sp>
+      <p:sp>
+        <p:nvSpPr>
+          <p:cNvPr id="6" name="TextBox 5"/>
+          <p:cNvSpPr txBox="1"/>
+          <p:nvPr/>
+        </p:nvSpPr>
+        <p:spPr>
+          <a:xfrm>
+            <a:off x="658368" y="5715000"/>
+            <a:ext cx="10881360" cy="365760"/>
           </a:xfrm>
           <a:prstGeom prst="rect">
             <a:avLst/>
@@ -7277,150 +7019,13 @@
               </a:lnSpc>
             </a:pPr>
             <a:r>
-              <a:rPr sz="1500" b="1">
-                <a:solidFill>
-                  <a:srgbClr val="00FF41"/>
+              <a:rPr sz="1300" b="0">
+                <a:solidFill>
+                  <a:srgbClr val="5A6474"/>
                 </a:solidFill>
                 <a:latin typeface="Courier New"/>
               </a:rPr>
-              <a:t>SO WHAT</a:t>
-            </a:r>
-          </a:p>
-        </p:txBody>
-      </p:sp>
-      <p:sp>
-        <p:nvSpPr>
-          <p:cNvPr id="5" name="TextBox 4"/>
-          <p:cNvSpPr txBox="1"/>
-          <p:nvPr/>
-        </p:nvSpPr>
-        <p:spPr>
-          <a:xfrm>
-            <a:off x="804672" y="2971800"/>
-            <a:ext cx="10607040" cy="1097280"/>
-          </a:xfrm>
-          <a:prstGeom prst="rect">
-            <a:avLst/>
-          </a:prstGeom>
-          <a:noFill/>
-        </p:spPr>
-        <p:txBody>
-          <a:bodyPr wrap="square" anchor="t">
-            <a:spAutoFit/>
-          </a:bodyPr>
-          <a:lstStyle/>
-          <a:p>
-            <a:pPr algn="l">
-              <a:lnSpc>
-                <a:spcPct val="103000"/>
-              </a:lnSpc>
-            </a:pPr>
-            <a:r>
-              <a:rPr sz="3800" b="1">
-                <a:solidFill>
-                  <a:srgbClr val="F5F7FA"/>
-                </a:solidFill>
-                <a:latin typeface="Arial"/>
-              </a:rPr>
-              <a:t>Our next design brief</a:t>
-            </a:r>
-          </a:p>
-        </p:txBody>
-      </p:sp>
-      <p:sp>
-        <p:nvSpPr>
-          <p:cNvPr id="6" name="TextBox 5"/>
-          <p:cNvSpPr txBox="1"/>
-          <p:nvPr/>
-        </p:nvSpPr>
-        <p:spPr>
-          <a:xfrm>
-            <a:off x="841248" y="4224528"/>
-            <a:ext cx="10424160" cy="1737360"/>
-          </a:xfrm>
-          <a:prstGeom prst="rect">
-            <a:avLst/>
-          </a:prstGeom>
-          <a:noFill/>
-        </p:spPr>
-        <p:txBody>
-          <a:bodyPr wrap="square" anchor="t">
-            <a:spAutoFit/>
-          </a:bodyPr>
-          <a:lstStyle/>
-          <a:p>
-            <a:pPr algn="l">
-              <a:lnSpc>
-                <a:spcPct val="128000"/>
-              </a:lnSpc>
-            </a:pPr>
-            <a:r>
-              <a:rPr sz="1700" b="1">
-                <a:solidFill>
-                  <a:srgbClr val="00FF41"/>
-                </a:solidFill>
-                <a:latin typeface="Arial"/>
-              </a:rPr>
-              <a:t>→  </a:t>
-            </a:r>
-            <a:r>
-              <a:rPr sz="1700" b="0">
-                <a:solidFill>
-                  <a:srgbClr val="8A94A6"/>
-                </a:solidFill>
-                <a:latin typeface="Arial"/>
-              </a:rPr>
-              <a:t>Verification opens the next design - it doesn't just grade this one.</a:t>
-            </a:r>
-          </a:p>
-          <a:p>
-            <a:pPr algn="l">
-              <a:lnSpc>
-                <a:spcPct val="128000"/>
-              </a:lnSpc>
-            </a:pPr>
-            <a:r>
-              <a:rPr sz="1700" b="1">
-                <a:solidFill>
-                  <a:srgbClr val="00FF41"/>
-                </a:solidFill>
-                <a:latin typeface="Arial"/>
-              </a:rPr>
-              <a:t>→  </a:t>
-            </a:r>
-            <a:r>
-              <a:rPr sz="1700" b="0">
-                <a:solidFill>
-                  <a:srgbClr val="8A94A6"/>
-                </a:solidFill>
-                <a:latin typeface="Arial"/>
-              </a:rPr>
-              <a:t>What OTHER design could actually achieve this value?</a:t>
-            </a:r>
-          </a:p>
-          <a:p>
-            <a:pPr algn="l">
-              <a:lnSpc>
-                <a:spcPct val="128000"/>
-              </a:lnSpc>
-            </a:pPr>
-            <a:r>
-              <a:rPr sz="1700" b="1">
-                <a:solidFill>
-                  <a:srgbClr val="00FF41"/>
-                </a:solidFill>
-                <a:latin typeface="Arial"/>
-              </a:rPr>
-              <a:t>→  </a:t>
-            </a:r>
-            <a:r>
-              <a:rPr sz="1700" b="0">
-                <a:solidFill>
-                  <a:srgbClr val="8A94A6"/>
-                </a:solidFill>
-                <a:latin typeface="Arial"/>
-              </a:rPr>
-              <a:t>What should the next cycle discover? (You carry this into Wednesday.)</a:t>
+              <a:t>Real papers only — never invent a citation.</a:t>
             </a:r>
           </a:p>
         </p:txBody>

--- a/slides/team-decks/Week3-Tue-jamins-2nd-team.pptx
+++ b/slides/team-decks/Week3-Tue-jamins-2nd-team.pptx
@@ -14,6 +14,7 @@
     <p:sldId id="262" r:id="rId14"/>
     <p:sldId id="263" r:id="rId15"/>
     <p:sldId id="264" r:id="rId16"/>
+    <p:sldId id="265" r:id="rId17"/>
   </p:sldIdLst>
   <p:sldSz cx="12191695" cy="6858000" type="screen4x3"/>
   <p:notesSz cx="6858000" cy="9144000"/>
@@ -790,7 +791,7 @@
           <a:lstStyle/>
           <a:p>
             <a:r>
-              <a:t>John Maida's individual contribution: the design intervention they researched. Reflection lives in their own FigJam lane.</a:t>
+              <a:t>Section header — the team's own slides go after this one.</a:t>
             </a:r>
           </a:p>
         </p:txBody>
@@ -860,7 +861,7 @@
           <a:lstStyle/>
           <a:p>
             <a:r>
-              <a:t>Ajin Yohannan's individual contribution: the design intervention they researched. Reflection lives in their own FigJam lane.</a:t>
+              <a:t>John Maida's individual contribution: the real paper they found (AI academic search) and READ - not just an AI summary. Reflection lives in their own FigJam lane (block 06).</a:t>
             </a:r>
           </a:p>
         </p:txBody>
@@ -886,6 +887,76 @@
 </file>
 
 <file path=ppt/notesSlides/notesSlide7.xml><?xml version="1.0" encoding="utf-8"?>
+<p:notes xmlns:a="http://schemas.openxmlformats.org/drawingml/2006/main" xmlns:p="http://schemas.openxmlformats.org/presentationml/2006/main" xmlns:r="http://schemas.openxmlformats.org/officeDocument/2006/relationships">
+  <p:cSld>
+    <p:spTree>
+      <p:nvGrpSpPr>
+        <p:cNvPr id="1" name=""/>
+        <p:cNvGrpSpPr/>
+        <p:nvPr/>
+      </p:nvGrpSpPr>
+      <p:grpSpPr>
+        <a:xfrm>
+          <a:off x="0" y="0"/>
+          <a:ext cx="0" cy="0"/>
+          <a:chOff x="0" y="0"/>
+          <a:chExt cx="0" cy="0"/>
+        </a:xfrm>
+      </p:grpSpPr>
+      <p:sp>
+        <p:nvSpPr>
+          <p:cNvPr id="2" name="Slide Image Placeholder 1"/>
+          <p:cNvSpPr>
+            <a:spLocks noGrp="1"/>
+          </p:cNvSpPr>
+          <p:nvPr>
+            <p:ph type="sldImg" idx="2"/>
+          </p:nvPr>
+        </p:nvSpPr>
+        <p:spPr/>
+      </p:sp>
+      <p:sp>
+        <p:nvSpPr>
+          <p:cNvPr id="3" name="Notes Placeholder 2"/>
+          <p:cNvSpPr>
+            <a:spLocks noGrp="1"/>
+          </p:cNvSpPr>
+          <p:nvPr>
+            <p:ph type="body" idx="3" sz="quarter"/>
+          </p:nvPr>
+        </p:nvSpPr>
+        <p:spPr/>
+        <p:txBody>
+          <a:bodyPr/>
+          <a:lstStyle/>
+          <a:p>
+            <a:r>
+              <a:t>Ajin Yohannan's individual contribution: the real paper they found (AI academic search) and READ - not just an AI summary. Reflection lives in their own FigJam lane (block 06).</a:t>
+            </a:r>
+          </a:p>
+        </p:txBody>
+      </p:sp>
+      <p:sp>
+        <p:nvSpPr>
+          <p:cNvPr id="4" name="Slide Number Placeholder 3"/>
+          <p:cNvSpPr>
+            <a:spLocks noGrp="1"/>
+          </p:cNvSpPr>
+          <p:nvPr>
+            <p:ph type="sldNum" idx="5" sz="quarter"/>
+          </p:nvPr>
+        </p:nvSpPr>
+        <p:spPr/>
+      </p:sp>
+    </p:spTree>
+  </p:cSld>
+  <p:clrMapOvr>
+    <a:masterClrMapping/>
+  </p:clrMapOvr>
+</p:notes>
+</file>
+
+<file path=ppt/notesSlides/notesSlide8.xml><?xml version="1.0" encoding="utf-8"?>
 <p:notes xmlns:a="http://schemas.openxmlformats.org/drawingml/2006/main" xmlns:p="http://schemas.openxmlformats.org/presentationml/2006/main" xmlns:r="http://schemas.openxmlformats.org/officeDocument/2006/relationships">
   <p:cSld>
     <p:spTree>
@@ -4239,6 +4310,355 @@
 </p:sld>
 </file>
 
+<file path=ppt/slides/slide10.xml><?xml version="1.0" encoding="utf-8"?>
+<p:sld xmlns:a="http://schemas.openxmlformats.org/drawingml/2006/main" xmlns:p="http://schemas.openxmlformats.org/presentationml/2006/main" xmlns:r="http://schemas.openxmlformats.org/officeDocument/2006/relationships">
+  <p:cSld>
+    <p:bg>
+      <p:bgPr>
+        <a:solidFill>
+          <a:srgbClr val="0B0E14"/>
+        </a:solidFill>
+        <a:effectLst/>
+      </p:bgPr>
+    </p:bg>
+    <p:spTree>
+      <p:nvGrpSpPr>
+        <p:cNvPr id="1" name=""/>
+        <p:cNvGrpSpPr/>
+        <p:nvPr/>
+      </p:nvGrpSpPr>
+      <p:grpSpPr/>
+      <p:sp>
+        <p:nvSpPr>
+          <p:cNvPr id="2" name="TextBox 1"/>
+          <p:cNvSpPr txBox="1"/>
+          <p:nvPr/>
+        </p:nvSpPr>
+        <p:spPr>
+          <a:xfrm>
+            <a:off x="640080" y="502920"/>
+            <a:ext cx="10058400" cy="365760"/>
+          </a:xfrm>
+          <a:prstGeom prst="rect">
+            <a:avLst/>
+          </a:prstGeom>
+          <a:noFill/>
+        </p:spPr>
+        <p:txBody>
+          <a:bodyPr wrap="square" anchor="t">
+            <a:spAutoFit/>
+          </a:bodyPr>
+          <a:lstStyle/>
+          <a:p>
+            <a:pPr algn="l">
+              <a:lnSpc>
+                <a:spcPct val="100000"/>
+              </a:lnSpc>
+            </a:pPr>
+            <a:r>
+              <a:rPr sz="1300" b="1">
+                <a:solidFill>
+                  <a:srgbClr val="00FF41"/>
+                </a:solidFill>
+                <a:latin typeface="Courier New"/>
+              </a:rPr>
+              <a:t>SOURCES</a:t>
+            </a:r>
+          </a:p>
+        </p:txBody>
+      </p:sp>
+      <p:sp>
+        <p:nvSpPr>
+          <p:cNvPr id="3" name="Rectangle 2"/>
+          <p:cNvSpPr/>
+          <p:nvPr/>
+        </p:nvSpPr>
+        <p:spPr>
+          <a:xfrm>
+            <a:off x="640080" y="932688"/>
+            <a:ext cx="822960" cy="73152"/>
+          </a:xfrm>
+          <a:prstGeom prst="rect">
+            <a:avLst/>
+          </a:prstGeom>
+          <a:solidFill>
+            <a:srgbClr val="00FF41"/>
+          </a:solidFill>
+          <a:ln>
+            <a:noFill/>
+          </a:ln>
+          <a:effectLst/>
+        </p:spPr>
+        <p:style>
+          <a:lnRef idx="1">
+            <a:schemeClr val="accent1"/>
+          </a:lnRef>
+          <a:fillRef idx="3">
+            <a:schemeClr val="accent1"/>
+          </a:fillRef>
+          <a:effectRef idx="2">
+            <a:schemeClr val="accent1"/>
+          </a:effectRef>
+          <a:fontRef idx="minor">
+            <a:schemeClr val="lt1"/>
+          </a:fontRef>
+        </p:style>
+        <p:txBody>
+          <a:bodyPr rtlCol="0" anchor="ctr"/>
+          <a:lstStyle/>
+          <a:p>
+            <a:pPr algn="ctr"/>
+          </a:p>
+        </p:txBody>
+      </p:sp>
+      <p:sp>
+        <p:nvSpPr>
+          <p:cNvPr id="4" name="TextBox 3"/>
+          <p:cNvSpPr txBox="1"/>
+          <p:nvPr/>
+        </p:nvSpPr>
+        <p:spPr>
+          <a:xfrm>
+            <a:off x="640080" y="1188720"/>
+            <a:ext cx="10972800" cy="914400"/>
+          </a:xfrm>
+          <a:prstGeom prst="rect">
+            <a:avLst/>
+          </a:prstGeom>
+          <a:noFill/>
+        </p:spPr>
+        <p:txBody>
+          <a:bodyPr wrap="square" anchor="t">
+            <a:spAutoFit/>
+          </a:bodyPr>
+          <a:lstStyle/>
+          <a:p>
+            <a:pPr algn="l">
+              <a:lnSpc>
+                <a:spcPct val="100000"/>
+              </a:lnSpc>
+            </a:pPr>
+            <a:r>
+              <a:rPr sz="3200" b="1">
+                <a:solidFill>
+                  <a:srgbClr val="F5F7FA"/>
+                </a:solidFill>
+                <a:latin typeface="Arial"/>
+              </a:rPr>
+              <a:t>What we read</a:t>
+            </a:r>
+          </a:p>
+        </p:txBody>
+      </p:sp>
+      <p:sp>
+        <p:nvSpPr>
+          <p:cNvPr id="5" name="TextBox 4"/>
+          <p:cNvSpPr txBox="1"/>
+          <p:nvPr/>
+        </p:nvSpPr>
+        <p:spPr>
+          <a:xfrm>
+            <a:off x="658368" y="2377440"/>
+            <a:ext cx="10881360" cy="3108960"/>
+          </a:xfrm>
+          <a:prstGeom prst="rect">
+            <a:avLst/>
+          </a:prstGeom>
+          <a:noFill/>
+        </p:spPr>
+        <p:txBody>
+          <a:bodyPr wrap="square" anchor="t">
+            <a:spAutoFit/>
+          </a:bodyPr>
+          <a:lstStyle/>
+          <a:p>
+            <a:pPr algn="l">
+              <a:lnSpc>
+                <a:spcPct val="145000"/>
+              </a:lnSpc>
+            </a:pPr>
+            <a:r>
+              <a:rPr sz="1700" b="1">
+                <a:solidFill>
+                  <a:srgbClr val="00FF41"/>
+                </a:solidFill>
+                <a:latin typeface="Arial"/>
+              </a:rPr>
+              <a:t>•  </a:t>
+            </a:r>
+            <a:r>
+              <a:rPr sz="1700" b="0">
+                <a:solidFill>
+                  <a:srgbClr val="8A94A6"/>
+                </a:solidFill>
+                <a:latin typeface="Arial"/>
+              </a:rPr>
+              <a:t>Author, Year. Title. Where it appeared.  —  what it found</a:t>
+            </a:r>
+          </a:p>
+          <a:p>
+            <a:pPr algn="l">
+              <a:lnSpc>
+                <a:spcPct val="145000"/>
+              </a:lnSpc>
+            </a:pPr>
+            <a:r>
+              <a:rPr sz="1700" b="1">
+                <a:solidFill>
+                  <a:srgbClr val="00FF41"/>
+                </a:solidFill>
+                <a:latin typeface="Arial"/>
+              </a:rPr>
+              <a:t>•  </a:t>
+            </a:r>
+            <a:r>
+              <a:rPr sz="1700" b="0">
+                <a:solidFill>
+                  <a:srgbClr val="8A94A6"/>
+                </a:solidFill>
+                <a:latin typeface="Arial"/>
+              </a:rPr>
+              <a:t>Author, Year. Title. Where it appeared.  —  what it found</a:t>
+            </a:r>
+          </a:p>
+          <a:p>
+            <a:pPr algn="l">
+              <a:lnSpc>
+                <a:spcPct val="145000"/>
+              </a:lnSpc>
+            </a:pPr>
+            <a:r>
+              <a:rPr sz="1700" b="1">
+                <a:solidFill>
+                  <a:srgbClr val="00FF41"/>
+                </a:solidFill>
+                <a:latin typeface="Arial"/>
+              </a:rPr>
+              <a:t>•  </a:t>
+            </a:r>
+            <a:r>
+              <a:rPr sz="1700" b="0">
+                <a:solidFill>
+                  <a:srgbClr val="8A94A6"/>
+                </a:solidFill>
+                <a:latin typeface="Arial"/>
+              </a:rPr>
+              <a:t>Author, Year. Title. Where it appeared.  —  what it found</a:t>
+            </a:r>
+          </a:p>
+          <a:p>
+            <a:pPr algn="l">
+              <a:lnSpc>
+                <a:spcPct val="145000"/>
+              </a:lnSpc>
+            </a:pPr>
+            <a:r>
+              <a:rPr sz="1700" b="1">
+                <a:solidFill>
+                  <a:srgbClr val="00FF41"/>
+                </a:solidFill>
+                <a:latin typeface="Arial"/>
+              </a:rPr>
+              <a:t>•  </a:t>
+            </a:r>
+            <a:r>
+              <a:rPr sz="1700" b="0">
+                <a:solidFill>
+                  <a:srgbClr val="8A94A6"/>
+                </a:solidFill>
+                <a:latin typeface="Arial"/>
+              </a:rPr>
+              <a:t>Author, Year. Title. Where it appeared.  —  what it found</a:t>
+            </a:r>
+          </a:p>
+        </p:txBody>
+      </p:sp>
+      <p:sp>
+        <p:nvSpPr>
+          <p:cNvPr id="6" name="TextBox 5"/>
+          <p:cNvSpPr txBox="1"/>
+          <p:nvPr/>
+        </p:nvSpPr>
+        <p:spPr>
+          <a:xfrm>
+            <a:off x="658368" y="5715000"/>
+            <a:ext cx="10881360" cy="365760"/>
+          </a:xfrm>
+          <a:prstGeom prst="rect">
+            <a:avLst/>
+          </a:prstGeom>
+          <a:noFill/>
+        </p:spPr>
+        <p:txBody>
+          <a:bodyPr wrap="square" anchor="t">
+            <a:spAutoFit/>
+          </a:bodyPr>
+          <a:lstStyle/>
+          <a:p>
+            <a:pPr algn="l">
+              <a:lnSpc>
+                <a:spcPct val="100000"/>
+              </a:lnSpc>
+            </a:pPr>
+            <a:r>
+              <a:rPr sz="1300" b="0">
+                <a:solidFill>
+                  <a:srgbClr val="5A6474"/>
+                </a:solidFill>
+                <a:latin typeface="Courier New"/>
+              </a:rPr>
+              <a:t>Real papers only — never invent a citation.</a:t>
+            </a:r>
+          </a:p>
+        </p:txBody>
+      </p:sp>
+      <p:sp>
+        <p:nvSpPr>
+          <p:cNvPr id="7" name="TextBox 6"/>
+          <p:cNvSpPr txBox="1"/>
+          <p:nvPr/>
+        </p:nvSpPr>
+        <p:spPr>
+          <a:xfrm>
+            <a:off x="640080" y="6355080"/>
+            <a:ext cx="10972800" cy="365760"/>
+          </a:xfrm>
+          <a:prstGeom prst="rect">
+            <a:avLst/>
+          </a:prstGeom>
+          <a:noFill/>
+        </p:spPr>
+        <p:txBody>
+          <a:bodyPr wrap="square" anchor="t">
+            <a:spAutoFit/>
+          </a:bodyPr>
+          <a:lstStyle/>
+          <a:p>
+            <a:pPr algn="l">
+              <a:lnSpc>
+                <a:spcPct val="100000"/>
+              </a:lnSpc>
+            </a:pPr>
+            <a:r>
+              <a:rPr sz="1000" b="0">
+                <a:solidFill>
+                  <a:srgbClr val="5A6474"/>
+                </a:solidFill>
+                <a:latin typeface="Courier New"/>
+              </a:rPr>
+              <a:t>Value Verification · TECHIE 1121 · Cornell Tech · Tue Jul 28</a:t>
+            </a:r>
+          </a:p>
+        </p:txBody>
+      </p:sp>
+    </p:spTree>
+  </p:cSld>
+  <p:clrMapOvr>
+    <a:masterClrMapping/>
+  </p:clrMapOvr>
+</p:sld>
+</file>
+
 <file path=ppt/slides/slide2.xml><?xml version="1.0" encoding="utf-8"?>
 <p:sld xmlns:a="http://schemas.openxmlformats.org/drawingml/2006/main" xmlns:p="http://schemas.openxmlformats.org/presentationml/2006/main" xmlns:r="http://schemas.openxmlformats.org/officeDocument/2006/relationships">
   <p:cSld>
@@ -4422,7 +4842,7 @@
                 </a:solidFill>
                 <a:latin typeface="Arial"/>
               </a:rPr>
-              <a:t>Four section headers follow — they are the spine of your talk.</a:t>
+              <a:t>Five section headers follow — they MIRROR the FigJam canvas blocks. The canvas is where you work it out; this deck is where you present it.</a:t>
             </a:r>
           </a:p>
           <a:p>
@@ -4447,7 +4867,7 @@
                 </a:solidFill>
                 <a:latin typeface="Arial"/>
               </a:rPr>
-              <a:t>Sections 01, 02, 04 are the TEAM's. Section 03 has one named slide per person — your individual contribution.</a:t>
+              <a:t>Sections 01, 02, 03, 05 are the TEAM's. Section 04 has one named slide per person — the paper you found and READ.</a:t>
             </a:r>
           </a:p>
           <a:p>
@@ -4497,7 +4917,7 @@
                 </a:solidFill>
                 <a:latin typeface="Arial"/>
               </a:rPr>
-              <a:t>No time to run full tests today - so RESEARCH the method, and what interventions have actually moved this value.</a:t>
+              <a:t>No full user study today — for '03 What we found', apply your metrics with a partner (speculating is fine).</a:t>
             </a:r>
           </a:p>
           <a:p>
@@ -4522,7 +4942,7 @@
                 </a:solidFill>
                 <a:latin typeface="Arial"/>
               </a:rPr>
-              <a:t>Real citations only — if you can't find the paper, leave the claim out.</a:t>
+              <a:t>Each person READS one real paper (not just an AI summary) — that's section 04 / the FigJam Outlook.</a:t>
             </a:r>
           </a:p>
           <a:p>
@@ -4547,7 +4967,32 @@
                 </a:solidFill>
                 <a:latin typeface="Arial"/>
               </a:rPr>
-              <a:t>Your reflection is NOT a document — it goes in your own lane on the team FigJam canvas.</a:t>
+              <a:t>Real citations only — if you can't find the paper, leave the claim out.</a:t>
+            </a:r>
+          </a:p>
+          <a:p>
+            <a:pPr algn="l">
+              <a:lnSpc>
+                <a:spcPct val="130000"/>
+              </a:lnSpc>
+            </a:pPr>
+            <a:r>
+              <a:rPr sz="1900" b="1">
+                <a:solidFill>
+                  <a:srgbClr val="00FF41"/>
+                </a:solidFill>
+                <a:latin typeface="Arial"/>
+              </a:rPr>
+              <a:t>•  </a:t>
+            </a:r>
+            <a:r>
+              <a:rPr sz="1900" b="0">
+                <a:solidFill>
+                  <a:srgbClr val="F5F7FA"/>
+                </a:solidFill>
+                <a:latin typeface="Arial"/>
+              </a:rPr>
+              <a:t>Your reflection is NOT in this deck — it goes in your own lane on the team FigJam canvas (block 06).</a:t>
             </a:r>
           </a:p>
           <a:p>
@@ -4798,7 +5243,7 @@
                 </a:solidFill>
                 <a:latin typeface="Arial"/>
               </a:rPr>
-              <a:t>Discovery - operationalize the value</a:t>
+              <a:t>Operationalize the value  ·  FigJam: Value Definition</a:t>
             </a:r>
           </a:p>
         </p:txBody>
@@ -5122,7 +5567,7 @@
                 </a:solidFill>
                 <a:latin typeface="Arial"/>
               </a:rPr>
-              <a:t>Pick a method per lens - we won't run them all today</a:t>
+              <a:t>A method per lens + how others measure it  ·  FigJam: Brainstorm 1-2-3 + 02</a:t>
             </a:r>
           </a:p>
         </p:txBody>
@@ -5170,7 +5615,7 @@
                 </a:solidFill>
                 <a:latin typeface="Arial"/>
               </a:rPr>
-              <a:t>BEHAVIOR - do users ACT differently?  -&gt;  hard to test in class, so we RESEARCH it: [ method + what studies show ].</a:t>
+              <a:t>BEHAVIOR - do users ACT differently?  -&gt;  [ method + metric ].</a:t>
             </a:r>
           </a:p>
           <a:p>
@@ -5195,7 +5640,7 @@
                 </a:solidFill>
                 <a:latin typeface="Arial"/>
               </a:rPr>
-              <a:t>UNDERSTANDING - do they GRASP the value?  -&gt;  a quick check with fellow students is possible: [ method ].</a:t>
+              <a:t>UNDERSTANDING - do they GRASP the value?  -&gt;  [ method + metric ].</a:t>
             </a:r>
           </a:p>
           <a:p>
@@ -5220,7 +5665,32 @@
                 </a:solidFill>
                 <a:latin typeface="Arial"/>
               </a:rPr>
-              <a:t>AFFECT - do they FEEL differently?  -&gt;  a quick check with fellow students is possible: [ method ].</a:t>
+              <a:t>AFFECT - do they FEEL differently?  -&gt;  [ method + metric ].</a:t>
+            </a:r>
+          </a:p>
+          <a:p>
+            <a:pPr algn="l">
+              <a:lnSpc>
+                <a:spcPct val="128000"/>
+              </a:lnSpc>
+            </a:pPr>
+            <a:r>
+              <a:rPr sz="1700" b="1">
+                <a:solidFill>
+                  <a:srgbClr val="00FF41"/>
+                </a:solidFill>
+                <a:latin typeface="Arial"/>
+              </a:rPr>
+              <a:t>→  </a:t>
+            </a:r>
+            <a:r>
+              <a:rPr sz="1700" b="0">
+                <a:solidFill>
+                  <a:srgbClr val="8A94A6"/>
+                </a:solidFill>
+                <a:latin typeface="Arial"/>
+              </a:rPr>
+              <a:t>How do OTHERS measure it, and which INSTRUMENT would we borrow?  (UEQ / HRI / METUX / slop)</a:t>
             </a:r>
           </a:p>
         </p:txBody>
@@ -5407,7 +5877,7 @@
                 </a:solidFill>
                 <a:latin typeface="Courier New"/>
               </a:rPr>
-              <a:t>DESIGN INTERVENTIONS THAT MOVED THIS VALUE</a:t>
+              <a:t>WHAT WE FOUND</a:t>
             </a:r>
           </a:p>
         </p:txBody>
@@ -5446,7 +5916,7 @@
                 </a:solidFill>
                 <a:latin typeface="Arial"/>
               </a:rPr>
-              <a:t>Research - what has actually worked? (each member owns a slide)</a:t>
+              <a:t>Run the check - speculate with a partner if needed  ·  FigJam: 03</a:t>
             </a:r>
           </a:p>
         </p:txBody>
@@ -5494,7 +5964,7 @@
                 </a:solidFill>
                 <a:latin typeface="Arial"/>
               </a:rPr>
-              <a:t>Each member presents their OWN researched intervention - the named slides that follow.</a:t>
+              <a:t>Apply your metrics with a partner - it is fine to SPECULATE today; real verification takes time.</a:t>
             </a:r>
           </a:p>
           <a:p>
@@ -5519,7 +5989,7 @@
                 </a:solidFill>
                 <a:latin typeface="Arial"/>
               </a:rPr>
-              <a:t>A real design intervention tried for this value, and its result: worked / mixed / failed.</a:t>
+              <a:t>BEHAVIOR: do they ACT differently?   UNDERSTANDING: do they GRASP it?   AFFECT: do they FEEL differently?</a:t>
             </a:r>
           </a:p>
           <a:p>
@@ -5544,7 +6014,7 @@
                 </a:solidFill>
                 <a:latin typeface="Arial"/>
               </a:rPr>
-              <a:t>Real sources only - never invent a citation.</a:t>
+              <a:t>Green = it works.  Red = it does not.  Does the design move the value - for whom, and who is left out?</a:t>
             </a:r>
           </a:p>
         </p:txBody>
@@ -5616,53 +6086,14 @@
       <p:grpSpPr/>
       <p:sp>
         <p:nvSpPr>
-          <p:cNvPr id="2" name="TextBox 1"/>
-          <p:cNvSpPr txBox="1"/>
-          <p:nvPr/>
-        </p:nvSpPr>
-        <p:spPr>
-          <a:xfrm>
-            <a:off x="640080" y="502920"/>
-            <a:ext cx="10058400" cy="365760"/>
-          </a:xfrm>
-          <a:prstGeom prst="rect">
-            <a:avLst/>
-          </a:prstGeom>
-          <a:noFill/>
-        </p:spPr>
-        <p:txBody>
-          <a:bodyPr wrap="square" anchor="t">
-            <a:spAutoFit/>
-          </a:bodyPr>
-          <a:lstStyle/>
-          <a:p>
-            <a:pPr algn="l">
-              <a:lnSpc>
-                <a:spcPct val="100000"/>
-              </a:lnSpc>
-            </a:pPr>
-            <a:r>
-              <a:rPr sz="1300" b="1">
-                <a:solidFill>
-                  <a:srgbClr val="00FF41"/>
-                </a:solidFill>
-                <a:latin typeface="Courier New"/>
-              </a:rPr>
-              <a:t>03.1  ·  YOUR SLIDE (your individual contribution)</a:t>
-            </a:r>
-          </a:p>
-        </p:txBody>
-      </p:sp>
-      <p:sp>
-        <p:nvSpPr>
-          <p:cNvPr id="3" name="Rectangle 2"/>
+          <p:cNvPr id="2" name="Rectangle 1"/>
           <p:cNvSpPr/>
           <p:nvPr/>
         </p:nvSpPr>
         <p:spPr>
           <a:xfrm>
-            <a:off x="640080" y="932688"/>
-            <a:ext cx="822960" cy="73152"/>
+            <a:off x="0" y="0"/>
+            <a:ext cx="256032" cy="6858000"/>
           </a:xfrm>
           <a:prstGeom prst="rect">
             <a:avLst/>
@@ -5699,14 +6130,14 @@
       </p:sp>
       <p:sp>
         <p:nvSpPr>
-          <p:cNvPr id="4" name="TextBox 3"/>
+          <p:cNvPr id="3" name="TextBox 2"/>
           <p:cNvSpPr txBox="1"/>
           <p:nvPr/>
         </p:nvSpPr>
         <p:spPr>
           <a:xfrm>
-            <a:off x="640080" y="1170432"/>
-            <a:ext cx="10972800" cy="914400"/>
+            <a:off x="822960" y="1417320"/>
+            <a:ext cx="2743200" cy="1097280"/>
           </a:xfrm>
           <a:prstGeom prst="rect">
             <a:avLst/>
@@ -5725,27 +6156,27 @@
               </a:lnSpc>
             </a:pPr>
             <a:r>
-              <a:rPr sz="3600" b="1">
-                <a:solidFill>
-                  <a:srgbClr val="F5F7FA"/>
-                </a:solidFill>
-                <a:latin typeface="Arial"/>
-              </a:rPr>
-              <a:t>John Maida</a:t>
-            </a:r>
-          </a:p>
-        </p:txBody>
-      </p:sp>
-      <p:sp>
-        <p:nvSpPr>
-          <p:cNvPr id="5" name="TextBox 4"/>
+              <a:rPr sz="6400" b="1">
+                <a:solidFill>
+                  <a:srgbClr val="00FF41"/>
+                </a:solidFill>
+                <a:latin typeface="Courier New"/>
+              </a:rPr>
+              <a:t>04</a:t>
+            </a:r>
+          </a:p>
+        </p:txBody>
+      </p:sp>
+      <p:sp>
+        <p:nvSpPr>
+          <p:cNvPr id="4" name="TextBox 3"/>
           <p:cNvSpPr txBox="1"/>
           <p:nvPr/>
         </p:nvSpPr>
         <p:spPr>
           <a:xfrm>
-            <a:off x="658368" y="2286000"/>
-            <a:ext cx="10881360" cy="2834640"/>
+            <a:off x="841248" y="2487168"/>
+            <a:ext cx="10424160" cy="457200"/>
           </a:xfrm>
           <a:prstGeom prst="rect">
             <a:avLst/>
@@ -5754,175 +6185,6 @@
         </p:spPr>
         <p:txBody>
           <a:bodyPr wrap="square" anchor="t">
-            <a:spAutoFit/>
-          </a:bodyPr>
-          <a:lstStyle/>
-          <a:p>
-            <a:pPr algn="l">
-              <a:lnSpc>
-                <a:spcPct val="134000"/>
-              </a:lnSpc>
-            </a:pPr>
-            <a:r>
-              <a:rPr sz="1900" b="1">
-                <a:solidFill>
-                  <a:srgbClr val="00FF41"/>
-                </a:solidFill>
-                <a:latin typeface="Arial"/>
-              </a:rPr>
-              <a:t>→  </a:t>
-            </a:r>
-            <a:r>
-              <a:rPr sz="1900" b="0">
-                <a:solidFill>
-                  <a:srgbClr val="F5F7FA"/>
-                </a:solidFill>
-                <a:latin typeface="Arial"/>
-              </a:rPr>
-              <a:t>A design intervention someone tried to move THIS value - [ what they did ]</a:t>
-            </a:r>
-          </a:p>
-          <a:p>
-            <a:pPr algn="l">
-              <a:lnSpc>
-                <a:spcPct val="134000"/>
-              </a:lnSpc>
-            </a:pPr>
-            <a:r>
-              <a:rPr sz="1900" b="1">
-                <a:solidFill>
-                  <a:srgbClr val="00FF41"/>
-                </a:solidFill>
-                <a:latin typeface="Arial"/>
-              </a:rPr>
-              <a:t>→  </a:t>
-            </a:r>
-            <a:r>
-              <a:rPr sz="1900" b="0">
-                <a:solidFill>
-                  <a:srgbClr val="F5F7FA"/>
-                </a:solidFill>
-                <a:latin typeface="Arial"/>
-              </a:rPr>
-              <a:t>The result - [ worked / mixed / failed ] - and the real source [ author, year ]</a:t>
-            </a:r>
-          </a:p>
-          <a:p>
-            <a:pPr algn="l">
-              <a:lnSpc>
-                <a:spcPct val="134000"/>
-              </a:lnSpc>
-            </a:pPr>
-            <a:r>
-              <a:rPr sz="1900" b="1">
-                <a:solidFill>
-                  <a:srgbClr val="00FF41"/>
-                </a:solidFill>
-                <a:latin typeface="Arial"/>
-              </a:rPr>
-              <a:t>→  </a:t>
-            </a:r>
-            <a:r>
-              <a:rPr sz="1900" b="0">
-                <a:solidFill>
-                  <a:srgbClr val="F5F7FA"/>
-                </a:solidFill>
-                <a:latin typeface="Arial"/>
-              </a:rPr>
-              <a:t>How you'd test it - [ method ]  (behavior = research it; understanding/affect = quick student check)</a:t>
-            </a:r>
-          </a:p>
-          <a:p>
-            <a:pPr algn="l">
-              <a:lnSpc>
-                <a:spcPct val="134000"/>
-              </a:lnSpc>
-            </a:pPr>
-            <a:r>
-              <a:rPr sz="1900" b="1">
-                <a:solidFill>
-                  <a:srgbClr val="00FF41"/>
-                </a:solidFill>
-                <a:latin typeface="Arial"/>
-              </a:rPr>
-              <a:t>→  </a:t>
-            </a:r>
-            <a:r>
-              <a:rPr sz="1900" b="0">
-                <a:solidFill>
-                  <a:srgbClr val="F5F7FA"/>
-                </a:solidFill>
-                <a:latin typeface="Arial"/>
-              </a:rPr>
-              <a:t>Does it support or challenge our design direction? - [ ___ ]</a:t>
-            </a:r>
-          </a:p>
-        </p:txBody>
-      </p:sp>
-      <p:sp>
-        <p:nvSpPr>
-          <p:cNvPr id="6" name="Rounded Rectangle 5"/>
-          <p:cNvSpPr/>
-          <p:nvPr/>
-        </p:nvSpPr>
-        <p:spPr>
-          <a:xfrm>
-            <a:off x="640080" y="5440680"/>
-            <a:ext cx="10881360" cy="658368"/>
-          </a:xfrm>
-          <a:prstGeom prst="roundRect">
-            <a:avLst/>
-          </a:prstGeom>
-          <a:solidFill>
-            <a:srgbClr val="151B26"/>
-          </a:solidFill>
-          <a:ln w="19050">
-            <a:solidFill>
-              <a:srgbClr val="00FF41"/>
-            </a:solidFill>
-          </a:ln>
-          <a:effectLst/>
-        </p:spPr>
-        <p:style>
-          <a:lnRef idx="1">
-            <a:schemeClr val="accent1"/>
-          </a:lnRef>
-          <a:fillRef idx="3">
-            <a:schemeClr val="accent1"/>
-          </a:fillRef>
-          <a:effectRef idx="2">
-            <a:schemeClr val="accent1"/>
-          </a:effectRef>
-          <a:fontRef idx="minor">
-            <a:schemeClr val="lt1"/>
-          </a:fontRef>
-        </p:style>
-        <p:txBody>
-          <a:bodyPr rtlCol="0" anchor="ctr"/>
-          <a:lstStyle/>
-          <a:p>
-            <a:pPr algn="ctr"/>
-          </a:p>
-        </p:txBody>
-      </p:sp>
-      <p:sp>
-        <p:nvSpPr>
-          <p:cNvPr id="7" name="TextBox 6"/>
-          <p:cNvSpPr txBox="1"/>
-          <p:nvPr/>
-        </p:nvSpPr>
-        <p:spPr>
-          <a:xfrm>
-            <a:off x="914400" y="5440680"/>
-            <a:ext cx="10332720" cy="658368"/>
-          </a:xfrm>
-          <a:prstGeom prst="rect">
-            <a:avLst/>
-          </a:prstGeom>
-          <a:noFill/>
-        </p:spPr>
-        <p:txBody>
-          <a:bodyPr wrap="square" anchor="ctr">
             <a:spAutoFit/>
           </a:bodyPr>
           <a:lstStyle/>
@@ -5933,29 +6195,157 @@
               </a:lnSpc>
             </a:pPr>
             <a:r>
-              <a:rPr sz="1600" b="1">
+              <a:rPr sz="1500" b="1">
                 <a:solidFill>
                   <a:srgbClr val="00FF41"/>
                 </a:solidFill>
-                <a:latin typeface="Arial"/>
-              </a:rPr>
-              <a:t>▸  </a:t>
-            </a:r>
-            <a:r>
-              <a:rPr sz="1500" b="1">
+                <a:latin typeface="Courier New"/>
+              </a:rPr>
+              <a:t>WHAT RELATED RESEARCH FOUND</a:t>
+            </a:r>
+          </a:p>
+        </p:txBody>
+      </p:sp>
+      <p:sp>
+        <p:nvSpPr>
+          <p:cNvPr id="5" name="TextBox 4"/>
+          <p:cNvSpPr txBox="1"/>
+          <p:nvPr/>
+        </p:nvSpPr>
+        <p:spPr>
+          <a:xfrm>
+            <a:off x="804672" y="2971800"/>
+            <a:ext cx="10607040" cy="1097280"/>
+          </a:xfrm>
+          <a:prstGeom prst="rect">
+            <a:avLst/>
+          </a:prstGeom>
+          <a:noFill/>
+        </p:spPr>
+        <p:txBody>
+          <a:bodyPr wrap="square" anchor="t">
+            <a:spAutoFit/>
+          </a:bodyPr>
+          <a:lstStyle/>
+          <a:p>
+            <a:pPr algn="l">
+              <a:lnSpc>
+                <a:spcPct val="103000"/>
+              </a:lnSpc>
+            </a:pPr>
+            <a:r>
+              <a:rPr sz="3800" b="1">
                 <a:solidFill>
                   <a:srgbClr val="F5F7FA"/>
                 </a:solidFill>
                 <a:latin typeface="Arial"/>
               </a:rPr>
-              <a:t>This slide is yours. Add more slides behind it if you need them - keep your name on them.</a:t>
-            </a:r>
-          </a:p>
-        </p:txBody>
-      </p:sp>
-      <p:sp>
-        <p:nvSpPr>
-          <p:cNvPr id="8" name="TextBox 7"/>
+              <a:t>Each member READS one real paper  ·  FigJam: 04 Outlook  ·  the named slides follow</a:t>
+            </a:r>
+          </a:p>
+        </p:txBody>
+      </p:sp>
+      <p:sp>
+        <p:nvSpPr>
+          <p:cNvPr id="6" name="TextBox 5"/>
+          <p:cNvSpPr txBox="1"/>
+          <p:nvPr/>
+        </p:nvSpPr>
+        <p:spPr>
+          <a:xfrm>
+            <a:off x="841248" y="4224528"/>
+            <a:ext cx="10424160" cy="1737360"/>
+          </a:xfrm>
+          <a:prstGeom prst="rect">
+            <a:avLst/>
+          </a:prstGeom>
+          <a:noFill/>
+        </p:spPr>
+        <p:txBody>
+          <a:bodyPr wrap="square" anchor="t">
+            <a:spAutoFit/>
+          </a:bodyPr>
+          <a:lstStyle/>
+          <a:p>
+            <a:pPr algn="l">
+              <a:lnSpc>
+                <a:spcPct val="128000"/>
+              </a:lnSpc>
+            </a:pPr>
+            <a:r>
+              <a:rPr sz="1700" b="1">
+                <a:solidFill>
+                  <a:srgbClr val="00FF41"/>
+                </a:solidFill>
+                <a:latin typeface="Arial"/>
+              </a:rPr>
+              <a:t>→  </a:t>
+            </a:r>
+            <a:r>
+              <a:rPr sz="1700" b="0">
+                <a:solidFill>
+                  <a:srgbClr val="8A94A6"/>
+                </a:solidFill>
+                <a:latin typeface="Arial"/>
+              </a:rPr>
+              <a:t>Each member presents their OWN paper - found via AI academic search (Claude / ChatGPT / Elicit / Semantic Scholar / Scholar Labs), then READ.</a:t>
+            </a:r>
+          </a:p>
+          <a:p>
+            <a:pPr algn="l">
+              <a:lnSpc>
+                <a:spcPct val="128000"/>
+              </a:lnSpc>
+            </a:pPr>
+            <a:r>
+              <a:rPr sz="1700" b="1">
+                <a:solidFill>
+                  <a:srgbClr val="00FF41"/>
+                </a:solidFill>
+                <a:latin typeface="Arial"/>
+              </a:rPr>
+              <a:t>→  </a:t>
+            </a:r>
+            <a:r>
+              <a:rPr sz="1700" b="0">
+                <a:solidFill>
+                  <a:srgbClr val="8A94A6"/>
+                </a:solidFill>
+                <a:latin typeface="Arial"/>
+              </a:rPr>
+              <a:t>Source (author, year)  -  what WORKED  -  what FAILED (avoid this).</a:t>
+            </a:r>
+          </a:p>
+          <a:p>
+            <a:pPr algn="l">
+              <a:lnSpc>
+                <a:spcPct val="128000"/>
+              </a:lnSpc>
+            </a:pPr>
+            <a:r>
+              <a:rPr sz="1700" b="1">
+                <a:solidFill>
+                  <a:srgbClr val="00FF41"/>
+                </a:solidFill>
+                <a:latin typeface="Arial"/>
+              </a:rPr>
+              <a:t>→  </a:t>
+            </a:r>
+            <a:r>
+              <a:rPr sz="1700" b="0">
+                <a:solidFill>
+                  <a:srgbClr val="8A94A6"/>
+                </a:solidFill>
+                <a:latin typeface="Arial"/>
+              </a:rPr>
+              <a:t>Real papers only, actually read - never invent a citation, never rely on an AI summary alone.</a:t>
+            </a:r>
+          </a:p>
+        </p:txBody>
+      </p:sp>
+      <p:sp>
+        <p:nvSpPr>
+          <p:cNvPr id="7" name="TextBox 6"/>
           <p:cNvSpPr txBox="1"/>
           <p:nvPr/>
         </p:nvSpPr>
@@ -6052,7 +6442,7 @@
                 </a:solidFill>
                 <a:latin typeface="Courier New"/>
               </a:rPr>
-              <a:t>03.2  ·  YOUR SLIDE (your individual contribution)</a:t>
+              <a:t>04.1  ·  YOUR PAPER (your individual contribution)</a:t>
             </a:r>
           </a:p>
         </p:txBody>
@@ -6135,7 +6525,7 @@
                 </a:solidFill>
                 <a:latin typeface="Arial"/>
               </a:rPr>
-              <a:t>Ajin Yohannan</a:t>
+              <a:t>John Maida</a:t>
             </a:r>
           </a:p>
         </p:txBody>
@@ -6183,7 +6573,7 @@
                 </a:solidFill>
                 <a:latin typeface="Arial"/>
               </a:rPr>
-              <a:t>A design intervention someone tried to move THIS value - [ what they did ]</a:t>
+              <a:t>The paper you found + READ - [ author, year, title ]  (AI search to FIND it; then read the actual paper)</a:t>
             </a:r>
           </a:p>
           <a:p>
@@ -6208,7 +6598,7 @@
                 </a:solidFill>
                 <a:latin typeface="Arial"/>
               </a:rPr>
-              <a:t>The result - [ worked / mixed / failed ] - and the real source [ author, year ]</a:t>
+              <a:t>The design intervention they tried to move THIS value - [ what they did ]</a:t>
             </a:r>
           </a:p>
           <a:p>
@@ -6233,7 +6623,7 @@
                 </a:solidFill>
                 <a:latin typeface="Arial"/>
               </a:rPr>
-              <a:t>How you'd test it - [ method ]  (behavior = research it; understanding/affect = quick student check)</a:t>
+              <a:t>What WORKED - [ ___ ]     |     What FAILED / to avoid - [ ___ ]</a:t>
             </a:r>
           </a:p>
           <a:p>
@@ -6352,7 +6742,7 @@
                 </a:solidFill>
                 <a:latin typeface="Arial"/>
               </a:rPr>
-              <a:t>This slide is yours. Add more slides behind it if you need them - keep your name on them.</a:t>
+              <a:t>This slide is yours - the paper you actually read. Add more behind it if you need to - keep your name on them.</a:t>
             </a:r>
           </a:p>
         </p:txBody>
@@ -6424,14 +6814,53 @@
       <p:grpSpPr/>
       <p:sp>
         <p:nvSpPr>
-          <p:cNvPr id="2" name="Rectangle 1"/>
+          <p:cNvPr id="2" name="TextBox 1"/>
+          <p:cNvSpPr txBox="1"/>
+          <p:nvPr/>
+        </p:nvSpPr>
+        <p:spPr>
+          <a:xfrm>
+            <a:off x="640080" y="502920"/>
+            <a:ext cx="10058400" cy="365760"/>
+          </a:xfrm>
+          <a:prstGeom prst="rect">
+            <a:avLst/>
+          </a:prstGeom>
+          <a:noFill/>
+        </p:spPr>
+        <p:txBody>
+          <a:bodyPr wrap="square" anchor="t">
+            <a:spAutoFit/>
+          </a:bodyPr>
+          <a:lstStyle/>
+          <a:p>
+            <a:pPr algn="l">
+              <a:lnSpc>
+                <a:spcPct val="100000"/>
+              </a:lnSpc>
+            </a:pPr>
+            <a:r>
+              <a:rPr sz="1300" b="1">
+                <a:solidFill>
+                  <a:srgbClr val="00FF41"/>
+                </a:solidFill>
+                <a:latin typeface="Courier New"/>
+              </a:rPr>
+              <a:t>04.2  ·  YOUR PAPER (your individual contribution)</a:t>
+            </a:r>
+          </a:p>
+        </p:txBody>
+      </p:sp>
+      <p:sp>
+        <p:nvSpPr>
+          <p:cNvPr id="3" name="Rectangle 2"/>
           <p:cNvSpPr/>
           <p:nvPr/>
         </p:nvSpPr>
         <p:spPr>
           <a:xfrm>
-            <a:off x="0" y="0"/>
-            <a:ext cx="256032" cy="6858000"/>
+            <a:off x="640080" y="932688"/>
+            <a:ext cx="822960" cy="73152"/>
           </a:xfrm>
           <a:prstGeom prst="rect">
             <a:avLst/>
@@ -6468,14 +6897,14 @@
       </p:sp>
       <p:sp>
         <p:nvSpPr>
-          <p:cNvPr id="3" name="TextBox 2"/>
+          <p:cNvPr id="4" name="TextBox 3"/>
           <p:cNvSpPr txBox="1"/>
           <p:nvPr/>
         </p:nvSpPr>
         <p:spPr>
           <a:xfrm>
-            <a:off x="822960" y="1417320"/>
-            <a:ext cx="2743200" cy="1097280"/>
+            <a:off x="640080" y="1170432"/>
+            <a:ext cx="10972800" cy="914400"/>
           </a:xfrm>
           <a:prstGeom prst="rect">
             <a:avLst/>
@@ -6494,27 +6923,27 @@
               </a:lnSpc>
             </a:pPr>
             <a:r>
-              <a:rPr sz="6400" b="1">
-                <a:solidFill>
-                  <a:srgbClr val="00FF41"/>
-                </a:solidFill>
-                <a:latin typeface="Courier New"/>
-              </a:rPr>
-              <a:t>04</a:t>
-            </a:r>
-          </a:p>
-        </p:txBody>
-      </p:sp>
-      <p:sp>
-        <p:nvSpPr>
-          <p:cNvPr id="4" name="TextBox 3"/>
+              <a:rPr sz="3600" b="1">
+                <a:solidFill>
+                  <a:srgbClr val="F5F7FA"/>
+                </a:solidFill>
+                <a:latin typeface="Arial"/>
+              </a:rPr>
+              <a:t>Ajin Yohannan</a:t>
+            </a:r>
+          </a:p>
+        </p:txBody>
+      </p:sp>
+      <p:sp>
+        <p:nvSpPr>
+          <p:cNvPr id="5" name="TextBox 4"/>
           <p:cNvSpPr txBox="1"/>
           <p:nvPr/>
         </p:nvSpPr>
         <p:spPr>
           <a:xfrm>
-            <a:off x="841248" y="2487168"/>
-            <a:ext cx="10424160" cy="457200"/>
+            <a:off x="658368" y="2286000"/>
+            <a:ext cx="10881360" cy="2834640"/>
           </a:xfrm>
           <a:prstGeom prst="rect">
             <a:avLst/>
@@ -6523,6 +6952,175 @@
         </p:spPr>
         <p:txBody>
           <a:bodyPr wrap="square" anchor="t">
+            <a:spAutoFit/>
+          </a:bodyPr>
+          <a:lstStyle/>
+          <a:p>
+            <a:pPr algn="l">
+              <a:lnSpc>
+                <a:spcPct val="134000"/>
+              </a:lnSpc>
+            </a:pPr>
+            <a:r>
+              <a:rPr sz="1900" b="1">
+                <a:solidFill>
+                  <a:srgbClr val="00FF41"/>
+                </a:solidFill>
+                <a:latin typeface="Arial"/>
+              </a:rPr>
+              <a:t>→  </a:t>
+            </a:r>
+            <a:r>
+              <a:rPr sz="1900" b="0">
+                <a:solidFill>
+                  <a:srgbClr val="F5F7FA"/>
+                </a:solidFill>
+                <a:latin typeface="Arial"/>
+              </a:rPr>
+              <a:t>The paper you found + READ - [ author, year, title ]  (AI search to FIND it; then read the actual paper)</a:t>
+            </a:r>
+          </a:p>
+          <a:p>
+            <a:pPr algn="l">
+              <a:lnSpc>
+                <a:spcPct val="134000"/>
+              </a:lnSpc>
+            </a:pPr>
+            <a:r>
+              <a:rPr sz="1900" b="1">
+                <a:solidFill>
+                  <a:srgbClr val="00FF41"/>
+                </a:solidFill>
+                <a:latin typeface="Arial"/>
+              </a:rPr>
+              <a:t>→  </a:t>
+            </a:r>
+            <a:r>
+              <a:rPr sz="1900" b="0">
+                <a:solidFill>
+                  <a:srgbClr val="F5F7FA"/>
+                </a:solidFill>
+                <a:latin typeface="Arial"/>
+              </a:rPr>
+              <a:t>The design intervention they tried to move THIS value - [ what they did ]</a:t>
+            </a:r>
+          </a:p>
+          <a:p>
+            <a:pPr algn="l">
+              <a:lnSpc>
+                <a:spcPct val="134000"/>
+              </a:lnSpc>
+            </a:pPr>
+            <a:r>
+              <a:rPr sz="1900" b="1">
+                <a:solidFill>
+                  <a:srgbClr val="00FF41"/>
+                </a:solidFill>
+                <a:latin typeface="Arial"/>
+              </a:rPr>
+              <a:t>→  </a:t>
+            </a:r>
+            <a:r>
+              <a:rPr sz="1900" b="0">
+                <a:solidFill>
+                  <a:srgbClr val="F5F7FA"/>
+                </a:solidFill>
+                <a:latin typeface="Arial"/>
+              </a:rPr>
+              <a:t>What WORKED - [ ___ ]     |     What FAILED / to avoid - [ ___ ]</a:t>
+            </a:r>
+          </a:p>
+          <a:p>
+            <a:pPr algn="l">
+              <a:lnSpc>
+                <a:spcPct val="134000"/>
+              </a:lnSpc>
+            </a:pPr>
+            <a:r>
+              <a:rPr sz="1900" b="1">
+                <a:solidFill>
+                  <a:srgbClr val="00FF41"/>
+                </a:solidFill>
+                <a:latin typeface="Arial"/>
+              </a:rPr>
+              <a:t>→  </a:t>
+            </a:r>
+            <a:r>
+              <a:rPr sz="1900" b="0">
+                <a:solidFill>
+                  <a:srgbClr val="F5F7FA"/>
+                </a:solidFill>
+                <a:latin typeface="Arial"/>
+              </a:rPr>
+              <a:t>Does it support or challenge our design direction? - [ ___ ]</a:t>
+            </a:r>
+          </a:p>
+        </p:txBody>
+      </p:sp>
+      <p:sp>
+        <p:nvSpPr>
+          <p:cNvPr id="6" name="Rounded Rectangle 5"/>
+          <p:cNvSpPr/>
+          <p:nvPr/>
+        </p:nvSpPr>
+        <p:spPr>
+          <a:xfrm>
+            <a:off x="640080" y="5440680"/>
+            <a:ext cx="10881360" cy="658368"/>
+          </a:xfrm>
+          <a:prstGeom prst="roundRect">
+            <a:avLst/>
+          </a:prstGeom>
+          <a:solidFill>
+            <a:srgbClr val="151B26"/>
+          </a:solidFill>
+          <a:ln w="19050">
+            <a:solidFill>
+              <a:srgbClr val="00FF41"/>
+            </a:solidFill>
+          </a:ln>
+          <a:effectLst/>
+        </p:spPr>
+        <p:style>
+          <a:lnRef idx="1">
+            <a:schemeClr val="accent1"/>
+          </a:lnRef>
+          <a:fillRef idx="3">
+            <a:schemeClr val="accent1"/>
+          </a:fillRef>
+          <a:effectRef idx="2">
+            <a:schemeClr val="accent1"/>
+          </a:effectRef>
+          <a:fontRef idx="minor">
+            <a:schemeClr val="lt1"/>
+          </a:fontRef>
+        </p:style>
+        <p:txBody>
+          <a:bodyPr rtlCol="0" anchor="ctr"/>
+          <a:lstStyle/>
+          <a:p>
+            <a:pPr algn="ctr"/>
+          </a:p>
+        </p:txBody>
+      </p:sp>
+      <p:sp>
+        <p:nvSpPr>
+          <p:cNvPr id="7" name="TextBox 6"/>
+          <p:cNvSpPr txBox="1"/>
+          <p:nvPr/>
+        </p:nvSpPr>
+        <p:spPr>
+          <a:xfrm>
+            <a:off x="914400" y="5440680"/>
+            <a:ext cx="10332720" cy="658368"/>
+          </a:xfrm>
+          <a:prstGeom prst="rect">
+            <a:avLst/>
+          </a:prstGeom>
+          <a:noFill/>
+        </p:spPr>
+        <p:txBody>
+          <a:bodyPr wrap="square" anchor="ctr">
             <a:spAutoFit/>
           </a:bodyPr>
           <a:lstStyle/>
@@ -6533,157 +7131,29 @@
               </a:lnSpc>
             </a:pPr>
             <a:r>
+              <a:rPr sz="1600" b="1">
+                <a:solidFill>
+                  <a:srgbClr val="00FF41"/>
+                </a:solidFill>
+                <a:latin typeface="Arial"/>
+              </a:rPr>
+              <a:t>▸  </a:t>
+            </a:r>
+            <a:r>
               <a:rPr sz="1500" b="1">
                 <a:solidFill>
-                  <a:srgbClr val="00FF41"/>
-                </a:solidFill>
-                <a:latin typeface="Courier New"/>
-              </a:rPr>
-              <a:t>OUR DESIGN DIRECTIONS</a:t>
-            </a:r>
-          </a:p>
-        </p:txBody>
-      </p:sp>
-      <p:sp>
-        <p:nvSpPr>
-          <p:cNvPr id="5" name="TextBox 4"/>
-          <p:cNvSpPr txBox="1"/>
-          <p:nvPr/>
-        </p:nvSpPr>
-        <p:spPr>
-          <a:xfrm>
-            <a:off x="804672" y="2971800"/>
-            <a:ext cx="10607040" cy="1097280"/>
-          </a:xfrm>
-          <a:prstGeom prst="rect">
-            <a:avLst/>
-          </a:prstGeom>
-          <a:noFill/>
-        </p:spPr>
-        <p:txBody>
-          <a:bodyPr wrap="square" anchor="t">
-            <a:spAutoFit/>
-          </a:bodyPr>
-          <a:lstStyle/>
-          <a:p>
-            <a:pPr algn="l">
-              <a:lnSpc>
-                <a:spcPct val="103000"/>
-              </a:lnSpc>
-            </a:pPr>
-            <a:r>
-              <a:rPr sz="3800" b="1">
-                <a:solidFill>
                   <a:srgbClr val="F5F7FA"/>
                 </a:solidFill>
                 <a:latin typeface="Arial"/>
               </a:rPr>
-              <a:t>Generative - where the evidence points (carry into Wednesday)</a:t>
-            </a:r>
-          </a:p>
-        </p:txBody>
-      </p:sp>
-      <p:sp>
-        <p:nvSpPr>
-          <p:cNvPr id="6" name="TextBox 5"/>
-          <p:cNvSpPr txBox="1"/>
-          <p:nvPr/>
-        </p:nvSpPr>
-        <p:spPr>
-          <a:xfrm>
-            <a:off x="841248" y="4224528"/>
-            <a:ext cx="10424160" cy="1737360"/>
-          </a:xfrm>
-          <a:prstGeom prst="rect">
-            <a:avLst/>
-          </a:prstGeom>
-          <a:noFill/>
-        </p:spPr>
-        <p:txBody>
-          <a:bodyPr wrap="square" anchor="t">
-            <a:spAutoFit/>
-          </a:bodyPr>
-          <a:lstStyle/>
-          <a:p>
-            <a:pPr algn="l">
-              <a:lnSpc>
-                <a:spcPct val="128000"/>
-              </a:lnSpc>
-            </a:pPr>
-            <a:r>
-              <a:rPr sz="1700" b="1">
-                <a:solidFill>
-                  <a:srgbClr val="00FF41"/>
-                </a:solidFill>
-                <a:latin typeface="Arial"/>
-              </a:rPr>
-              <a:t>→  </a:t>
-            </a:r>
-            <a:r>
-              <a:rPr sz="1700" b="0">
-                <a:solidFill>
-                  <a:srgbClr val="8A94A6"/>
-                </a:solidFill>
-                <a:latin typeface="Arial"/>
-              </a:rPr>
-              <a:t>2-3 design directions our research points to.</a:t>
-            </a:r>
-          </a:p>
-          <a:p>
-            <a:pPr algn="l">
-              <a:lnSpc>
-                <a:spcPct val="128000"/>
-              </a:lnSpc>
-            </a:pPr>
-            <a:r>
-              <a:rPr sz="1700" b="1">
-                <a:solidFill>
-                  <a:srgbClr val="00FF41"/>
-                </a:solidFill>
-                <a:latin typeface="Arial"/>
-              </a:rPr>
-              <a:t>→  </a:t>
-            </a:r>
-            <a:r>
-              <a:rPr sz="1700" b="0">
-                <a:solidFill>
-                  <a:srgbClr val="8A94A6"/>
-                </a:solidFill>
-                <a:latin typeface="Arial"/>
-              </a:rPr>
-              <a:t>Which one has the strongest evidence behind it?</a:t>
-            </a:r>
-          </a:p>
-          <a:p>
-            <a:pPr algn="l">
-              <a:lnSpc>
-                <a:spcPct val="128000"/>
-              </a:lnSpc>
-            </a:pPr>
-            <a:r>
-              <a:rPr sz="1700" b="1">
-                <a:solidFill>
-                  <a:srgbClr val="00FF41"/>
-                </a:solidFill>
-                <a:latin typeface="Arial"/>
-              </a:rPr>
-              <a:t>→  </a:t>
-            </a:r>
-            <a:r>
-              <a:rPr sz="1700" b="0">
-                <a:solidFill>
-                  <a:srgbClr val="8A94A6"/>
-                </a:solidFill>
-                <a:latin typeface="Arial"/>
-              </a:rPr>
-              <a:t>What would we still need to verify - and how?</a:t>
-            </a:r>
-          </a:p>
-        </p:txBody>
-      </p:sp>
-      <p:sp>
-        <p:nvSpPr>
-          <p:cNvPr id="7" name="TextBox 6"/>
+              <a:t>This slide is yours - the paper you actually read. Add more behind it if you need to - keep your name on them.</a:t>
+            </a:r>
+          </a:p>
+        </p:txBody>
+      </p:sp>
+      <p:sp>
+        <p:nvSpPr>
+          <p:cNvPr id="8" name="TextBox 7"/>
           <p:cNvSpPr txBox="1"/>
           <p:nvPr/>
         </p:nvSpPr>
@@ -6748,53 +7218,14 @@
       <p:grpSpPr/>
       <p:sp>
         <p:nvSpPr>
-          <p:cNvPr id="2" name="TextBox 1"/>
-          <p:cNvSpPr txBox="1"/>
-          <p:nvPr/>
-        </p:nvSpPr>
-        <p:spPr>
-          <a:xfrm>
-            <a:off x="640080" y="502920"/>
-            <a:ext cx="10058400" cy="365760"/>
-          </a:xfrm>
-          <a:prstGeom prst="rect">
-            <a:avLst/>
-          </a:prstGeom>
-          <a:noFill/>
-        </p:spPr>
-        <p:txBody>
-          <a:bodyPr wrap="square" anchor="t">
-            <a:spAutoFit/>
-          </a:bodyPr>
-          <a:lstStyle/>
-          <a:p>
-            <a:pPr algn="l">
-              <a:lnSpc>
-                <a:spcPct val="100000"/>
-              </a:lnSpc>
-            </a:pPr>
-            <a:r>
-              <a:rPr sz="1300" b="1">
-                <a:solidFill>
-                  <a:srgbClr val="00FF41"/>
-                </a:solidFill>
-                <a:latin typeface="Courier New"/>
-              </a:rPr>
-              <a:t>SOURCES</a:t>
-            </a:r>
-          </a:p>
-        </p:txBody>
-      </p:sp>
-      <p:sp>
-        <p:nvSpPr>
-          <p:cNvPr id="3" name="Rectangle 2"/>
+          <p:cNvPr id="2" name="Rectangle 1"/>
           <p:cNvSpPr/>
           <p:nvPr/>
         </p:nvSpPr>
         <p:spPr>
           <a:xfrm>
-            <a:off x="640080" y="932688"/>
-            <a:ext cx="822960" cy="73152"/>
+            <a:off x="0" y="0"/>
+            <a:ext cx="256032" cy="6858000"/>
           </a:xfrm>
           <a:prstGeom prst="rect">
             <a:avLst/>
@@ -6831,14 +7262,14 @@
       </p:sp>
       <p:sp>
         <p:nvSpPr>
-          <p:cNvPr id="4" name="TextBox 3"/>
+          <p:cNvPr id="3" name="TextBox 2"/>
           <p:cNvSpPr txBox="1"/>
           <p:nvPr/>
         </p:nvSpPr>
         <p:spPr>
           <a:xfrm>
-            <a:off x="640080" y="1188720"/>
-            <a:ext cx="10972800" cy="914400"/>
+            <a:off x="822960" y="1417320"/>
+            <a:ext cx="2743200" cy="1097280"/>
           </a:xfrm>
           <a:prstGeom prst="rect">
             <a:avLst/>
@@ -6857,150 +7288,27 @@
               </a:lnSpc>
             </a:pPr>
             <a:r>
-              <a:rPr sz="3200" b="1">
-                <a:solidFill>
-                  <a:srgbClr val="F5F7FA"/>
-                </a:solidFill>
-                <a:latin typeface="Arial"/>
-              </a:rPr>
-              <a:t>What we read</a:t>
-            </a:r>
-          </a:p>
-        </p:txBody>
-      </p:sp>
-      <p:sp>
-        <p:nvSpPr>
-          <p:cNvPr id="5" name="TextBox 4"/>
+              <a:rPr sz="6400" b="1">
+                <a:solidFill>
+                  <a:srgbClr val="00FF41"/>
+                </a:solidFill>
+                <a:latin typeface="Courier New"/>
+              </a:rPr>
+              <a:t>05</a:t>
+            </a:r>
+          </a:p>
+        </p:txBody>
+      </p:sp>
+      <p:sp>
+        <p:nvSpPr>
+          <p:cNvPr id="4" name="TextBox 3"/>
           <p:cNvSpPr txBox="1"/>
           <p:nvPr/>
         </p:nvSpPr>
         <p:spPr>
           <a:xfrm>
-            <a:off x="658368" y="2377440"/>
-            <a:ext cx="10881360" cy="3108960"/>
-          </a:xfrm>
-          <a:prstGeom prst="rect">
-            <a:avLst/>
-          </a:prstGeom>
-          <a:noFill/>
-        </p:spPr>
-        <p:txBody>
-          <a:bodyPr wrap="square" anchor="t">
-            <a:spAutoFit/>
-          </a:bodyPr>
-          <a:lstStyle/>
-          <a:p>
-            <a:pPr algn="l">
-              <a:lnSpc>
-                <a:spcPct val="145000"/>
-              </a:lnSpc>
-            </a:pPr>
-            <a:r>
-              <a:rPr sz="1700" b="1">
-                <a:solidFill>
-                  <a:srgbClr val="00FF41"/>
-                </a:solidFill>
-                <a:latin typeface="Arial"/>
-              </a:rPr>
-              <a:t>•  </a:t>
-            </a:r>
-            <a:r>
-              <a:rPr sz="1700" b="0">
-                <a:solidFill>
-                  <a:srgbClr val="8A94A6"/>
-                </a:solidFill>
-                <a:latin typeface="Arial"/>
-              </a:rPr>
-              <a:t>Author, Year. Title. Where it appeared.  —  what it found</a:t>
-            </a:r>
-          </a:p>
-          <a:p>
-            <a:pPr algn="l">
-              <a:lnSpc>
-                <a:spcPct val="145000"/>
-              </a:lnSpc>
-            </a:pPr>
-            <a:r>
-              <a:rPr sz="1700" b="1">
-                <a:solidFill>
-                  <a:srgbClr val="00FF41"/>
-                </a:solidFill>
-                <a:latin typeface="Arial"/>
-              </a:rPr>
-              <a:t>•  </a:t>
-            </a:r>
-            <a:r>
-              <a:rPr sz="1700" b="0">
-                <a:solidFill>
-                  <a:srgbClr val="8A94A6"/>
-                </a:solidFill>
-                <a:latin typeface="Arial"/>
-              </a:rPr>
-              <a:t>Author, Year. Title. Where it appeared.  —  what it found</a:t>
-            </a:r>
-          </a:p>
-          <a:p>
-            <a:pPr algn="l">
-              <a:lnSpc>
-                <a:spcPct val="145000"/>
-              </a:lnSpc>
-            </a:pPr>
-            <a:r>
-              <a:rPr sz="1700" b="1">
-                <a:solidFill>
-                  <a:srgbClr val="00FF41"/>
-                </a:solidFill>
-                <a:latin typeface="Arial"/>
-              </a:rPr>
-              <a:t>•  </a:t>
-            </a:r>
-            <a:r>
-              <a:rPr sz="1700" b="0">
-                <a:solidFill>
-                  <a:srgbClr val="8A94A6"/>
-                </a:solidFill>
-                <a:latin typeface="Arial"/>
-              </a:rPr>
-              <a:t>Author, Year. Title. Where it appeared.  —  what it found</a:t>
-            </a:r>
-          </a:p>
-          <a:p>
-            <a:pPr algn="l">
-              <a:lnSpc>
-                <a:spcPct val="145000"/>
-              </a:lnSpc>
-            </a:pPr>
-            <a:r>
-              <a:rPr sz="1700" b="1">
-                <a:solidFill>
-                  <a:srgbClr val="00FF41"/>
-                </a:solidFill>
-                <a:latin typeface="Arial"/>
-              </a:rPr>
-              <a:t>•  </a:t>
-            </a:r>
-            <a:r>
-              <a:rPr sz="1700" b="0">
-                <a:solidFill>
-                  <a:srgbClr val="8A94A6"/>
-                </a:solidFill>
-                <a:latin typeface="Arial"/>
-              </a:rPr>
-              <a:t>Author, Year. Title. Where it appeared.  —  what it found</a:t>
-            </a:r>
-          </a:p>
-        </p:txBody>
-      </p:sp>
-      <p:sp>
-        <p:nvSpPr>
-          <p:cNvPr id="6" name="TextBox 5"/>
-          <p:cNvSpPr txBox="1"/>
-          <p:nvPr/>
-        </p:nvSpPr>
-        <p:spPr>
-          <a:xfrm>
-            <a:off x="658368" y="5715000"/>
-            <a:ext cx="10881360" cy="365760"/>
+            <a:off x="841248" y="2487168"/>
+            <a:ext cx="10424160" cy="457200"/>
           </a:xfrm>
           <a:prstGeom prst="rect">
             <a:avLst/>
@@ -7019,13 +7327,150 @@
               </a:lnSpc>
             </a:pPr>
             <a:r>
-              <a:rPr sz="1300" b="0">
-                <a:solidFill>
-                  <a:srgbClr val="5A6474"/>
+              <a:rPr sz="1500" b="1">
+                <a:solidFill>
+                  <a:srgbClr val="00FF41"/>
                 </a:solidFill>
                 <a:latin typeface="Courier New"/>
               </a:rPr>
-              <a:t>Real papers only — never invent a citation.</a:t>
+              <a:t>SO WHAT - OUR NEXT DESIGN DIRECTION</a:t>
+            </a:r>
+          </a:p>
+        </p:txBody>
+      </p:sp>
+      <p:sp>
+        <p:nvSpPr>
+          <p:cNvPr id="5" name="TextBox 4"/>
+          <p:cNvSpPr txBox="1"/>
+          <p:nvPr/>
+        </p:nvSpPr>
+        <p:spPr>
+          <a:xfrm>
+            <a:off x="804672" y="2971800"/>
+            <a:ext cx="10607040" cy="1097280"/>
+          </a:xfrm>
+          <a:prstGeom prst="rect">
+            <a:avLst/>
+          </a:prstGeom>
+          <a:noFill/>
+        </p:spPr>
+        <p:txBody>
+          <a:bodyPr wrap="square" anchor="t">
+            <a:spAutoFit/>
+          </a:bodyPr>
+          <a:lstStyle/>
+          <a:p>
+            <a:pPr algn="l">
+              <a:lnSpc>
+                <a:spcPct val="103000"/>
+              </a:lnSpc>
+            </a:pPr>
+            <a:r>
+              <a:rPr sz="3800" b="1">
+                <a:solidFill>
+                  <a:srgbClr val="F5F7FA"/>
+                </a:solidFill>
+                <a:latin typeface="Arial"/>
+              </a:rPr>
+              <a:t>Verification opens the next design  ·  FigJam: 05  ·  carry into Wednesday</a:t>
+            </a:r>
+          </a:p>
+        </p:txBody>
+      </p:sp>
+      <p:sp>
+        <p:nvSpPr>
+          <p:cNvPr id="6" name="TextBox 5"/>
+          <p:cNvSpPr txBox="1"/>
+          <p:nvPr/>
+        </p:nvSpPr>
+        <p:spPr>
+          <a:xfrm>
+            <a:off x="841248" y="4224528"/>
+            <a:ext cx="10424160" cy="1737360"/>
+          </a:xfrm>
+          <a:prstGeom prst="rect">
+            <a:avLst/>
+          </a:prstGeom>
+          <a:noFill/>
+        </p:spPr>
+        <p:txBody>
+          <a:bodyPr wrap="square" anchor="t">
+            <a:spAutoFit/>
+          </a:bodyPr>
+          <a:lstStyle/>
+          <a:p>
+            <a:pPr algn="l">
+              <a:lnSpc>
+                <a:spcPct val="128000"/>
+              </a:lnSpc>
+            </a:pPr>
+            <a:r>
+              <a:rPr sz="1700" b="1">
+                <a:solidFill>
+                  <a:srgbClr val="00FF41"/>
+                </a:solidFill>
+                <a:latin typeface="Arial"/>
+              </a:rPr>
+              <a:t>→  </a:t>
+            </a:r>
+            <a:r>
+              <a:rPr sz="1700" b="0">
+                <a:solidFill>
+                  <a:srgbClr val="8A94A6"/>
+                </a:solidFill>
+                <a:latin typeface="Arial"/>
+              </a:rPr>
+              <a:t>If the design does NOT move the value, what WOULD?  Another design that could achieve it.</a:t>
+            </a:r>
+          </a:p>
+          <a:p>
+            <a:pPr algn="l">
+              <a:lnSpc>
+                <a:spcPct val="128000"/>
+              </a:lnSpc>
+            </a:pPr>
+            <a:r>
+              <a:rPr sz="1700" b="1">
+                <a:solidFill>
+                  <a:srgbClr val="00FF41"/>
+                </a:solidFill>
+                <a:latin typeface="Arial"/>
+              </a:rPr>
+              <a:t>→  </a:t>
+            </a:r>
+            <a:r>
+              <a:rPr sz="1700" b="0">
+                <a:solidFill>
+                  <a:srgbClr val="8A94A6"/>
+                </a:solidFill>
+                <a:latin typeface="Arial"/>
+              </a:rPr>
+              <a:t>What should the next cycle discover?</a:t>
+            </a:r>
+          </a:p>
+          <a:p>
+            <a:pPr algn="l">
+              <a:lnSpc>
+                <a:spcPct val="128000"/>
+              </a:lnSpc>
+            </a:pPr>
+            <a:r>
+              <a:rPr sz="1700" b="1">
+                <a:solidFill>
+                  <a:srgbClr val="00FF41"/>
+                </a:solidFill>
+                <a:latin typeface="Arial"/>
+              </a:rPr>
+              <a:t>→  </a:t>
+            </a:r>
+            <a:r>
+              <a:rPr sz="1700" b="0">
+                <a:solidFill>
+                  <a:srgbClr val="8A94A6"/>
+                </a:solidFill>
+                <a:latin typeface="Arial"/>
+              </a:rPr>
+              <a:t>2-3 directions the evidence points to - you carry these into Wednesday.</a:t>
             </a:r>
           </a:p>
         </p:txBody>

--- a/slides/team-decks/Week3-Tue-jamins-2nd-team.pptx
+++ b/slides/team-decks/Week3-Tue-jamins-2nd-team.pptx
@@ -581,7 +581,7 @@
           <a:lstStyle/>
           <a:p>
             <a:r>
-              <a:t>Section header — the team's own slides go after this one.</a:t>
+              <a:t>Section header (FigJam: VALUE DEFINITION) — the team's own slides go after this one.</a:t>
             </a:r>
           </a:p>
         </p:txBody>
@@ -651,7 +651,7 @@
           <a:lstStyle/>
           <a:p>
             <a:r>
-              <a:t>Section header — the team's own slides go after this one.</a:t>
+              <a:t>Section header (FigJam: BRAINSTORM 1·2·3 + 02) — the team's own slides go after this one.</a:t>
             </a:r>
           </a:p>
         </p:txBody>
@@ -721,7 +721,7 @@
           <a:lstStyle/>
           <a:p>
             <a:r>
-              <a:t>Section header — the team's own slides go after this one.</a:t>
+              <a:t>Section header (FigJam: 03 WHAT WE FOUND) — the team's own slides go after this one.</a:t>
             </a:r>
           </a:p>
         </p:txBody>
@@ -791,7 +791,7 @@
           <a:lstStyle/>
           <a:p>
             <a:r>
-              <a:t>Section header — the team's own slides go after this one.</a:t>
+              <a:t>Section header (FigJam: 04 OUTLOOK) — the team's own slides go after this one.</a:t>
             </a:r>
           </a:p>
         </p:txBody>
@@ -1001,7 +1001,7 @@
           <a:lstStyle/>
           <a:p>
             <a:r>
-              <a:t>Section header — the team's own slides go after this one.</a:t>
+              <a:t>Section header (FigJam: 05 SO WHAT) — the team's own slides go after this one.</a:t>
             </a:r>
           </a:p>
         </p:txBody>
@@ -4107,7 +4107,7 @@
         <p:spPr>
           <a:xfrm>
             <a:off x="804672" y="2103120"/>
-            <a:ext cx="10607040" cy="1737360"/>
+            <a:ext cx="10607040" cy="1554480"/>
           </a:xfrm>
           <a:prstGeom prst="rect">
             <a:avLst/>
@@ -4126,7 +4126,7 @@
               </a:lnSpc>
             </a:pPr>
             <a:r>
-              <a:rPr sz="4600" b="1">
+              <a:rPr sz="4400" b="1">
                 <a:solidFill>
                   <a:srgbClr val="F5F7FA"/>
                 </a:solidFill>
@@ -4184,7 +4184,7 @@
         </p:nvSpPr>
         <p:spPr>
           <a:xfrm>
-            <a:off x="841248" y="4206240"/>
+            <a:off x="841248" y="4224528"/>
             <a:ext cx="10607040" cy="457200"/>
           </a:xfrm>
           <a:prstGeom prst="rect">
@@ -4232,7 +4232,7 @@
         </p:nvSpPr>
         <p:spPr>
           <a:xfrm>
-            <a:off x="841248" y="4709160"/>
+            <a:off x="841248" y="4681728"/>
             <a:ext cx="10424160" cy="457200"/>
           </a:xfrm>
           <a:prstGeom prst="rect">
@@ -4419,8 +4419,8 @@
         </p:nvSpPr>
         <p:spPr>
           <a:xfrm>
-            <a:off x="640080" y="1188720"/>
-            <a:ext cx="10972800" cy="914400"/>
+            <a:off x="822960" y="1188720"/>
+            <a:ext cx="10515600" cy="914400"/>
           </a:xfrm>
           <a:prstGeom prst="rect">
             <a:avLst/>
@@ -4458,8 +4458,8 @@
         </p:nvSpPr>
         <p:spPr>
           <a:xfrm>
-            <a:off x="658368" y="2377440"/>
-            <a:ext cx="10881360" cy="3108960"/>
+            <a:off x="841248" y="2331720"/>
+            <a:ext cx="10515600" cy="3108960"/>
           </a:xfrm>
           <a:prstGeom prst="rect">
             <a:avLst/>
@@ -4474,11 +4474,11 @@
           <a:p>
             <a:pPr algn="l">
               <a:lnSpc>
-                <a:spcPct val="145000"/>
+                <a:spcPct val="150000"/>
               </a:lnSpc>
             </a:pPr>
             <a:r>
-              <a:rPr sz="1700" b="1">
+              <a:rPr sz="1800" b="1">
                 <a:solidFill>
                   <a:srgbClr val="00FF41"/>
                 </a:solidFill>
@@ -4487,7 +4487,7 @@
               <a:t>•  </a:t>
             </a:r>
             <a:r>
-              <a:rPr sz="1700" b="0">
+              <a:rPr sz="1800" b="0">
                 <a:solidFill>
                   <a:srgbClr val="8A94A6"/>
                 </a:solidFill>
@@ -4499,11 +4499,11 @@
           <a:p>
             <a:pPr algn="l">
               <a:lnSpc>
-                <a:spcPct val="145000"/>
+                <a:spcPct val="150000"/>
               </a:lnSpc>
             </a:pPr>
             <a:r>
-              <a:rPr sz="1700" b="1">
+              <a:rPr sz="1800" b="1">
                 <a:solidFill>
                   <a:srgbClr val="00FF41"/>
                 </a:solidFill>
@@ -4512,7 +4512,7 @@
               <a:t>•  </a:t>
             </a:r>
             <a:r>
-              <a:rPr sz="1700" b="0">
+              <a:rPr sz="1800" b="0">
                 <a:solidFill>
                   <a:srgbClr val="8A94A6"/>
                 </a:solidFill>
@@ -4524,11 +4524,11 @@
           <a:p>
             <a:pPr algn="l">
               <a:lnSpc>
-                <a:spcPct val="145000"/>
+                <a:spcPct val="150000"/>
               </a:lnSpc>
             </a:pPr>
             <a:r>
-              <a:rPr sz="1700" b="1">
+              <a:rPr sz="1800" b="1">
                 <a:solidFill>
                   <a:srgbClr val="00FF41"/>
                 </a:solidFill>
@@ -4537,7 +4537,7 @@
               <a:t>•  </a:t>
             </a:r>
             <a:r>
-              <a:rPr sz="1700" b="0">
+              <a:rPr sz="1800" b="0">
                 <a:solidFill>
                   <a:srgbClr val="8A94A6"/>
                 </a:solidFill>
@@ -4549,11 +4549,11 @@
           <a:p>
             <a:pPr algn="l">
               <a:lnSpc>
-                <a:spcPct val="145000"/>
+                <a:spcPct val="150000"/>
               </a:lnSpc>
             </a:pPr>
             <a:r>
-              <a:rPr sz="1700" b="1">
+              <a:rPr sz="1800" b="1">
                 <a:solidFill>
                   <a:srgbClr val="00FF41"/>
                 </a:solidFill>
@@ -4562,7 +4562,7 @@
               <a:t>•  </a:t>
             </a:r>
             <a:r>
-              <a:rPr sz="1700" b="0">
+              <a:rPr sz="1800" b="0">
                 <a:solidFill>
                   <a:srgbClr val="8A94A6"/>
                 </a:solidFill>
@@ -4581,8 +4581,8 @@
         </p:nvSpPr>
         <p:spPr>
           <a:xfrm>
-            <a:off x="658368" y="5715000"/>
-            <a:ext cx="10881360" cy="365760"/>
+            <a:off x="841248" y="5760720"/>
+            <a:ext cx="10515600" cy="365760"/>
           </a:xfrm>
           <a:prstGeom prst="rect">
             <a:avLst/>
@@ -4768,8 +4768,8 @@
         </p:nvSpPr>
         <p:spPr>
           <a:xfrm>
-            <a:off x="640080" y="1188720"/>
-            <a:ext cx="10972800" cy="914400"/>
+            <a:off x="822960" y="1188720"/>
+            <a:ext cx="10515600" cy="914400"/>
           </a:xfrm>
           <a:prstGeom prst="rect">
             <a:avLst/>
@@ -4788,13 +4788,13 @@
               </a:lnSpc>
             </a:pPr>
             <a:r>
-              <a:rPr sz="3200" b="1">
+              <a:rPr sz="3000" b="1">
                 <a:solidFill>
                   <a:srgbClr val="F5F7FA"/>
                 </a:solidFill>
                 <a:latin typeface="Arial"/>
               </a:rPr>
-              <a:t>Keep the headers. Put your slides behind them.</a:t>
+              <a:t>Keep the 5 headers. Put your slides behind them.</a:t>
             </a:r>
           </a:p>
         </p:txBody>
@@ -4807,8 +4807,8 @@
         </p:nvSpPr>
         <p:spPr>
           <a:xfrm>
-            <a:off x="658368" y="2377440"/>
-            <a:ext cx="10881360" cy="3474720"/>
+            <a:off x="841248" y="2331720"/>
+            <a:ext cx="10515600" cy="3749039"/>
           </a:xfrm>
           <a:prstGeom prst="rect">
             <a:avLst/>
@@ -4823,11 +4823,11 @@
           <a:p>
             <a:pPr algn="l">
               <a:lnSpc>
-                <a:spcPct val="130000"/>
+                <a:spcPct val="134000"/>
               </a:lnSpc>
             </a:pPr>
             <a:r>
-              <a:rPr sz="1900" b="1">
+              <a:rPr sz="1800" b="1">
                 <a:solidFill>
                   <a:srgbClr val="00FF41"/>
                 </a:solidFill>
@@ -4836,23 +4836,41 @@
               <a:t>•  </a:t>
             </a:r>
             <a:r>
-              <a:rPr sz="1900" b="0">
+              <a:rPr sz="1800" b="0">
                 <a:solidFill>
                   <a:srgbClr val="F5F7FA"/>
                 </a:solidFill>
                 <a:latin typeface="Arial"/>
               </a:rPr>
-              <a:t>Five section headers follow — they MIRROR the FigJam canvas blocks. The canvas is where you work it out; this deck is where you present it.</a:t>
+              <a:t>These 5 headers </a:t>
+            </a:r>
+            <a:r>
+              <a:rPr sz="1800" b="1">
+                <a:solidFill>
+                  <a:srgbClr val="00FF41"/>
+                </a:solidFill>
+                <a:latin typeface="Arial"/>
+              </a:rPr>
+              <a:t>mirror your FigJam board</a:t>
+            </a:r>
+            <a:r>
+              <a:rPr sz="1800" b="0">
+                <a:solidFill>
+                  <a:srgbClr val="F5F7FA"/>
+                </a:solidFill>
+                <a:latin typeface="Arial"/>
+              </a:rPr>
+              <a:t> — the canvas is where you work it out; this deck is where you present it.</a:t>
             </a:r>
           </a:p>
           <a:p>
             <a:pPr algn="l">
               <a:lnSpc>
-                <a:spcPct val="130000"/>
+                <a:spcPct val="134000"/>
               </a:lnSpc>
             </a:pPr>
             <a:r>
-              <a:rPr sz="1900" b="1">
+              <a:rPr sz="1800" b="1">
                 <a:solidFill>
                   <a:srgbClr val="00FF41"/>
                 </a:solidFill>
@@ -4861,23 +4879,41 @@
               <a:t>•  </a:t>
             </a:r>
             <a:r>
-              <a:rPr sz="1900" b="0">
+              <a:rPr sz="1800" b="0">
                 <a:solidFill>
                   <a:srgbClr val="F5F7FA"/>
                 </a:solidFill>
                 <a:latin typeface="Arial"/>
               </a:rPr>
-              <a:t>Sections 01, 02, 03, 05 are the TEAM's. Section 04 has one named slide per person — the paper you found and READ.</a:t>
+              <a:t>Add your slides </a:t>
+            </a:r>
+            <a:r>
+              <a:rPr sz="1800" b="1">
+                <a:solidFill>
+                  <a:srgbClr val="00FF41"/>
+                </a:solidFill>
+                <a:latin typeface="Arial"/>
+              </a:rPr>
+              <a:t>behind</a:t>
+            </a:r>
+            <a:r>
+              <a:rPr sz="1800" b="0">
+                <a:solidFill>
+                  <a:srgbClr val="F5F7FA"/>
+                </a:solidFill>
+                <a:latin typeface="Arial"/>
+              </a:rPr>
+              <a:t> each header — don't delete the headers.</a:t>
             </a:r>
           </a:p>
           <a:p>
             <a:pPr algn="l">
               <a:lnSpc>
-                <a:spcPct val="130000"/>
+                <a:spcPct val="134000"/>
               </a:lnSpc>
             </a:pPr>
             <a:r>
-              <a:rPr sz="1900" b="1">
+              <a:rPr sz="1800" b="1">
                 <a:solidFill>
                   <a:srgbClr val="00FF41"/>
                 </a:solidFill>
@@ -4886,23 +4922,32 @@
               <a:t>•  </a:t>
             </a:r>
             <a:r>
-              <a:rPr sz="1900" b="0">
+              <a:rPr sz="1800" b="0">
                 <a:solidFill>
                   <a:srgbClr val="F5F7FA"/>
                 </a:solidFill>
                 <a:latin typeface="Arial"/>
               </a:rPr>
-              <a:t>Add your own slides AFTER each header. Don't delete the headers.</a:t>
+              <a:t>Sections 01, 02, 03, 05 are the team's. </a:t>
+            </a:r>
+            <a:r>
+              <a:rPr sz="1800" b="1">
+                <a:solidFill>
+                  <a:srgbClr val="00FF41"/>
+                </a:solidFill>
+                <a:latin typeface="Arial"/>
+              </a:rPr>
+              <a:t>04 = one ‘YOUR PAPER’ slide per person.</a:t>
             </a:r>
           </a:p>
           <a:p>
             <a:pPr algn="l">
               <a:lnSpc>
-                <a:spcPct val="130000"/>
+                <a:spcPct val="134000"/>
               </a:lnSpc>
             </a:pPr>
             <a:r>
-              <a:rPr sz="1900" b="1">
+              <a:rPr sz="1800" b="1">
                 <a:solidFill>
                   <a:srgbClr val="00FF41"/>
                 </a:solidFill>
@@ -4911,23 +4956,23 @@
               <a:t>•  </a:t>
             </a:r>
             <a:r>
-              <a:rPr sz="1900" b="0">
+              <a:rPr sz="1800" b="0">
                 <a:solidFill>
                   <a:srgbClr val="F5F7FA"/>
                 </a:solidFill>
                 <a:latin typeface="Arial"/>
               </a:rPr>
-              <a:t>No full user study today — for '03 What we found', apply your metrics with a partner (speculating is fine).</a:t>
+              <a:t>No full study today — for ‘03 What we found’, check with a partner (speculating is fine).</a:t>
             </a:r>
           </a:p>
           <a:p>
             <a:pPr algn="l">
               <a:lnSpc>
-                <a:spcPct val="130000"/>
+                <a:spcPct val="134000"/>
               </a:lnSpc>
             </a:pPr>
             <a:r>
-              <a:rPr sz="1900" b="1">
+              <a:rPr sz="1800" b="1">
                 <a:solidFill>
                   <a:srgbClr val="00FF41"/>
                 </a:solidFill>
@@ -4936,23 +4981,41 @@
               <a:t>•  </a:t>
             </a:r>
             <a:r>
-              <a:rPr sz="1900" b="0">
+              <a:rPr sz="1800" b="0">
                 <a:solidFill>
                   <a:srgbClr val="F5F7FA"/>
                 </a:solidFill>
                 <a:latin typeface="Arial"/>
               </a:rPr>
-              <a:t>Each person READS one real paper (not just an AI summary) — that's section 04 / the FigJam Outlook.</a:t>
+              <a:t>Each person </a:t>
+            </a:r>
+            <a:r>
+              <a:rPr sz="1800" b="1">
+                <a:solidFill>
+                  <a:srgbClr val="00FF41"/>
+                </a:solidFill>
+                <a:latin typeface="Arial"/>
+              </a:rPr>
+              <a:t>READS one real paper</a:t>
+            </a:r>
+            <a:r>
+              <a:rPr sz="1800" b="0">
+                <a:solidFill>
+                  <a:srgbClr val="F5F7FA"/>
+                </a:solidFill>
+                <a:latin typeface="Arial"/>
+              </a:rPr>
+              <a:t> — not just an AI summary.</a:t>
             </a:r>
           </a:p>
           <a:p>
             <a:pPr algn="l">
               <a:lnSpc>
-                <a:spcPct val="130000"/>
+                <a:spcPct val="134000"/>
               </a:lnSpc>
             </a:pPr>
             <a:r>
-              <a:rPr sz="1900" b="1">
+              <a:rPr sz="1800" b="1">
                 <a:solidFill>
                   <a:srgbClr val="00FF41"/>
                 </a:solidFill>
@@ -4961,23 +5024,41 @@
               <a:t>•  </a:t>
             </a:r>
             <a:r>
-              <a:rPr sz="1900" b="0">
+              <a:rPr sz="1800" b="0">
                 <a:solidFill>
                   <a:srgbClr val="F5F7FA"/>
                 </a:solidFill>
                 <a:latin typeface="Arial"/>
               </a:rPr>
-              <a:t>Real citations only — if you can't find the paper, leave the claim out.</a:t>
+              <a:t>Your reflection goes on the </a:t>
+            </a:r>
+            <a:r>
+              <a:rPr sz="1800" b="1">
+                <a:solidFill>
+                  <a:srgbClr val="00FF41"/>
+                </a:solidFill>
+                <a:latin typeface="Arial"/>
+              </a:rPr>
+              <a:t>FigJam board (block 06)</a:t>
+            </a:r>
+            <a:r>
+              <a:rPr sz="1800" b="0">
+                <a:solidFill>
+                  <a:srgbClr val="F5F7FA"/>
+                </a:solidFill>
+                <a:latin typeface="Arial"/>
+              </a:rPr>
+              <a:t>, not in this deck.</a:t>
             </a:r>
           </a:p>
           <a:p>
             <a:pPr algn="l">
               <a:lnSpc>
-                <a:spcPct val="130000"/>
+                <a:spcPct val="134000"/>
               </a:lnSpc>
             </a:pPr>
             <a:r>
-              <a:rPr sz="1900" b="1">
+              <a:rPr sz="1800" b="1">
                 <a:solidFill>
                   <a:srgbClr val="00FF41"/>
                 </a:solidFill>
@@ -4986,34 +5067,9 @@
               <a:t>•  </a:t>
             </a:r>
             <a:r>
-              <a:rPr sz="1900" b="0">
-                <a:solidFill>
-                  <a:srgbClr val="F5F7FA"/>
-                </a:solidFill>
-                <a:latin typeface="Arial"/>
-              </a:rPr>
-              <a:t>Your reflection is NOT in this deck — it goes in your own lane on the team FigJam canvas (block 06).</a:t>
-            </a:r>
-          </a:p>
-          <a:p>
-            <a:pPr algn="l">
-              <a:lnSpc>
-                <a:spcPct val="130000"/>
-              </a:lnSpc>
-            </a:pPr>
-            <a:r>
-              <a:rPr sz="1900" b="1">
-                <a:solidFill>
-                  <a:srgbClr val="00FF41"/>
-                </a:solidFill>
-                <a:latin typeface="Arial"/>
-              </a:rPr>
-              <a:t>•  </a:t>
-            </a:r>
-            <a:r>
-              <a:rPr sz="1900" b="0">
-                <a:solidFill>
-                  <a:srgbClr val="F5F7FA"/>
+              <a:rPr sz="1800" b="0">
+                <a:solidFill>
+                  <a:srgbClr val="8A94A6"/>
                 </a:solidFill>
                 <a:latin typeface="Arial"/>
               </a:rPr>
@@ -5139,8 +5195,8 @@
         </p:nvSpPr>
         <p:spPr>
           <a:xfrm>
-            <a:off x="822960" y="1417320"/>
-            <a:ext cx="2743200" cy="1097280"/>
+            <a:off x="822960" y="566928"/>
+            <a:ext cx="10543032" cy="365760"/>
           </a:xfrm>
           <a:prstGeom prst="rect">
             <a:avLst/>
@@ -5159,13 +5215,13 @@
               </a:lnSpc>
             </a:pPr>
             <a:r>
-              <a:rPr sz="6400" b="1">
+              <a:rPr sz="1300" b="1">
                 <a:solidFill>
                   <a:srgbClr val="00FF41"/>
                 </a:solidFill>
                 <a:latin typeface="Courier New"/>
               </a:rPr>
-              <a:t>01</a:t>
+              <a:t>SECTION 01   ·   FIGJAM: VALUE DEFINITION</a:t>
             </a:r>
           </a:p>
         </p:txBody>
@@ -5178,8 +5234,8 @@
         </p:nvSpPr>
         <p:spPr>
           <a:xfrm>
-            <a:off x="841248" y="2487168"/>
-            <a:ext cx="10424160" cy="457200"/>
+            <a:off x="822960" y="1207008"/>
+            <a:ext cx="1737360" cy="1280160"/>
           </a:xfrm>
           <a:prstGeom prst="rect">
             <a:avLst/>
@@ -5198,13 +5254,13 @@
               </a:lnSpc>
             </a:pPr>
             <a:r>
-              <a:rPr sz="1500" b="1">
+              <a:rPr sz="6600" b="1">
                 <a:solidFill>
                   <a:srgbClr val="00FF41"/>
                 </a:solidFill>
                 <a:latin typeface="Courier New"/>
               </a:rPr>
-              <a:t>THE VALUE &amp; HOW WE DEFINE IT</a:t>
+              <a:t>01</a:t>
             </a:r>
           </a:p>
         </p:txBody>
@@ -5217,8 +5273,8 @@
         </p:nvSpPr>
         <p:spPr>
           <a:xfrm>
-            <a:off x="804672" y="2971800"/>
-            <a:ext cx="10607040" cy="1097280"/>
+            <a:off x="2697480" y="1298448"/>
+            <a:ext cx="8686800" cy="1097280"/>
           </a:xfrm>
           <a:prstGeom prst="rect">
             <a:avLst/>
@@ -5237,13 +5293,13 @@
               </a:lnSpc>
             </a:pPr>
             <a:r>
-              <a:rPr sz="3800" b="1">
+              <a:rPr sz="3000" b="1">
                 <a:solidFill>
                   <a:srgbClr val="F5F7FA"/>
                 </a:solidFill>
                 <a:latin typeface="Arial"/>
               </a:rPr>
-              <a:t>Operationalize the value  ·  FigJam: Value Definition</a:t>
+              <a:t>The value &amp; how we define it</a:t>
             </a:r>
           </a:p>
         </p:txBody>
@@ -5256,8 +5312,8 @@
         </p:nvSpPr>
         <p:spPr>
           <a:xfrm>
-            <a:off x="841248" y="4224528"/>
-            <a:ext cx="10424160" cy="1737360"/>
+            <a:off x="2697480" y="2395728"/>
+            <a:ext cx="8686800" cy="640080"/>
           </a:xfrm>
           <a:prstGeom prst="rect">
             <a:avLst/>
@@ -5272,61 +5328,133 @@
           <a:p>
             <a:pPr algn="l">
               <a:lnSpc>
-                <a:spcPct val="128000"/>
+                <a:spcPct val="110000"/>
               </a:lnSpc>
             </a:pPr>
             <a:r>
-              <a:rPr sz="1700" b="1">
-                <a:solidFill>
-                  <a:srgbClr val="00FF41"/>
-                </a:solidFill>
-                <a:latin typeface="Arial"/>
-              </a:rPr>
-              <a:t>→  </a:t>
-            </a:r>
-            <a:r>
-              <a:rPr sz="1700" b="0">
+              <a:rPr sz="1600" b="0">
                 <a:solidFill>
                   <a:srgbClr val="8A94A6"/>
                 </a:solidFill>
                 <a:latin typeface="Arial"/>
               </a:rPr>
-              <a:t>[ our app, in one line ]  -  and the value it claims.</a:t>
-            </a:r>
-          </a:p>
+              <a:t>Name the value, and pin down what it concretely means for your app.</a:t>
+            </a:r>
+          </a:p>
+        </p:txBody>
+      </p:sp>
+      <p:sp>
+        <p:nvSpPr>
+          <p:cNvPr id="7" name="Rounded Rectangle 6"/>
+          <p:cNvSpPr/>
+          <p:nvPr/>
+        </p:nvSpPr>
+        <p:spPr>
+          <a:xfrm>
+            <a:off x="822960" y="3310128"/>
+            <a:ext cx="10543032" cy="2606040"/>
+          </a:xfrm>
+          <a:prstGeom prst="roundRect">
+            <a:avLst/>
+          </a:prstGeom>
+          <a:solidFill>
+            <a:srgbClr val="151B26"/>
+          </a:solidFill>
+          <a:ln>
+            <a:noFill/>
+          </a:ln>
+          <a:effectLst/>
+        </p:spPr>
+        <p:style>
+          <a:lnRef idx="1">
+            <a:schemeClr val="accent1"/>
+          </a:lnRef>
+          <a:fillRef idx="3">
+            <a:schemeClr val="accent1"/>
+          </a:fillRef>
+          <a:effectRef idx="2">
+            <a:schemeClr val="accent1"/>
+          </a:effectRef>
+          <a:fontRef idx="minor">
+            <a:schemeClr val="lt1"/>
+          </a:fontRef>
+        </p:style>
+        <p:txBody>
+          <a:bodyPr rtlCol="0" anchor="ctr"/>
+          <a:lstStyle/>
+          <a:p>
+            <a:pPr algn="ctr"/>
+          </a:p>
+        </p:txBody>
+      </p:sp>
+      <p:sp>
+        <p:nvSpPr>
+          <p:cNvPr id="8" name="TextBox 7"/>
+          <p:cNvSpPr txBox="1"/>
+          <p:nvPr/>
+        </p:nvSpPr>
+        <p:spPr>
+          <a:xfrm>
+            <a:off x="1143000" y="3584448"/>
+            <a:ext cx="9966960" cy="365760"/>
+          </a:xfrm>
+          <a:prstGeom prst="rect">
+            <a:avLst/>
+          </a:prstGeom>
+          <a:noFill/>
+        </p:spPr>
+        <p:txBody>
+          <a:bodyPr wrap="square" anchor="t">
+            <a:spAutoFit/>
+          </a:bodyPr>
+          <a:lstStyle/>
           <a:p>
             <a:pPr algn="l">
               <a:lnSpc>
-                <a:spcPct val="128000"/>
+                <a:spcPct val="100000"/>
               </a:lnSpc>
             </a:pPr>
             <a:r>
-              <a:rPr sz="1700" b="1">
+              <a:rPr sz="1200" b="1">
                 <a:solidFill>
                   <a:srgbClr val="00FF41"/>
                 </a:solidFill>
-                <a:latin typeface="Arial"/>
-              </a:rPr>
-              <a:t>→  </a:t>
-            </a:r>
-            <a:r>
-              <a:rPr sz="1700" b="0">
-                <a:solidFill>
-                  <a:srgbClr val="8A94A6"/>
-                </a:solidFill>
-                <a:latin typeface="Arial"/>
-              </a:rPr>
-              <a:t>How do we operationalize / define the value?  (privacy as control vs. security vs. contextual integrity)</a:t>
-            </a:r>
-          </a:p>
+                <a:latin typeface="Courier New"/>
+              </a:rPr>
+              <a:t>WHAT GOES ON THIS SLIDE  ·  replace the [ … ]</a:t>
+            </a:r>
+          </a:p>
+        </p:txBody>
+      </p:sp>
+      <p:sp>
+        <p:nvSpPr>
+          <p:cNvPr id="9" name="TextBox 8"/>
+          <p:cNvSpPr txBox="1"/>
+          <p:nvPr/>
+        </p:nvSpPr>
+        <p:spPr>
+          <a:xfrm>
+            <a:off x="1143000" y="4133088"/>
+            <a:ext cx="9921240" cy="1554480"/>
+          </a:xfrm>
+          <a:prstGeom prst="rect">
+            <a:avLst/>
+          </a:prstGeom>
+          <a:noFill/>
+        </p:spPr>
+        <p:txBody>
+          <a:bodyPr wrap="square" anchor="t">
+            <a:spAutoFit/>
+          </a:bodyPr>
+          <a:lstStyle/>
           <a:p>
             <a:pPr algn="l">
               <a:lnSpc>
-                <a:spcPct val="128000"/>
+                <a:spcPct val="140000"/>
               </a:lnSpc>
             </a:pPr>
             <a:r>
-              <a:rPr sz="1700" b="1">
+              <a:rPr sz="1800" b="1">
                 <a:solidFill>
                   <a:srgbClr val="00FF41"/>
                 </a:solidFill>
@@ -5335,20 +5463,70 @@
               <a:t>→  </a:t>
             </a:r>
             <a:r>
-              <a:rPr sz="1700" b="0">
-                <a:solidFill>
-                  <a:srgbClr val="8A94A6"/>
-                </a:solidFill>
-                <a:latin typeface="Arial"/>
-              </a:rPr>
-              <a:t>If it is present, users will DO [ ___ ] / UNDERSTAND [ ___ ] / FEEL [ ___ ].</a:t>
-            </a:r>
-          </a:p>
-        </p:txBody>
-      </p:sp>
-      <p:sp>
-        <p:nvSpPr>
-          <p:cNvPr id="7" name="TextBox 6"/>
+              <a:rPr sz="1800" b="0">
+                <a:solidFill>
+                  <a:srgbClr val="F5F7FA"/>
+                </a:solidFill>
+                <a:latin typeface="Arial"/>
+              </a:rPr>
+              <a:t>[ our app in one line ] — and the value it claims</a:t>
+            </a:r>
+          </a:p>
+          <a:p>
+            <a:pPr algn="l">
+              <a:lnSpc>
+                <a:spcPct val="140000"/>
+              </a:lnSpc>
+            </a:pPr>
+            <a:r>
+              <a:rPr sz="1800" b="1">
+                <a:solidFill>
+                  <a:srgbClr val="00FF41"/>
+                </a:solidFill>
+                <a:latin typeface="Arial"/>
+              </a:rPr>
+              <a:t>→  </a:t>
+            </a:r>
+            <a:r>
+              <a:rPr sz="1800" b="0">
+                <a:solidFill>
+                  <a:srgbClr val="F5F7FA"/>
+                </a:solidFill>
+                <a:latin typeface="Arial"/>
+              </a:rPr>
+              <a:t>How we define it (privacy as control vs. security vs. contextual integrity)</a:t>
+            </a:r>
+          </a:p>
+          <a:p>
+            <a:pPr algn="l">
+              <a:lnSpc>
+                <a:spcPct val="140000"/>
+              </a:lnSpc>
+            </a:pPr>
+            <a:r>
+              <a:rPr sz="1800" b="1">
+                <a:solidFill>
+                  <a:srgbClr val="00FF41"/>
+                </a:solidFill>
+                <a:latin typeface="Arial"/>
+              </a:rPr>
+              <a:t>→  </a:t>
+            </a:r>
+            <a:r>
+              <a:rPr sz="1800" b="0">
+                <a:solidFill>
+                  <a:srgbClr val="F5F7FA"/>
+                </a:solidFill>
+                <a:latin typeface="Arial"/>
+              </a:rPr>
+              <a:t>If it's present, users will DO / UNDERSTAND / FEEL [ … ]</a:t>
+            </a:r>
+          </a:p>
+        </p:txBody>
+      </p:sp>
+      <p:sp>
+        <p:nvSpPr>
+          <p:cNvPr id="10" name="TextBox 9"/>
           <p:cNvSpPr txBox="1"/>
           <p:nvPr/>
         </p:nvSpPr>
@@ -5463,8 +5641,8 @@
         </p:nvSpPr>
         <p:spPr>
           <a:xfrm>
-            <a:off x="822960" y="1417320"/>
-            <a:ext cx="2743200" cy="1097280"/>
+            <a:off x="822960" y="566928"/>
+            <a:ext cx="10543032" cy="365760"/>
           </a:xfrm>
           <a:prstGeom prst="rect">
             <a:avLst/>
@@ -5483,13 +5661,13 @@
               </a:lnSpc>
             </a:pPr>
             <a:r>
-              <a:rPr sz="6400" b="1">
+              <a:rPr sz="1300" b="1">
                 <a:solidFill>
                   <a:srgbClr val="00FF41"/>
                 </a:solidFill>
                 <a:latin typeface="Courier New"/>
               </a:rPr>
-              <a:t>02</a:t>
+              <a:t>SECTION 02   ·   FIGJAM: BRAINSTORM 1·2·3 + 02</a:t>
             </a:r>
           </a:p>
         </p:txBody>
@@ -5502,8 +5680,8 @@
         </p:nvSpPr>
         <p:spPr>
           <a:xfrm>
-            <a:off x="841248" y="2487168"/>
-            <a:ext cx="10424160" cy="457200"/>
+            <a:off x="822960" y="1207008"/>
+            <a:ext cx="1737360" cy="1280160"/>
           </a:xfrm>
           <a:prstGeom prst="rect">
             <a:avLst/>
@@ -5522,13 +5700,13 @@
               </a:lnSpc>
             </a:pPr>
             <a:r>
-              <a:rPr sz="1500" b="1">
+              <a:rPr sz="6600" b="1">
                 <a:solidFill>
                   <a:srgbClr val="00FF41"/>
                 </a:solidFill>
                 <a:latin typeface="Courier New"/>
               </a:rPr>
-              <a:t>HOW WOULD WE VERIFY IT?</a:t>
+              <a:t>02</a:t>
             </a:r>
           </a:p>
         </p:txBody>
@@ -5541,8 +5719,8 @@
         </p:nvSpPr>
         <p:spPr>
           <a:xfrm>
-            <a:off x="804672" y="2971800"/>
-            <a:ext cx="10607040" cy="1097280"/>
+            <a:off x="2697480" y="1298448"/>
+            <a:ext cx="8686800" cy="1097280"/>
           </a:xfrm>
           <a:prstGeom prst="rect">
             <a:avLst/>
@@ -5561,13 +5739,13 @@
               </a:lnSpc>
             </a:pPr>
             <a:r>
-              <a:rPr sz="3800" b="1">
+              <a:rPr sz="3000" b="1">
                 <a:solidFill>
                   <a:srgbClr val="F5F7FA"/>
                 </a:solidFill>
                 <a:latin typeface="Arial"/>
               </a:rPr>
-              <a:t>A method per lens + how others measure it  ·  FigJam: Brainstorm 1-2-3 + 02</a:t>
+              <a:t>How would we verify it?</a:t>
             </a:r>
           </a:p>
         </p:txBody>
@@ -5580,8 +5758,8 @@
         </p:nvSpPr>
         <p:spPr>
           <a:xfrm>
-            <a:off x="841248" y="4224528"/>
-            <a:ext cx="10424160" cy="1737360"/>
+            <a:off x="2697480" y="2395728"/>
+            <a:ext cx="8686800" cy="640080"/>
           </a:xfrm>
           <a:prstGeom prst="rect">
             <a:avLst/>
@@ -5596,61 +5774,133 @@
           <a:p>
             <a:pPr algn="l">
               <a:lnSpc>
-                <a:spcPct val="128000"/>
+                <a:spcPct val="110000"/>
               </a:lnSpc>
             </a:pPr>
             <a:r>
-              <a:rPr sz="1700" b="1">
-                <a:solidFill>
-                  <a:srgbClr val="00FF41"/>
-                </a:solidFill>
-                <a:latin typeface="Arial"/>
-              </a:rPr>
-              <a:t>→  </a:t>
-            </a:r>
-            <a:r>
-              <a:rPr sz="1700" b="0">
+              <a:rPr sz="1600" b="0">
                 <a:solidFill>
                   <a:srgbClr val="8A94A6"/>
                 </a:solidFill>
                 <a:latin typeface="Arial"/>
               </a:rPr>
-              <a:t>BEHAVIOR - do users ACT differently?  -&gt;  [ method + metric ].</a:t>
-            </a:r>
-          </a:p>
+              <a:t>One way to check each lens — and how researchers measure it.</a:t>
+            </a:r>
+          </a:p>
+        </p:txBody>
+      </p:sp>
+      <p:sp>
+        <p:nvSpPr>
+          <p:cNvPr id="7" name="Rounded Rectangle 6"/>
+          <p:cNvSpPr/>
+          <p:nvPr/>
+        </p:nvSpPr>
+        <p:spPr>
+          <a:xfrm>
+            <a:off x="822960" y="3310128"/>
+            <a:ext cx="10543032" cy="2606040"/>
+          </a:xfrm>
+          <a:prstGeom prst="roundRect">
+            <a:avLst/>
+          </a:prstGeom>
+          <a:solidFill>
+            <a:srgbClr val="151B26"/>
+          </a:solidFill>
+          <a:ln>
+            <a:noFill/>
+          </a:ln>
+          <a:effectLst/>
+        </p:spPr>
+        <p:style>
+          <a:lnRef idx="1">
+            <a:schemeClr val="accent1"/>
+          </a:lnRef>
+          <a:fillRef idx="3">
+            <a:schemeClr val="accent1"/>
+          </a:fillRef>
+          <a:effectRef idx="2">
+            <a:schemeClr val="accent1"/>
+          </a:effectRef>
+          <a:fontRef idx="minor">
+            <a:schemeClr val="lt1"/>
+          </a:fontRef>
+        </p:style>
+        <p:txBody>
+          <a:bodyPr rtlCol="0" anchor="ctr"/>
+          <a:lstStyle/>
+          <a:p>
+            <a:pPr algn="ctr"/>
+          </a:p>
+        </p:txBody>
+      </p:sp>
+      <p:sp>
+        <p:nvSpPr>
+          <p:cNvPr id="8" name="TextBox 7"/>
+          <p:cNvSpPr txBox="1"/>
+          <p:nvPr/>
+        </p:nvSpPr>
+        <p:spPr>
+          <a:xfrm>
+            <a:off x="1143000" y="3584448"/>
+            <a:ext cx="9966960" cy="365760"/>
+          </a:xfrm>
+          <a:prstGeom prst="rect">
+            <a:avLst/>
+          </a:prstGeom>
+          <a:noFill/>
+        </p:spPr>
+        <p:txBody>
+          <a:bodyPr wrap="square" anchor="t">
+            <a:spAutoFit/>
+          </a:bodyPr>
+          <a:lstStyle/>
           <a:p>
             <a:pPr algn="l">
               <a:lnSpc>
-                <a:spcPct val="128000"/>
+                <a:spcPct val="100000"/>
               </a:lnSpc>
             </a:pPr>
             <a:r>
-              <a:rPr sz="1700" b="1">
+              <a:rPr sz="1200" b="1">
                 <a:solidFill>
                   <a:srgbClr val="00FF41"/>
                 </a:solidFill>
-                <a:latin typeface="Arial"/>
-              </a:rPr>
-              <a:t>→  </a:t>
-            </a:r>
-            <a:r>
-              <a:rPr sz="1700" b="0">
-                <a:solidFill>
-                  <a:srgbClr val="8A94A6"/>
-                </a:solidFill>
-                <a:latin typeface="Arial"/>
-              </a:rPr>
-              <a:t>UNDERSTANDING - do they GRASP the value?  -&gt;  [ method + metric ].</a:t>
-            </a:r>
-          </a:p>
+                <a:latin typeface="Courier New"/>
+              </a:rPr>
+              <a:t>WHAT GOES ON THIS SLIDE  ·  replace the [ … ]</a:t>
+            </a:r>
+          </a:p>
+        </p:txBody>
+      </p:sp>
+      <p:sp>
+        <p:nvSpPr>
+          <p:cNvPr id="9" name="TextBox 8"/>
+          <p:cNvSpPr txBox="1"/>
+          <p:nvPr/>
+        </p:nvSpPr>
+        <p:spPr>
+          <a:xfrm>
+            <a:off x="1143000" y="4133088"/>
+            <a:ext cx="9921240" cy="1554480"/>
+          </a:xfrm>
+          <a:prstGeom prst="rect">
+            <a:avLst/>
+          </a:prstGeom>
+          <a:noFill/>
+        </p:spPr>
+        <p:txBody>
+          <a:bodyPr wrap="square" anchor="t">
+            <a:spAutoFit/>
+          </a:bodyPr>
+          <a:lstStyle/>
           <a:p>
             <a:pPr algn="l">
               <a:lnSpc>
-                <a:spcPct val="128000"/>
+                <a:spcPct val="140000"/>
               </a:lnSpc>
             </a:pPr>
             <a:r>
-              <a:rPr sz="1700" b="1">
+              <a:rPr sz="1800" b="1">
                 <a:solidFill>
                   <a:srgbClr val="00FF41"/>
                 </a:solidFill>
@@ -5659,23 +5909,23 @@
               <a:t>→  </a:t>
             </a:r>
             <a:r>
-              <a:rPr sz="1700" b="0">
-                <a:solidFill>
-                  <a:srgbClr val="8A94A6"/>
-                </a:solidFill>
-                <a:latin typeface="Arial"/>
-              </a:rPr>
-              <a:t>AFFECT - do they FEEL differently?  -&gt;  [ method + metric ].</a:t>
+              <a:rPr sz="1800" b="0">
+                <a:solidFill>
+                  <a:srgbClr val="F5F7FA"/>
+                </a:solidFill>
+                <a:latin typeface="Arial"/>
+              </a:rPr>
+              <a:t>BEHAVIOR: do users ACT differently? → [ method + metric ]</a:t>
             </a:r>
           </a:p>
           <a:p>
             <a:pPr algn="l">
               <a:lnSpc>
-                <a:spcPct val="128000"/>
+                <a:spcPct val="140000"/>
               </a:lnSpc>
             </a:pPr>
             <a:r>
-              <a:rPr sz="1700" b="1">
+              <a:rPr sz="1800" b="1">
                 <a:solidFill>
                   <a:srgbClr val="00FF41"/>
                 </a:solidFill>
@@ -5684,20 +5934,45 @@
               <a:t>→  </a:t>
             </a:r>
             <a:r>
-              <a:rPr sz="1700" b="0">
-                <a:solidFill>
-                  <a:srgbClr val="8A94A6"/>
-                </a:solidFill>
-                <a:latin typeface="Arial"/>
-              </a:rPr>
-              <a:t>How do OTHERS measure it, and which INSTRUMENT would we borrow?  (UEQ / HRI / METUX / slop)</a:t>
-            </a:r>
-          </a:p>
-        </p:txBody>
-      </p:sp>
-      <p:sp>
-        <p:nvSpPr>
-          <p:cNvPr id="7" name="TextBox 6"/>
+              <a:rPr sz="1800" b="0">
+                <a:solidFill>
+                  <a:srgbClr val="F5F7FA"/>
+                </a:solidFill>
+                <a:latin typeface="Arial"/>
+              </a:rPr>
+              <a:t>UNDERSTANDING / AFFECT: do they GRASP / FEEL it? → [ method + metric ]</a:t>
+            </a:r>
+          </a:p>
+          <a:p>
+            <a:pPr algn="l">
+              <a:lnSpc>
+                <a:spcPct val="140000"/>
+              </a:lnSpc>
+            </a:pPr>
+            <a:r>
+              <a:rPr sz="1800" b="1">
+                <a:solidFill>
+                  <a:srgbClr val="00FF41"/>
+                </a:solidFill>
+                <a:latin typeface="Arial"/>
+              </a:rPr>
+              <a:t>→  </a:t>
+            </a:r>
+            <a:r>
+              <a:rPr sz="1800" b="0">
+                <a:solidFill>
+                  <a:srgbClr val="F5F7FA"/>
+                </a:solidFill>
+                <a:latin typeface="Arial"/>
+              </a:rPr>
+              <a:t>An instrument we'd borrow: UEQ / HRI / METUX / slop</a:t>
+            </a:r>
+          </a:p>
+        </p:txBody>
+      </p:sp>
+      <p:sp>
+        <p:nvSpPr>
+          <p:cNvPr id="10" name="TextBox 9"/>
           <p:cNvSpPr txBox="1"/>
           <p:nvPr/>
         </p:nvSpPr>
@@ -5812,8 +6087,8 @@
         </p:nvSpPr>
         <p:spPr>
           <a:xfrm>
-            <a:off x="822960" y="1417320"/>
-            <a:ext cx="2743200" cy="1097280"/>
+            <a:off x="822960" y="566928"/>
+            <a:ext cx="10543032" cy="365760"/>
           </a:xfrm>
           <a:prstGeom prst="rect">
             <a:avLst/>
@@ -5832,13 +6107,13 @@
               </a:lnSpc>
             </a:pPr>
             <a:r>
-              <a:rPr sz="6400" b="1">
+              <a:rPr sz="1300" b="1">
                 <a:solidFill>
                   <a:srgbClr val="00FF41"/>
                 </a:solidFill>
                 <a:latin typeface="Courier New"/>
               </a:rPr>
-              <a:t>03</a:t>
+              <a:t>SECTION 03   ·   FIGJAM: 03 WHAT WE FOUND</a:t>
             </a:r>
           </a:p>
         </p:txBody>
@@ -5851,8 +6126,8 @@
         </p:nvSpPr>
         <p:spPr>
           <a:xfrm>
-            <a:off x="841248" y="2487168"/>
-            <a:ext cx="10424160" cy="457200"/>
+            <a:off x="822960" y="1207008"/>
+            <a:ext cx="1737360" cy="1280160"/>
           </a:xfrm>
           <a:prstGeom prst="rect">
             <a:avLst/>
@@ -5871,13 +6146,13 @@
               </a:lnSpc>
             </a:pPr>
             <a:r>
-              <a:rPr sz="1500" b="1">
+              <a:rPr sz="6600" b="1">
                 <a:solidFill>
                   <a:srgbClr val="00FF41"/>
                 </a:solidFill>
                 <a:latin typeface="Courier New"/>
               </a:rPr>
-              <a:t>WHAT WE FOUND</a:t>
+              <a:t>03</a:t>
             </a:r>
           </a:p>
         </p:txBody>
@@ -5890,8 +6165,8 @@
         </p:nvSpPr>
         <p:spPr>
           <a:xfrm>
-            <a:off x="804672" y="2971800"/>
-            <a:ext cx="10607040" cy="1097280"/>
+            <a:off x="2697480" y="1298448"/>
+            <a:ext cx="8686800" cy="1097280"/>
           </a:xfrm>
           <a:prstGeom prst="rect">
             <a:avLst/>
@@ -5910,13 +6185,13 @@
               </a:lnSpc>
             </a:pPr>
             <a:r>
-              <a:rPr sz="3800" b="1">
+              <a:rPr sz="3000" b="1">
                 <a:solidFill>
                   <a:srgbClr val="F5F7FA"/>
                 </a:solidFill>
                 <a:latin typeface="Arial"/>
               </a:rPr>
-              <a:t>Run the check - speculate with a partner if needed  ·  FigJam: 03</a:t>
+              <a:t>What we found</a:t>
             </a:r>
           </a:p>
         </p:txBody>
@@ -5929,8 +6204,8 @@
         </p:nvSpPr>
         <p:spPr>
           <a:xfrm>
-            <a:off x="841248" y="4224528"/>
-            <a:ext cx="10424160" cy="1737360"/>
+            <a:off x="2697480" y="2395728"/>
+            <a:ext cx="8686800" cy="640080"/>
           </a:xfrm>
           <a:prstGeom prst="rect">
             <a:avLst/>
@@ -5945,61 +6220,133 @@
           <a:p>
             <a:pPr algn="l">
               <a:lnSpc>
-                <a:spcPct val="128000"/>
+                <a:spcPct val="110000"/>
               </a:lnSpc>
             </a:pPr>
             <a:r>
-              <a:rPr sz="1700" b="1">
-                <a:solidFill>
-                  <a:srgbClr val="00FF41"/>
-                </a:solidFill>
-                <a:latin typeface="Arial"/>
-              </a:rPr>
-              <a:t>→  </a:t>
-            </a:r>
-            <a:r>
-              <a:rPr sz="1700" b="0">
+              <a:rPr sz="1600" b="0">
                 <a:solidFill>
                   <a:srgbClr val="8A94A6"/>
                 </a:solidFill>
                 <a:latin typeface="Arial"/>
               </a:rPr>
-              <a:t>Apply your metrics with a partner - it is fine to SPECULATE today; real verification takes time.</a:t>
-            </a:r>
-          </a:p>
+              <a:t>A quick partner check — speculating is fine; a real study takes time.</a:t>
+            </a:r>
+          </a:p>
+        </p:txBody>
+      </p:sp>
+      <p:sp>
+        <p:nvSpPr>
+          <p:cNvPr id="7" name="Rounded Rectangle 6"/>
+          <p:cNvSpPr/>
+          <p:nvPr/>
+        </p:nvSpPr>
+        <p:spPr>
+          <a:xfrm>
+            <a:off x="822960" y="3310128"/>
+            <a:ext cx="10543032" cy="2606040"/>
+          </a:xfrm>
+          <a:prstGeom prst="roundRect">
+            <a:avLst/>
+          </a:prstGeom>
+          <a:solidFill>
+            <a:srgbClr val="151B26"/>
+          </a:solidFill>
+          <a:ln>
+            <a:noFill/>
+          </a:ln>
+          <a:effectLst/>
+        </p:spPr>
+        <p:style>
+          <a:lnRef idx="1">
+            <a:schemeClr val="accent1"/>
+          </a:lnRef>
+          <a:fillRef idx="3">
+            <a:schemeClr val="accent1"/>
+          </a:fillRef>
+          <a:effectRef idx="2">
+            <a:schemeClr val="accent1"/>
+          </a:effectRef>
+          <a:fontRef idx="minor">
+            <a:schemeClr val="lt1"/>
+          </a:fontRef>
+        </p:style>
+        <p:txBody>
+          <a:bodyPr rtlCol="0" anchor="ctr"/>
+          <a:lstStyle/>
+          <a:p>
+            <a:pPr algn="ctr"/>
+          </a:p>
+        </p:txBody>
+      </p:sp>
+      <p:sp>
+        <p:nvSpPr>
+          <p:cNvPr id="8" name="TextBox 7"/>
+          <p:cNvSpPr txBox="1"/>
+          <p:nvPr/>
+        </p:nvSpPr>
+        <p:spPr>
+          <a:xfrm>
+            <a:off x="1143000" y="3584448"/>
+            <a:ext cx="9966960" cy="365760"/>
+          </a:xfrm>
+          <a:prstGeom prst="rect">
+            <a:avLst/>
+          </a:prstGeom>
+          <a:noFill/>
+        </p:spPr>
+        <p:txBody>
+          <a:bodyPr wrap="square" anchor="t">
+            <a:spAutoFit/>
+          </a:bodyPr>
+          <a:lstStyle/>
           <a:p>
             <a:pPr algn="l">
               <a:lnSpc>
-                <a:spcPct val="128000"/>
+                <a:spcPct val="100000"/>
               </a:lnSpc>
             </a:pPr>
             <a:r>
-              <a:rPr sz="1700" b="1">
+              <a:rPr sz="1200" b="1">
                 <a:solidFill>
                   <a:srgbClr val="00FF41"/>
                 </a:solidFill>
-                <a:latin typeface="Arial"/>
-              </a:rPr>
-              <a:t>→  </a:t>
-            </a:r>
-            <a:r>
-              <a:rPr sz="1700" b="0">
-                <a:solidFill>
-                  <a:srgbClr val="8A94A6"/>
-                </a:solidFill>
-                <a:latin typeface="Arial"/>
-              </a:rPr>
-              <a:t>BEHAVIOR: do they ACT differently?   UNDERSTANDING: do they GRASP it?   AFFECT: do they FEEL differently?</a:t>
-            </a:r>
-          </a:p>
+                <a:latin typeface="Courier New"/>
+              </a:rPr>
+              <a:t>WHAT GOES ON THIS SLIDE  ·  replace the [ … ]</a:t>
+            </a:r>
+          </a:p>
+        </p:txBody>
+      </p:sp>
+      <p:sp>
+        <p:nvSpPr>
+          <p:cNvPr id="9" name="TextBox 8"/>
+          <p:cNvSpPr txBox="1"/>
+          <p:nvPr/>
+        </p:nvSpPr>
+        <p:spPr>
+          <a:xfrm>
+            <a:off x="1143000" y="4133088"/>
+            <a:ext cx="9921240" cy="1554480"/>
+          </a:xfrm>
+          <a:prstGeom prst="rect">
+            <a:avLst/>
+          </a:prstGeom>
+          <a:noFill/>
+        </p:spPr>
+        <p:txBody>
+          <a:bodyPr wrap="square" anchor="t">
+            <a:spAutoFit/>
+          </a:bodyPr>
+          <a:lstStyle/>
           <a:p>
             <a:pPr algn="l">
               <a:lnSpc>
-                <a:spcPct val="128000"/>
+                <a:spcPct val="140000"/>
               </a:lnSpc>
             </a:pPr>
             <a:r>
-              <a:rPr sz="1700" b="1">
+              <a:rPr sz="1800" b="1">
                 <a:solidFill>
                   <a:srgbClr val="00FF41"/>
                 </a:solidFill>
@@ -6008,20 +6355,70 @@
               <a:t>→  </a:t>
             </a:r>
             <a:r>
-              <a:rPr sz="1700" b="0">
-                <a:solidFill>
-                  <a:srgbClr val="8A94A6"/>
-                </a:solidFill>
-                <a:latin typeface="Arial"/>
-              </a:rPr>
-              <a:t>Green = it works.  Red = it does not.  Does the design move the value - for whom, and who is left out?</a:t>
-            </a:r>
-          </a:p>
-        </p:txBody>
-      </p:sp>
-      <p:sp>
-        <p:nvSpPr>
-          <p:cNvPr id="7" name="TextBox 6"/>
+              <a:rPr sz="1800" b="0">
+                <a:solidFill>
+                  <a:srgbClr val="F5F7FA"/>
+                </a:solidFill>
+                <a:latin typeface="Arial"/>
+              </a:rPr>
+              <a:t>Do they ACT / GRASP / FEEL differently? [ what we saw ]</a:t>
+            </a:r>
+          </a:p>
+          <a:p>
+            <a:pPr algn="l">
+              <a:lnSpc>
+                <a:spcPct val="140000"/>
+              </a:lnSpc>
+            </a:pPr>
+            <a:r>
+              <a:rPr sz="1800" b="1">
+                <a:solidFill>
+                  <a:srgbClr val="00FF41"/>
+                </a:solidFill>
+                <a:latin typeface="Arial"/>
+              </a:rPr>
+              <a:t>→  </a:t>
+            </a:r>
+            <a:r>
+              <a:rPr sz="1800" b="0">
+                <a:solidFill>
+                  <a:srgbClr val="F5F7FA"/>
+                </a:solidFill>
+                <a:latin typeface="Arial"/>
+              </a:rPr>
+              <a:t>Green = it works   ·   Red = it doesn't</a:t>
+            </a:r>
+          </a:p>
+          <a:p>
+            <a:pPr algn="l">
+              <a:lnSpc>
+                <a:spcPct val="140000"/>
+              </a:lnSpc>
+            </a:pPr>
+            <a:r>
+              <a:rPr sz="1800" b="1">
+                <a:solidFill>
+                  <a:srgbClr val="00FF41"/>
+                </a:solidFill>
+                <a:latin typeface="Arial"/>
+              </a:rPr>
+              <a:t>→  </a:t>
+            </a:r>
+            <a:r>
+              <a:rPr sz="1800" b="0">
+                <a:solidFill>
+                  <a:srgbClr val="F5F7FA"/>
+                </a:solidFill>
+                <a:latin typeface="Arial"/>
+              </a:rPr>
+              <a:t>Does it move the value — for whom, and who's left out?</a:t>
+            </a:r>
+          </a:p>
+        </p:txBody>
+      </p:sp>
+      <p:sp>
+        <p:nvSpPr>
+          <p:cNvPr id="10" name="TextBox 9"/>
           <p:cNvSpPr txBox="1"/>
           <p:nvPr/>
         </p:nvSpPr>
@@ -6136,8 +6533,8 @@
         </p:nvSpPr>
         <p:spPr>
           <a:xfrm>
-            <a:off x="822960" y="1417320"/>
-            <a:ext cx="2743200" cy="1097280"/>
+            <a:off x="822960" y="566928"/>
+            <a:ext cx="10543032" cy="365760"/>
           </a:xfrm>
           <a:prstGeom prst="rect">
             <a:avLst/>
@@ -6156,13 +6553,13 @@
               </a:lnSpc>
             </a:pPr>
             <a:r>
-              <a:rPr sz="6400" b="1">
+              <a:rPr sz="1300" b="1">
                 <a:solidFill>
                   <a:srgbClr val="00FF41"/>
                 </a:solidFill>
                 <a:latin typeface="Courier New"/>
               </a:rPr>
-              <a:t>04</a:t>
+              <a:t>SECTION 04   ·   FIGJAM: 04 OUTLOOK</a:t>
             </a:r>
           </a:p>
         </p:txBody>
@@ -6175,8 +6572,8 @@
         </p:nvSpPr>
         <p:spPr>
           <a:xfrm>
-            <a:off x="841248" y="2487168"/>
-            <a:ext cx="10424160" cy="457200"/>
+            <a:off x="822960" y="1207008"/>
+            <a:ext cx="1737360" cy="1280160"/>
           </a:xfrm>
           <a:prstGeom prst="rect">
             <a:avLst/>
@@ -6195,13 +6592,13 @@
               </a:lnSpc>
             </a:pPr>
             <a:r>
-              <a:rPr sz="1500" b="1">
+              <a:rPr sz="6600" b="1">
                 <a:solidFill>
                   <a:srgbClr val="00FF41"/>
                 </a:solidFill>
                 <a:latin typeface="Courier New"/>
               </a:rPr>
-              <a:t>WHAT RELATED RESEARCH FOUND</a:t>
+              <a:t>04</a:t>
             </a:r>
           </a:p>
         </p:txBody>
@@ -6214,8 +6611,8 @@
         </p:nvSpPr>
         <p:spPr>
           <a:xfrm>
-            <a:off x="804672" y="2971800"/>
-            <a:ext cx="10607040" cy="1097280"/>
+            <a:off x="2697480" y="1298448"/>
+            <a:ext cx="8686800" cy="1097280"/>
           </a:xfrm>
           <a:prstGeom prst="rect">
             <a:avLst/>
@@ -6234,13 +6631,13 @@
               </a:lnSpc>
             </a:pPr>
             <a:r>
-              <a:rPr sz="3800" b="1">
+              <a:rPr sz="3000" b="1">
                 <a:solidFill>
                   <a:srgbClr val="F5F7FA"/>
                 </a:solidFill>
                 <a:latin typeface="Arial"/>
               </a:rPr>
-              <a:t>Each member READS one real paper  ·  FigJam: 04 Outlook  ·  the named slides follow</a:t>
+              <a:t>What related research found</a:t>
             </a:r>
           </a:p>
         </p:txBody>
@@ -6253,8 +6650,8 @@
         </p:nvSpPr>
         <p:spPr>
           <a:xfrm>
-            <a:off x="841248" y="4224528"/>
-            <a:ext cx="10424160" cy="1737360"/>
+            <a:off x="2697480" y="2395728"/>
+            <a:ext cx="8686800" cy="640080"/>
           </a:xfrm>
           <a:prstGeom prst="rect">
             <a:avLst/>
@@ -6269,61 +6666,133 @@
           <a:p>
             <a:pPr algn="l">
               <a:lnSpc>
-                <a:spcPct val="128000"/>
+                <a:spcPct val="110000"/>
               </a:lnSpc>
             </a:pPr>
             <a:r>
-              <a:rPr sz="1700" b="1">
-                <a:solidFill>
-                  <a:srgbClr val="00FF41"/>
-                </a:solidFill>
-                <a:latin typeface="Arial"/>
-              </a:rPr>
-              <a:t>→  </a:t>
-            </a:r>
-            <a:r>
-              <a:rPr sz="1700" b="0">
+              <a:rPr sz="1600" b="0">
                 <a:solidFill>
                   <a:srgbClr val="8A94A6"/>
                 </a:solidFill>
                 <a:latin typeface="Arial"/>
               </a:rPr>
-              <a:t>Each member presents their OWN paper - found via AI academic search (Claude / ChatGPT / Elicit / Semantic Scholar / Scholar Labs), then READ.</a:t>
-            </a:r>
-          </a:p>
+              <a:t>Each member reads one real paper — a named slide each follows this header.</a:t>
+            </a:r>
+          </a:p>
+        </p:txBody>
+      </p:sp>
+      <p:sp>
+        <p:nvSpPr>
+          <p:cNvPr id="7" name="Rounded Rectangle 6"/>
+          <p:cNvSpPr/>
+          <p:nvPr/>
+        </p:nvSpPr>
+        <p:spPr>
+          <a:xfrm>
+            <a:off x="822960" y="3310128"/>
+            <a:ext cx="10543032" cy="2606040"/>
+          </a:xfrm>
+          <a:prstGeom prst="roundRect">
+            <a:avLst/>
+          </a:prstGeom>
+          <a:solidFill>
+            <a:srgbClr val="151B26"/>
+          </a:solidFill>
+          <a:ln>
+            <a:noFill/>
+          </a:ln>
+          <a:effectLst/>
+        </p:spPr>
+        <p:style>
+          <a:lnRef idx="1">
+            <a:schemeClr val="accent1"/>
+          </a:lnRef>
+          <a:fillRef idx="3">
+            <a:schemeClr val="accent1"/>
+          </a:fillRef>
+          <a:effectRef idx="2">
+            <a:schemeClr val="accent1"/>
+          </a:effectRef>
+          <a:fontRef idx="minor">
+            <a:schemeClr val="lt1"/>
+          </a:fontRef>
+        </p:style>
+        <p:txBody>
+          <a:bodyPr rtlCol="0" anchor="ctr"/>
+          <a:lstStyle/>
+          <a:p>
+            <a:pPr algn="ctr"/>
+          </a:p>
+        </p:txBody>
+      </p:sp>
+      <p:sp>
+        <p:nvSpPr>
+          <p:cNvPr id="8" name="TextBox 7"/>
+          <p:cNvSpPr txBox="1"/>
+          <p:nvPr/>
+        </p:nvSpPr>
+        <p:spPr>
+          <a:xfrm>
+            <a:off x="1143000" y="3584448"/>
+            <a:ext cx="9966960" cy="365760"/>
+          </a:xfrm>
+          <a:prstGeom prst="rect">
+            <a:avLst/>
+          </a:prstGeom>
+          <a:noFill/>
+        </p:spPr>
+        <p:txBody>
+          <a:bodyPr wrap="square" anchor="t">
+            <a:spAutoFit/>
+          </a:bodyPr>
+          <a:lstStyle/>
           <a:p>
             <a:pPr algn="l">
               <a:lnSpc>
-                <a:spcPct val="128000"/>
+                <a:spcPct val="100000"/>
               </a:lnSpc>
             </a:pPr>
             <a:r>
-              <a:rPr sz="1700" b="1">
+              <a:rPr sz="1200" b="1">
                 <a:solidFill>
                   <a:srgbClr val="00FF41"/>
                 </a:solidFill>
-                <a:latin typeface="Arial"/>
-              </a:rPr>
-              <a:t>→  </a:t>
-            </a:r>
-            <a:r>
-              <a:rPr sz="1700" b="0">
-                <a:solidFill>
-                  <a:srgbClr val="8A94A6"/>
-                </a:solidFill>
-                <a:latin typeface="Arial"/>
-              </a:rPr>
-              <a:t>Source (author, year)  -  what WORKED  -  what FAILED (avoid this).</a:t>
-            </a:r>
-          </a:p>
+                <a:latin typeface="Courier New"/>
+              </a:rPr>
+              <a:t>WHAT GOES ON THIS SLIDE  ·  replace the [ … ]</a:t>
+            </a:r>
+          </a:p>
+        </p:txBody>
+      </p:sp>
+      <p:sp>
+        <p:nvSpPr>
+          <p:cNvPr id="9" name="TextBox 8"/>
+          <p:cNvSpPr txBox="1"/>
+          <p:nvPr/>
+        </p:nvSpPr>
+        <p:spPr>
+          <a:xfrm>
+            <a:off x="1143000" y="4133088"/>
+            <a:ext cx="9921240" cy="1554480"/>
+          </a:xfrm>
+          <a:prstGeom prst="rect">
+            <a:avLst/>
+          </a:prstGeom>
+          <a:noFill/>
+        </p:spPr>
+        <p:txBody>
+          <a:bodyPr wrap="square" anchor="t">
+            <a:spAutoFit/>
+          </a:bodyPr>
+          <a:lstStyle/>
           <a:p>
             <a:pPr algn="l">
               <a:lnSpc>
-                <a:spcPct val="128000"/>
+                <a:spcPct val="140000"/>
               </a:lnSpc>
             </a:pPr>
             <a:r>
-              <a:rPr sz="1700" b="1">
+              <a:rPr sz="1800" b="1">
                 <a:solidFill>
                   <a:srgbClr val="00FF41"/>
                 </a:solidFill>
@@ -6332,20 +6801,70 @@
               <a:t>→  </a:t>
             </a:r>
             <a:r>
-              <a:rPr sz="1700" b="0">
-                <a:solidFill>
-                  <a:srgbClr val="8A94A6"/>
-                </a:solidFill>
-                <a:latin typeface="Arial"/>
-              </a:rPr>
-              <a:t>Real papers only, actually read - never invent a citation, never rely on an AI summary alone.</a:t>
-            </a:r>
-          </a:p>
-        </p:txBody>
-      </p:sp>
-      <p:sp>
-        <p:nvSpPr>
-          <p:cNvPr id="7" name="TextBox 6"/>
+              <a:rPr sz="1800" b="0">
+                <a:solidFill>
+                  <a:srgbClr val="F5F7FA"/>
+                </a:solidFill>
+                <a:latin typeface="Arial"/>
+              </a:rPr>
+              <a:t>Find via AI search (Claude · ChatGPT · Elicit · Semantic Scholar · Scholar Labs), then READ it</a:t>
+            </a:r>
+          </a:p>
+          <a:p>
+            <a:pPr algn="l">
+              <a:lnSpc>
+                <a:spcPct val="140000"/>
+              </a:lnSpc>
+            </a:pPr>
+            <a:r>
+              <a:rPr sz="1800" b="1">
+                <a:solidFill>
+                  <a:srgbClr val="00FF41"/>
+                </a:solidFill>
+                <a:latin typeface="Arial"/>
+              </a:rPr>
+              <a:t>→  </a:t>
+            </a:r>
+            <a:r>
+              <a:rPr sz="1800" b="0">
+                <a:solidFill>
+                  <a:srgbClr val="F5F7FA"/>
+                </a:solidFill>
+                <a:latin typeface="Arial"/>
+              </a:rPr>
+              <a:t>Source (author, year) · what WORKED · what FAILED</a:t>
+            </a:r>
+          </a:p>
+          <a:p>
+            <a:pPr algn="l">
+              <a:lnSpc>
+                <a:spcPct val="140000"/>
+              </a:lnSpc>
+            </a:pPr>
+            <a:r>
+              <a:rPr sz="1800" b="1">
+                <a:solidFill>
+                  <a:srgbClr val="00FF41"/>
+                </a:solidFill>
+                <a:latin typeface="Arial"/>
+              </a:rPr>
+              <a:t>→  </a:t>
+            </a:r>
+            <a:r>
+              <a:rPr sz="1800" b="0">
+                <a:solidFill>
+                  <a:srgbClr val="F5F7FA"/>
+                </a:solidFill>
+                <a:latin typeface="Arial"/>
+              </a:rPr>
+              <a:t>Real papers only — never invent a citation</a:t>
+            </a:r>
+          </a:p>
+        </p:txBody>
+      </p:sp>
+      <p:sp>
+        <p:nvSpPr>
+          <p:cNvPr id="10" name="TextBox 9"/>
           <p:cNvSpPr txBox="1"/>
           <p:nvPr/>
         </p:nvSpPr>
@@ -6442,7 +6961,7 @@
                 </a:solidFill>
                 <a:latin typeface="Courier New"/>
               </a:rPr>
-              <a:t>04.1  ·  YOUR PAPER (your individual contribution)</a:t>
+              <a:t>04.1   ·   YOUR PAPER  (your individual contribution)</a:t>
             </a:r>
           </a:p>
         </p:txBody>
@@ -6499,8 +7018,8 @@
         </p:nvSpPr>
         <p:spPr>
           <a:xfrm>
-            <a:off x="640080" y="1170432"/>
-            <a:ext cx="10972800" cy="914400"/>
+            <a:off x="822960" y="1207008"/>
+            <a:ext cx="10515600" cy="914400"/>
           </a:xfrm>
           <a:prstGeom prst="rect">
             <a:avLst/>
@@ -6538,8 +7057,8 @@
         </p:nvSpPr>
         <p:spPr>
           <a:xfrm>
-            <a:off x="658368" y="2286000"/>
-            <a:ext cx="10881360" cy="2834640"/>
+            <a:off x="841248" y="2084831"/>
+            <a:ext cx="10424160" cy="457200"/>
           </a:xfrm>
           <a:prstGeom prst="rect">
             <a:avLst/>
@@ -6554,101 +7073,17 @@
           <a:p>
             <a:pPr algn="l">
               <a:lnSpc>
-                <a:spcPct val="134000"/>
+                <a:spcPct val="100000"/>
               </a:lnSpc>
             </a:pPr>
             <a:r>
-              <a:rPr sz="1900" b="1">
-                <a:solidFill>
-                  <a:srgbClr val="00FF41"/>
-                </a:solidFill>
-                <a:latin typeface="Arial"/>
-              </a:rPr>
-              <a:t>→  </a:t>
-            </a:r>
-            <a:r>
-              <a:rPr sz="1900" b="0">
-                <a:solidFill>
-                  <a:srgbClr val="F5F7FA"/>
-                </a:solidFill>
-                <a:latin typeface="Arial"/>
-              </a:rPr>
-              <a:t>The paper you found + READ - [ author, year, title ]  (AI search to FIND it; then read the actual paper)</a:t>
-            </a:r>
-          </a:p>
-          <a:p>
-            <a:pPr algn="l">
-              <a:lnSpc>
-                <a:spcPct val="134000"/>
-              </a:lnSpc>
-            </a:pPr>
-            <a:r>
-              <a:rPr sz="1900" b="1">
-                <a:solidFill>
-                  <a:srgbClr val="00FF41"/>
-                </a:solidFill>
-                <a:latin typeface="Arial"/>
-              </a:rPr>
-              <a:t>→  </a:t>
-            </a:r>
-            <a:r>
-              <a:rPr sz="1900" b="0">
-                <a:solidFill>
-                  <a:srgbClr val="F5F7FA"/>
-                </a:solidFill>
-                <a:latin typeface="Arial"/>
-              </a:rPr>
-              <a:t>The design intervention they tried to move THIS value - [ what they did ]</a:t>
-            </a:r>
-          </a:p>
-          <a:p>
-            <a:pPr algn="l">
-              <a:lnSpc>
-                <a:spcPct val="134000"/>
-              </a:lnSpc>
-            </a:pPr>
-            <a:r>
-              <a:rPr sz="1900" b="1">
-                <a:solidFill>
-                  <a:srgbClr val="00FF41"/>
-                </a:solidFill>
-                <a:latin typeface="Arial"/>
-              </a:rPr>
-              <a:t>→  </a:t>
-            </a:r>
-            <a:r>
-              <a:rPr sz="1900" b="0">
-                <a:solidFill>
-                  <a:srgbClr val="F5F7FA"/>
-                </a:solidFill>
-                <a:latin typeface="Arial"/>
-              </a:rPr>
-              <a:t>What WORKED - [ ___ ]     |     What FAILED / to avoid - [ ___ ]</a:t>
-            </a:r>
-          </a:p>
-          <a:p>
-            <a:pPr algn="l">
-              <a:lnSpc>
-                <a:spcPct val="134000"/>
-              </a:lnSpc>
-            </a:pPr>
-            <a:r>
-              <a:rPr sz="1900" b="1">
-                <a:solidFill>
-                  <a:srgbClr val="00FF41"/>
-                </a:solidFill>
-                <a:latin typeface="Arial"/>
-              </a:rPr>
-              <a:t>→  </a:t>
-            </a:r>
-            <a:r>
-              <a:rPr sz="1900" b="0">
-                <a:solidFill>
-                  <a:srgbClr val="F5F7FA"/>
-                </a:solidFill>
-                <a:latin typeface="Arial"/>
-              </a:rPr>
-              <a:t>Does it support or challenge our design direction? - [ ___ ]</a:t>
+              <a:rPr sz="1600" b="0">
+                <a:solidFill>
+                  <a:srgbClr val="8A94A6"/>
+                </a:solidFill>
+                <a:latin typeface="Arial"/>
+              </a:rPr>
+              <a:t>The paper you found via AI search — and actually READ (not just the AI summary).</a:t>
             </a:r>
           </a:p>
         </p:txBody>
@@ -6661,8 +7096,8 @@
         </p:nvSpPr>
         <p:spPr>
           <a:xfrm>
-            <a:off x="640080" y="5440680"/>
-            <a:ext cx="10881360" cy="658368"/>
+            <a:off x="822960" y="2743200"/>
+            <a:ext cx="10543032" cy="2606040"/>
           </a:xfrm>
           <a:prstGeom prst="roundRect">
             <a:avLst/>
@@ -6670,10 +7105,8 @@
           <a:solidFill>
             <a:srgbClr val="151B26"/>
           </a:solidFill>
-          <a:ln w="19050">
-            <a:solidFill>
-              <a:srgbClr val="00FF41"/>
-            </a:solidFill>
+          <a:ln>
+            <a:noFill/>
           </a:ln>
           <a:effectLst/>
         </p:spPr>
@@ -6707,8 +7140,8 @@
         </p:nvSpPr>
         <p:spPr>
           <a:xfrm>
-            <a:off x="914400" y="5440680"/>
-            <a:ext cx="10332720" cy="658368"/>
+            <a:off x="1143000" y="3127248"/>
+            <a:ext cx="9921240" cy="1965960"/>
           </a:xfrm>
           <a:prstGeom prst="rect">
             <a:avLst/>
@@ -6716,7 +7149,105 @@
           <a:noFill/>
         </p:spPr>
         <p:txBody>
-          <a:bodyPr wrap="square" anchor="ctr">
+          <a:bodyPr wrap="square" anchor="t">
+            <a:spAutoFit/>
+          </a:bodyPr>
+          <a:lstStyle/>
+          <a:p>
+            <a:pPr algn="l">
+              <a:lnSpc>
+                <a:spcPct val="150000"/>
+              </a:lnSpc>
+            </a:pPr>
+            <a:r>
+              <a:rPr sz="1900" b="1">
+                <a:solidFill>
+                  <a:srgbClr val="00FF41"/>
+                </a:solidFill>
+                <a:latin typeface="Arial"/>
+              </a:rPr>
+              <a:t>→  </a:t>
+            </a:r>
+            <a:r>
+              <a:rPr sz="1900" b="0">
+                <a:solidFill>
+                  <a:srgbClr val="F5F7FA"/>
+                </a:solidFill>
+                <a:latin typeface="Arial"/>
+              </a:rPr>
+              <a:t>The paper — [ author, year, title ]</a:t>
+            </a:r>
+          </a:p>
+          <a:p>
+            <a:pPr algn="l">
+              <a:lnSpc>
+                <a:spcPct val="150000"/>
+              </a:lnSpc>
+            </a:pPr>
+            <a:r>
+              <a:rPr sz="1900" b="1">
+                <a:solidFill>
+                  <a:srgbClr val="00FF41"/>
+                </a:solidFill>
+                <a:latin typeface="Arial"/>
+              </a:rPr>
+              <a:t>→  </a:t>
+            </a:r>
+            <a:r>
+              <a:rPr sz="1900" b="0">
+                <a:solidFill>
+                  <a:srgbClr val="F5F7FA"/>
+                </a:solidFill>
+                <a:latin typeface="Arial"/>
+              </a:rPr>
+              <a:t>What WORKED — [ … ]     |     What FAILED / to avoid — [ … ]</a:t>
+            </a:r>
+          </a:p>
+          <a:p>
+            <a:pPr algn="l">
+              <a:lnSpc>
+                <a:spcPct val="150000"/>
+              </a:lnSpc>
+            </a:pPr>
+            <a:r>
+              <a:rPr sz="1900" b="1">
+                <a:solidFill>
+                  <a:srgbClr val="00FF41"/>
+                </a:solidFill>
+                <a:latin typeface="Arial"/>
+              </a:rPr>
+              <a:t>→  </a:t>
+            </a:r>
+            <a:r>
+              <a:rPr sz="1900" b="0">
+                <a:solidFill>
+                  <a:srgbClr val="F5F7FA"/>
+                </a:solidFill>
+                <a:latin typeface="Arial"/>
+              </a:rPr>
+              <a:t>Supports or challenges our design direction? — [ … ]</a:t>
+            </a:r>
+          </a:p>
+        </p:txBody>
+      </p:sp>
+      <p:sp>
+        <p:nvSpPr>
+          <p:cNvPr id="8" name="TextBox 7"/>
+          <p:cNvSpPr txBox="1"/>
+          <p:nvPr/>
+        </p:nvSpPr>
+        <p:spPr>
+          <a:xfrm>
+            <a:off x="822960" y="5623560"/>
+            <a:ext cx="10515600" cy="365760"/>
+          </a:xfrm>
+          <a:prstGeom prst="rect">
+            <a:avLst/>
+          </a:prstGeom>
+          <a:noFill/>
+        </p:spPr>
+        <p:txBody>
+          <a:bodyPr wrap="square" anchor="t">
             <a:spAutoFit/>
           </a:bodyPr>
           <a:lstStyle/>
@@ -6727,29 +7258,20 @@
               </a:lnSpc>
             </a:pPr>
             <a:r>
-              <a:rPr sz="1600" b="1">
-                <a:solidFill>
-                  <a:srgbClr val="00FF41"/>
-                </a:solidFill>
-                <a:latin typeface="Arial"/>
-              </a:rPr>
-              <a:t>▸  </a:t>
-            </a:r>
-            <a:r>
-              <a:rPr sz="1500" b="1">
-                <a:solidFill>
-                  <a:srgbClr val="F5F7FA"/>
-                </a:solidFill>
-                <a:latin typeface="Arial"/>
-              </a:rPr>
-              <a:t>This slide is yours - the paper you actually read. Add more behind it if you need to - keep your name on them.</a:t>
-            </a:r>
-          </a:p>
-        </p:txBody>
-      </p:sp>
-      <p:sp>
-        <p:nvSpPr>
-          <p:cNvPr id="8" name="TextBox 7"/>
+              <a:rPr sz="1300" b="0">
+                <a:solidFill>
+                  <a:srgbClr val="5A6474"/>
+                </a:solidFill>
+                <a:latin typeface="Courier New"/>
+              </a:rPr>
+              <a:t>▸  This slide is yours — add more behind it if you need to, keep your name on them.</a:t>
+            </a:r>
+          </a:p>
+        </p:txBody>
+      </p:sp>
+      <p:sp>
+        <p:nvSpPr>
+          <p:cNvPr id="9" name="TextBox 8"/>
           <p:cNvSpPr txBox="1"/>
           <p:nvPr/>
         </p:nvSpPr>
@@ -6846,7 +7368,7 @@
                 </a:solidFill>
                 <a:latin typeface="Courier New"/>
               </a:rPr>
-              <a:t>04.2  ·  YOUR PAPER (your individual contribution)</a:t>
+              <a:t>04.2   ·   YOUR PAPER  (your individual contribution)</a:t>
             </a:r>
           </a:p>
         </p:txBody>
@@ -6903,8 +7425,8 @@
         </p:nvSpPr>
         <p:spPr>
           <a:xfrm>
-            <a:off x="640080" y="1170432"/>
-            <a:ext cx="10972800" cy="914400"/>
+            <a:off x="822960" y="1207008"/>
+            <a:ext cx="10515600" cy="914400"/>
           </a:xfrm>
           <a:prstGeom prst="rect">
             <a:avLst/>
@@ -6942,8 +7464,8 @@
         </p:nvSpPr>
         <p:spPr>
           <a:xfrm>
-            <a:off x="658368" y="2286000"/>
-            <a:ext cx="10881360" cy="2834640"/>
+            <a:off x="841248" y="2084831"/>
+            <a:ext cx="10424160" cy="457200"/>
           </a:xfrm>
           <a:prstGeom prst="rect">
             <a:avLst/>
@@ -6958,101 +7480,17 @@
           <a:p>
             <a:pPr algn="l">
               <a:lnSpc>
-                <a:spcPct val="134000"/>
+                <a:spcPct val="100000"/>
               </a:lnSpc>
             </a:pPr>
             <a:r>
-              <a:rPr sz="1900" b="1">
-                <a:solidFill>
-                  <a:srgbClr val="00FF41"/>
-                </a:solidFill>
-                <a:latin typeface="Arial"/>
-              </a:rPr>
-              <a:t>→  </a:t>
-            </a:r>
-            <a:r>
-              <a:rPr sz="1900" b="0">
-                <a:solidFill>
-                  <a:srgbClr val="F5F7FA"/>
-                </a:solidFill>
-                <a:latin typeface="Arial"/>
-              </a:rPr>
-              <a:t>The paper you found + READ - [ author, year, title ]  (AI search to FIND it; then read the actual paper)</a:t>
-            </a:r>
-          </a:p>
-          <a:p>
-            <a:pPr algn="l">
-              <a:lnSpc>
-                <a:spcPct val="134000"/>
-              </a:lnSpc>
-            </a:pPr>
-            <a:r>
-              <a:rPr sz="1900" b="1">
-                <a:solidFill>
-                  <a:srgbClr val="00FF41"/>
-                </a:solidFill>
-                <a:latin typeface="Arial"/>
-              </a:rPr>
-              <a:t>→  </a:t>
-            </a:r>
-            <a:r>
-              <a:rPr sz="1900" b="0">
-                <a:solidFill>
-                  <a:srgbClr val="F5F7FA"/>
-                </a:solidFill>
-                <a:latin typeface="Arial"/>
-              </a:rPr>
-              <a:t>The design intervention they tried to move THIS value - [ what they did ]</a:t>
-            </a:r>
-          </a:p>
-          <a:p>
-            <a:pPr algn="l">
-              <a:lnSpc>
-                <a:spcPct val="134000"/>
-              </a:lnSpc>
-            </a:pPr>
-            <a:r>
-              <a:rPr sz="1900" b="1">
-                <a:solidFill>
-                  <a:srgbClr val="00FF41"/>
-                </a:solidFill>
-                <a:latin typeface="Arial"/>
-              </a:rPr>
-              <a:t>→  </a:t>
-            </a:r>
-            <a:r>
-              <a:rPr sz="1900" b="0">
-                <a:solidFill>
-                  <a:srgbClr val="F5F7FA"/>
-                </a:solidFill>
-                <a:latin typeface="Arial"/>
-              </a:rPr>
-              <a:t>What WORKED - [ ___ ]     |     What FAILED / to avoid - [ ___ ]</a:t>
-            </a:r>
-          </a:p>
-          <a:p>
-            <a:pPr algn="l">
-              <a:lnSpc>
-                <a:spcPct val="134000"/>
-              </a:lnSpc>
-            </a:pPr>
-            <a:r>
-              <a:rPr sz="1900" b="1">
-                <a:solidFill>
-                  <a:srgbClr val="00FF41"/>
-                </a:solidFill>
-                <a:latin typeface="Arial"/>
-              </a:rPr>
-              <a:t>→  </a:t>
-            </a:r>
-            <a:r>
-              <a:rPr sz="1900" b="0">
-                <a:solidFill>
-                  <a:srgbClr val="F5F7FA"/>
-                </a:solidFill>
-                <a:latin typeface="Arial"/>
-              </a:rPr>
-              <a:t>Does it support or challenge our design direction? - [ ___ ]</a:t>
+              <a:rPr sz="1600" b="0">
+                <a:solidFill>
+                  <a:srgbClr val="8A94A6"/>
+                </a:solidFill>
+                <a:latin typeface="Arial"/>
+              </a:rPr>
+              <a:t>The paper you found via AI search — and actually READ (not just the AI summary).</a:t>
             </a:r>
           </a:p>
         </p:txBody>
@@ -7065,8 +7503,8 @@
         </p:nvSpPr>
         <p:spPr>
           <a:xfrm>
-            <a:off x="640080" y="5440680"/>
-            <a:ext cx="10881360" cy="658368"/>
+            <a:off x="822960" y="2743200"/>
+            <a:ext cx="10543032" cy="2606040"/>
           </a:xfrm>
           <a:prstGeom prst="roundRect">
             <a:avLst/>
@@ -7074,10 +7512,8 @@
           <a:solidFill>
             <a:srgbClr val="151B26"/>
           </a:solidFill>
-          <a:ln w="19050">
-            <a:solidFill>
-              <a:srgbClr val="00FF41"/>
-            </a:solidFill>
+          <a:ln>
+            <a:noFill/>
           </a:ln>
           <a:effectLst/>
         </p:spPr>
@@ -7111,8 +7547,8 @@
         </p:nvSpPr>
         <p:spPr>
           <a:xfrm>
-            <a:off x="914400" y="5440680"/>
-            <a:ext cx="10332720" cy="658368"/>
+            <a:off x="1143000" y="3127248"/>
+            <a:ext cx="9921240" cy="1965960"/>
           </a:xfrm>
           <a:prstGeom prst="rect">
             <a:avLst/>
@@ -7120,7 +7556,105 @@
           <a:noFill/>
         </p:spPr>
         <p:txBody>
-          <a:bodyPr wrap="square" anchor="ctr">
+          <a:bodyPr wrap="square" anchor="t">
+            <a:spAutoFit/>
+          </a:bodyPr>
+          <a:lstStyle/>
+          <a:p>
+            <a:pPr algn="l">
+              <a:lnSpc>
+                <a:spcPct val="150000"/>
+              </a:lnSpc>
+            </a:pPr>
+            <a:r>
+              <a:rPr sz="1900" b="1">
+                <a:solidFill>
+                  <a:srgbClr val="00FF41"/>
+                </a:solidFill>
+                <a:latin typeface="Arial"/>
+              </a:rPr>
+              <a:t>→  </a:t>
+            </a:r>
+            <a:r>
+              <a:rPr sz="1900" b="0">
+                <a:solidFill>
+                  <a:srgbClr val="F5F7FA"/>
+                </a:solidFill>
+                <a:latin typeface="Arial"/>
+              </a:rPr>
+              <a:t>The paper — [ author, year, title ]</a:t>
+            </a:r>
+          </a:p>
+          <a:p>
+            <a:pPr algn="l">
+              <a:lnSpc>
+                <a:spcPct val="150000"/>
+              </a:lnSpc>
+            </a:pPr>
+            <a:r>
+              <a:rPr sz="1900" b="1">
+                <a:solidFill>
+                  <a:srgbClr val="00FF41"/>
+                </a:solidFill>
+                <a:latin typeface="Arial"/>
+              </a:rPr>
+              <a:t>→  </a:t>
+            </a:r>
+            <a:r>
+              <a:rPr sz="1900" b="0">
+                <a:solidFill>
+                  <a:srgbClr val="F5F7FA"/>
+                </a:solidFill>
+                <a:latin typeface="Arial"/>
+              </a:rPr>
+              <a:t>What WORKED — [ … ]     |     What FAILED / to avoid — [ … ]</a:t>
+            </a:r>
+          </a:p>
+          <a:p>
+            <a:pPr algn="l">
+              <a:lnSpc>
+                <a:spcPct val="150000"/>
+              </a:lnSpc>
+            </a:pPr>
+            <a:r>
+              <a:rPr sz="1900" b="1">
+                <a:solidFill>
+                  <a:srgbClr val="00FF41"/>
+                </a:solidFill>
+                <a:latin typeface="Arial"/>
+              </a:rPr>
+              <a:t>→  </a:t>
+            </a:r>
+            <a:r>
+              <a:rPr sz="1900" b="0">
+                <a:solidFill>
+                  <a:srgbClr val="F5F7FA"/>
+                </a:solidFill>
+                <a:latin typeface="Arial"/>
+              </a:rPr>
+              <a:t>Supports or challenges our design direction? — [ … ]</a:t>
+            </a:r>
+          </a:p>
+        </p:txBody>
+      </p:sp>
+      <p:sp>
+        <p:nvSpPr>
+          <p:cNvPr id="8" name="TextBox 7"/>
+          <p:cNvSpPr txBox="1"/>
+          <p:nvPr/>
+        </p:nvSpPr>
+        <p:spPr>
+          <a:xfrm>
+            <a:off x="822960" y="5623560"/>
+            <a:ext cx="10515600" cy="365760"/>
+          </a:xfrm>
+          <a:prstGeom prst="rect">
+            <a:avLst/>
+          </a:prstGeom>
+          <a:noFill/>
+        </p:spPr>
+        <p:txBody>
+          <a:bodyPr wrap="square" anchor="t">
             <a:spAutoFit/>
           </a:bodyPr>
           <a:lstStyle/>
@@ -7131,29 +7665,20 @@
               </a:lnSpc>
             </a:pPr>
             <a:r>
-              <a:rPr sz="1600" b="1">
-                <a:solidFill>
-                  <a:srgbClr val="00FF41"/>
-                </a:solidFill>
-                <a:latin typeface="Arial"/>
-              </a:rPr>
-              <a:t>▸  </a:t>
-            </a:r>
-            <a:r>
-              <a:rPr sz="1500" b="1">
-                <a:solidFill>
-                  <a:srgbClr val="F5F7FA"/>
-                </a:solidFill>
-                <a:latin typeface="Arial"/>
-              </a:rPr>
-              <a:t>This slide is yours - the paper you actually read. Add more behind it if you need to - keep your name on them.</a:t>
-            </a:r>
-          </a:p>
-        </p:txBody>
-      </p:sp>
-      <p:sp>
-        <p:nvSpPr>
-          <p:cNvPr id="8" name="TextBox 7"/>
+              <a:rPr sz="1300" b="0">
+                <a:solidFill>
+                  <a:srgbClr val="5A6474"/>
+                </a:solidFill>
+                <a:latin typeface="Courier New"/>
+              </a:rPr>
+              <a:t>▸  This slide is yours — add more behind it if you need to, keep your name on them.</a:t>
+            </a:r>
+          </a:p>
+        </p:txBody>
+      </p:sp>
+      <p:sp>
+        <p:nvSpPr>
+          <p:cNvPr id="9" name="TextBox 8"/>
           <p:cNvSpPr txBox="1"/>
           <p:nvPr/>
         </p:nvSpPr>
@@ -7268,8 +7793,8 @@
         </p:nvSpPr>
         <p:spPr>
           <a:xfrm>
-            <a:off x="822960" y="1417320"/>
-            <a:ext cx="2743200" cy="1097280"/>
+            <a:off x="822960" y="566928"/>
+            <a:ext cx="10543032" cy="365760"/>
           </a:xfrm>
           <a:prstGeom prst="rect">
             <a:avLst/>
@@ -7288,13 +7813,13 @@
               </a:lnSpc>
             </a:pPr>
             <a:r>
-              <a:rPr sz="6400" b="1">
+              <a:rPr sz="1300" b="1">
                 <a:solidFill>
                   <a:srgbClr val="00FF41"/>
                 </a:solidFill>
                 <a:latin typeface="Courier New"/>
               </a:rPr>
-              <a:t>05</a:t>
+              <a:t>SECTION 05   ·   FIGJAM: 05 SO WHAT</a:t>
             </a:r>
           </a:p>
         </p:txBody>
@@ -7307,8 +7832,8 @@
         </p:nvSpPr>
         <p:spPr>
           <a:xfrm>
-            <a:off x="841248" y="2487168"/>
-            <a:ext cx="10424160" cy="457200"/>
+            <a:off x="822960" y="1207008"/>
+            <a:ext cx="1737360" cy="1280160"/>
           </a:xfrm>
           <a:prstGeom prst="rect">
             <a:avLst/>
@@ -7327,13 +7852,13 @@
               </a:lnSpc>
             </a:pPr>
             <a:r>
-              <a:rPr sz="1500" b="1">
+              <a:rPr sz="6600" b="1">
                 <a:solidFill>
                   <a:srgbClr val="00FF41"/>
                 </a:solidFill>
                 <a:latin typeface="Courier New"/>
               </a:rPr>
-              <a:t>SO WHAT - OUR NEXT DESIGN DIRECTION</a:t>
+              <a:t>05</a:t>
             </a:r>
           </a:p>
         </p:txBody>
@@ -7346,8 +7871,8 @@
         </p:nvSpPr>
         <p:spPr>
           <a:xfrm>
-            <a:off x="804672" y="2971800"/>
-            <a:ext cx="10607040" cy="1097280"/>
+            <a:off x="2697480" y="1298448"/>
+            <a:ext cx="8686800" cy="1097280"/>
           </a:xfrm>
           <a:prstGeom prst="rect">
             <a:avLst/>
@@ -7366,13 +7891,13 @@
               </a:lnSpc>
             </a:pPr>
             <a:r>
-              <a:rPr sz="3800" b="1">
+              <a:rPr sz="3000" b="1">
                 <a:solidFill>
                   <a:srgbClr val="F5F7FA"/>
                 </a:solidFill>
                 <a:latin typeface="Arial"/>
               </a:rPr>
-              <a:t>Verification opens the next design  ·  FigJam: 05  ·  carry into Wednesday</a:t>
+              <a:t>So what — our next design direction</a:t>
             </a:r>
           </a:p>
         </p:txBody>
@@ -7385,8 +7910,8 @@
         </p:nvSpPr>
         <p:spPr>
           <a:xfrm>
-            <a:off x="841248" y="4224528"/>
-            <a:ext cx="10424160" cy="1737360"/>
+            <a:off x="2697480" y="2395728"/>
+            <a:ext cx="8686800" cy="640080"/>
           </a:xfrm>
           <a:prstGeom prst="rect">
             <a:avLst/>
@@ -7401,61 +7926,133 @@
           <a:p>
             <a:pPr algn="l">
               <a:lnSpc>
-                <a:spcPct val="128000"/>
+                <a:spcPct val="110000"/>
               </a:lnSpc>
             </a:pPr>
             <a:r>
-              <a:rPr sz="1700" b="1">
-                <a:solidFill>
-                  <a:srgbClr val="00FF41"/>
-                </a:solidFill>
-                <a:latin typeface="Arial"/>
-              </a:rPr>
-              <a:t>→  </a:t>
-            </a:r>
-            <a:r>
-              <a:rPr sz="1700" b="0">
+              <a:rPr sz="1600" b="0">
                 <a:solidFill>
                   <a:srgbClr val="8A94A6"/>
                 </a:solidFill>
                 <a:latin typeface="Arial"/>
               </a:rPr>
-              <a:t>If the design does NOT move the value, what WOULD?  Another design that could achieve it.</a:t>
-            </a:r>
-          </a:p>
+              <a:t>If the design doesn't move the value, what would? This starts Wednesday.</a:t>
+            </a:r>
+          </a:p>
+        </p:txBody>
+      </p:sp>
+      <p:sp>
+        <p:nvSpPr>
+          <p:cNvPr id="7" name="Rounded Rectangle 6"/>
+          <p:cNvSpPr/>
+          <p:nvPr/>
+        </p:nvSpPr>
+        <p:spPr>
+          <a:xfrm>
+            <a:off x="822960" y="3310128"/>
+            <a:ext cx="10543032" cy="2606040"/>
+          </a:xfrm>
+          <a:prstGeom prst="roundRect">
+            <a:avLst/>
+          </a:prstGeom>
+          <a:solidFill>
+            <a:srgbClr val="151B26"/>
+          </a:solidFill>
+          <a:ln>
+            <a:noFill/>
+          </a:ln>
+          <a:effectLst/>
+        </p:spPr>
+        <p:style>
+          <a:lnRef idx="1">
+            <a:schemeClr val="accent1"/>
+          </a:lnRef>
+          <a:fillRef idx="3">
+            <a:schemeClr val="accent1"/>
+          </a:fillRef>
+          <a:effectRef idx="2">
+            <a:schemeClr val="accent1"/>
+          </a:effectRef>
+          <a:fontRef idx="minor">
+            <a:schemeClr val="lt1"/>
+          </a:fontRef>
+        </p:style>
+        <p:txBody>
+          <a:bodyPr rtlCol="0" anchor="ctr"/>
+          <a:lstStyle/>
+          <a:p>
+            <a:pPr algn="ctr"/>
+          </a:p>
+        </p:txBody>
+      </p:sp>
+      <p:sp>
+        <p:nvSpPr>
+          <p:cNvPr id="8" name="TextBox 7"/>
+          <p:cNvSpPr txBox="1"/>
+          <p:nvPr/>
+        </p:nvSpPr>
+        <p:spPr>
+          <a:xfrm>
+            <a:off x="1143000" y="3584448"/>
+            <a:ext cx="9966960" cy="365760"/>
+          </a:xfrm>
+          <a:prstGeom prst="rect">
+            <a:avLst/>
+          </a:prstGeom>
+          <a:noFill/>
+        </p:spPr>
+        <p:txBody>
+          <a:bodyPr wrap="square" anchor="t">
+            <a:spAutoFit/>
+          </a:bodyPr>
+          <a:lstStyle/>
           <a:p>
             <a:pPr algn="l">
               <a:lnSpc>
-                <a:spcPct val="128000"/>
+                <a:spcPct val="100000"/>
               </a:lnSpc>
             </a:pPr>
             <a:r>
-              <a:rPr sz="1700" b="1">
+              <a:rPr sz="1200" b="1">
                 <a:solidFill>
                   <a:srgbClr val="00FF41"/>
                 </a:solidFill>
-                <a:latin typeface="Arial"/>
-              </a:rPr>
-              <a:t>→  </a:t>
-            </a:r>
-            <a:r>
-              <a:rPr sz="1700" b="0">
-                <a:solidFill>
-                  <a:srgbClr val="8A94A6"/>
-                </a:solidFill>
-                <a:latin typeface="Arial"/>
-              </a:rPr>
-              <a:t>What should the next cycle discover?</a:t>
-            </a:r>
-          </a:p>
+                <a:latin typeface="Courier New"/>
+              </a:rPr>
+              <a:t>WHAT GOES ON THIS SLIDE  ·  replace the [ … ]</a:t>
+            </a:r>
+          </a:p>
+        </p:txBody>
+      </p:sp>
+      <p:sp>
+        <p:nvSpPr>
+          <p:cNvPr id="9" name="TextBox 8"/>
+          <p:cNvSpPr txBox="1"/>
+          <p:nvPr/>
+        </p:nvSpPr>
+        <p:spPr>
+          <a:xfrm>
+            <a:off x="1143000" y="4133088"/>
+            <a:ext cx="9921240" cy="1554480"/>
+          </a:xfrm>
+          <a:prstGeom prst="rect">
+            <a:avLst/>
+          </a:prstGeom>
+          <a:noFill/>
+        </p:spPr>
+        <p:txBody>
+          <a:bodyPr wrap="square" anchor="t">
+            <a:spAutoFit/>
+          </a:bodyPr>
+          <a:lstStyle/>
           <a:p>
             <a:pPr algn="l">
               <a:lnSpc>
-                <a:spcPct val="128000"/>
+                <a:spcPct val="140000"/>
               </a:lnSpc>
             </a:pPr>
             <a:r>
-              <a:rPr sz="1700" b="1">
+              <a:rPr sz="1800" b="1">
                 <a:solidFill>
                   <a:srgbClr val="00FF41"/>
                 </a:solidFill>
@@ -7464,20 +8061,70 @@
               <a:t>→  </a:t>
             </a:r>
             <a:r>
-              <a:rPr sz="1700" b="0">
-                <a:solidFill>
-                  <a:srgbClr val="8A94A6"/>
-                </a:solidFill>
-                <a:latin typeface="Arial"/>
-              </a:rPr>
-              <a:t>2-3 directions the evidence points to - you carry these into Wednesday.</a:t>
-            </a:r>
-          </a:p>
-        </p:txBody>
-      </p:sp>
-      <p:sp>
-        <p:nvSpPr>
-          <p:cNvPr id="7" name="TextBox 6"/>
+              <a:rPr sz="1800" b="0">
+                <a:solidFill>
+                  <a:srgbClr val="F5F7FA"/>
+                </a:solidFill>
+                <a:latin typeface="Arial"/>
+              </a:rPr>
+              <a:t>Another design that could achieve the value</a:t>
+            </a:r>
+          </a:p>
+          <a:p>
+            <a:pPr algn="l">
+              <a:lnSpc>
+                <a:spcPct val="140000"/>
+              </a:lnSpc>
+            </a:pPr>
+            <a:r>
+              <a:rPr sz="1800" b="1">
+                <a:solidFill>
+                  <a:srgbClr val="00FF41"/>
+                </a:solidFill>
+                <a:latin typeface="Arial"/>
+              </a:rPr>
+              <a:t>→  </a:t>
+            </a:r>
+            <a:r>
+              <a:rPr sz="1800" b="0">
+                <a:solidFill>
+                  <a:srgbClr val="F5F7FA"/>
+                </a:solidFill>
+                <a:latin typeface="Arial"/>
+              </a:rPr>
+              <a:t>What the next cycle should discover</a:t>
+            </a:r>
+          </a:p>
+          <a:p>
+            <a:pPr algn="l">
+              <a:lnSpc>
+                <a:spcPct val="140000"/>
+              </a:lnSpc>
+            </a:pPr>
+            <a:r>
+              <a:rPr sz="1800" b="1">
+                <a:solidFill>
+                  <a:srgbClr val="00FF41"/>
+                </a:solidFill>
+                <a:latin typeface="Arial"/>
+              </a:rPr>
+              <a:t>→  </a:t>
+            </a:r>
+            <a:r>
+              <a:rPr sz="1800" b="0">
+                <a:solidFill>
+                  <a:srgbClr val="F5F7FA"/>
+                </a:solidFill>
+                <a:latin typeface="Arial"/>
+              </a:rPr>
+              <a:t>2–3 directions the evidence points to</a:t>
+            </a:r>
+          </a:p>
+        </p:txBody>
+      </p:sp>
+      <p:sp>
+        <p:nvSpPr>
+          <p:cNvPr id="10" name="TextBox 9"/>
           <p:cNvSpPr txBox="1"/>
           <p:nvPr/>
         </p:nvSpPr>
